--- a/output/wordlabs-take-3day.pptx
+++ b/output/wordlabs-take-3day.pptx
@@ -5622,7 +5622,7 @@
                 <a:ea typeface="Trebuchet MS" pitchFamily="34" charset="-122"/>
                 <a:cs typeface="Trebuchet MS" pitchFamily="34" charset="-120"/>
               </a:rPr>
-              <a:t>2</a:t>
+              <a:t>1</a:t>
             </a:r>
             <a:pPr algn="ctr" indent="0" marL="0">
               <a:buNone/>
@@ -5636,7 +5636,7 @@
                 <a:ea typeface="Trebuchet MS" pitchFamily="34" charset="-122"/>
                 <a:cs typeface="Trebuchet MS" pitchFamily="34" charset="-120"/>
               </a:rPr>
-              <a:t>  punctuation marks</a:t>
+              <a:t>  punctuation mark</a:t>
             </a:r>
             <a:endParaRPr lang="en-US" sz="2800" dirty="0"/>
           </a:p>
@@ -6040,7 +6040,7 @@
                 <a:ea typeface="Calibri" pitchFamily="34" charset="-122"/>
                 <a:cs typeface="Calibri" pitchFamily="34" charset="-120"/>
               </a:rPr>
-              <a:t>Did the champion </a:t>
+              <a:t>The company planned a </a:t>
             </a:r>
             <a:pPr algn="l" indent="0" marL="0">
               <a:buNone/>
@@ -6057,7 +6057,7 @@
                 <a:ea typeface="Calibri" pitchFamily="34" charset="-122"/>
                 <a:cs typeface="Calibri" pitchFamily="34" charset="-120"/>
               </a:rPr>
-              <a:t>overtake</a:t>
+              <a:t>takeover</a:t>
             </a:r>
             <a:pPr algn="l" indent="0" marL="0">
               <a:buNone/>
@@ -6071,7 +6071,7 @@
                 <a:ea typeface="Calibri" pitchFamily="34" charset="-122"/>
                 <a:cs typeface="Calibri" pitchFamily="34" charset="-120"/>
               </a:rPr>
-              <a:t> the leader, or was she </a:t>
+              <a:t>, but the manager warned staff not to </a:t>
             </a:r>
             <a:pPr algn="l" indent="0" marL="0">
               <a:buNone/>
@@ -6088,7 +6088,7 @@
                 <a:ea typeface="Calibri" pitchFamily="34" charset="-122"/>
                 <a:cs typeface="Calibri" pitchFamily="34" charset="-120"/>
               </a:rPr>
-              <a:t>mistaken</a:t>
+              <a:t>mistake</a:t>
             </a:r>
             <a:pPr algn="l" indent="0" marL="0">
               <a:buNone/>
@@ -6102,7 +6102,7 @@
                 <a:ea typeface="Calibri" pitchFamily="34" charset="-122"/>
                 <a:cs typeface="Calibri" pitchFamily="34" charset="-120"/>
               </a:rPr>
-              <a:t> about the final lap?</a:t>
+              <a:t> the changes for something negative.</a:t>
             </a:r>
             <a:endParaRPr lang="en-US" sz="1800" dirty="0"/>
           </a:p>
@@ -6257,7 +6257,7 @@
                 <a:ea typeface="Trebuchet MS" pitchFamily="34" charset="-122"/>
                 <a:cs typeface="Trebuchet MS" pitchFamily="34" charset="-120"/>
               </a:rPr>
-              <a:t>overtake</a:t>
+              <a:t>takeover</a:t>
             </a:r>
             <a:endParaRPr lang="en-US" sz="1400" dirty="0"/>
           </a:p>
@@ -6385,7 +6385,7 @@
                 <a:ea typeface="Trebuchet MS" pitchFamily="34" charset="-122"/>
                 <a:cs typeface="Trebuchet MS" pitchFamily="34" charset="-120"/>
               </a:rPr>
-              <a:t>mistaken</a:t>
+              <a:t>mistake</a:t>
             </a:r>
             <a:endParaRPr lang="en-US" sz="1400" dirty="0"/>
           </a:p>
@@ -6855,7 +6855,7 @@
                 <a:ea typeface="Trebuchet MS" pitchFamily="34" charset="-122"/>
                 <a:cs typeface="Trebuchet MS" pitchFamily="34" charset="-120"/>
               </a:rPr>
-              <a:t>overtake</a:t>
+              <a:t>takeover</a:t>
             </a:r>
             <a:endParaRPr lang="en-US" sz="2800" dirty="0"/>
           </a:p>
@@ -7682,7 +7682,7 @@
                 <a:ea typeface="Trebuchet MS" pitchFamily="34" charset="-122"/>
                 <a:cs typeface="Trebuchet MS" pitchFamily="34" charset="-120"/>
               </a:rPr>
-              <a:t>overtake</a:t>
+              <a:t>takeover</a:t>
             </a:r>
             <a:endParaRPr lang="en-US" sz="2800" dirty="0"/>
           </a:p>
@@ -7771,11 +7771,11 @@
             </a:avLst>
           </a:prstGeom>
           <a:solidFill>
-            <a:srgbClr val="DDD6FE"/>
+            <a:srgbClr val="CCFBF1"/>
           </a:solidFill>
           <a:ln w="19050">
             <a:solidFill>
-              <a:srgbClr val="7C3AED"/>
+              <a:srgbClr val="0D9488"/>
             </a:solidFill>
             <a:prstDash val="solid"/>
           </a:ln>
@@ -7815,13 +7815,13 @@
             <a:r>
               <a:rPr lang="en-US" sz="1300" b="1" dirty="0">
                 <a:solidFill>
-                  <a:srgbClr val="4C1D95"/>
+                  <a:srgbClr val="0F766E"/>
                 </a:solidFill>
                 <a:latin typeface="Trebuchet MS" pitchFamily="34" charset="0"/>
                 <a:ea typeface="Trebuchet MS" pitchFamily="34" charset="-122"/>
                 <a:cs typeface="Trebuchet MS" pitchFamily="34" charset="-120"/>
               </a:rPr>
-              <a:t>over</a:t>
+              <a:t>take</a:t>
             </a:r>
             <a:endParaRPr lang="en-US" sz="1300" dirty="0"/>
           </a:p>
@@ -7860,7 +7860,7 @@
                 <a:ea typeface="Calibri" pitchFamily="34" charset="-122"/>
                 <a:cs typeface="Calibri" pitchFamily="34" charset="-120"/>
               </a:rPr>
-              <a:t>above, beyond</a:t>
+              <a:t>to seize or receive</a:t>
             </a:r>
             <a:endParaRPr lang="en-US" sz="850" dirty="0"/>
           </a:p>
@@ -7883,11 +7883,11 @@
             </a:avLst>
           </a:prstGeom>
           <a:solidFill>
-            <a:srgbClr val="CCFBF1"/>
+            <a:srgbClr val="FCE7F3"/>
           </a:solidFill>
           <a:ln w="19050">
             <a:solidFill>
-              <a:srgbClr val="0D9488"/>
+              <a:srgbClr val="DB2777"/>
             </a:solidFill>
             <a:prstDash val="solid"/>
           </a:ln>
@@ -7927,13 +7927,13 @@
             <a:r>
               <a:rPr lang="en-US" sz="1300" b="1" dirty="0">
                 <a:solidFill>
-                  <a:srgbClr val="0F766E"/>
+                  <a:srgbClr val="9D174D"/>
                 </a:solidFill>
                 <a:latin typeface="Trebuchet MS" pitchFamily="34" charset="0"/>
                 <a:ea typeface="Trebuchet MS" pitchFamily="34" charset="-122"/>
                 <a:cs typeface="Trebuchet MS" pitchFamily="34" charset="-120"/>
               </a:rPr>
-              <a:t>take</a:t>
+              <a:t>over</a:t>
             </a:r>
             <a:endParaRPr lang="en-US" sz="1300" dirty="0"/>
           </a:p>
@@ -7972,7 +7972,7 @@
                 <a:ea typeface="Calibri" pitchFamily="34" charset="-122"/>
                 <a:cs typeface="Calibri" pitchFamily="34" charset="-120"/>
               </a:rPr>
-              <a:t>to seize or grasp</a:t>
+              <a:t>above, across, or in control</a:t>
             </a:r>
             <a:endParaRPr lang="en-US" sz="850" dirty="0"/>
           </a:p>
@@ -8667,7 +8667,7 @@
                 <a:ea typeface="Trebuchet MS" pitchFamily="34" charset="-122"/>
                 <a:cs typeface="Trebuchet MS" pitchFamily="34" charset="-120"/>
               </a:rPr>
-              <a:t>overtake</a:t>
+              <a:t>takeover</a:t>
             </a:r>
             <a:endParaRPr lang="en-US" sz="2800" dirty="0"/>
           </a:p>
@@ -8756,11 +8756,11 @@
             </a:avLst>
           </a:prstGeom>
           <a:solidFill>
-            <a:srgbClr val="DDD6FE"/>
+            <a:srgbClr val="CCFBF1"/>
           </a:solidFill>
           <a:ln w="19050">
             <a:solidFill>
-              <a:srgbClr val="7C3AED"/>
+              <a:srgbClr val="0D9488"/>
             </a:solidFill>
             <a:prstDash val="solid"/>
           </a:ln>
@@ -8800,13 +8800,13 @@
             <a:r>
               <a:rPr lang="en-US" sz="1300" b="1" dirty="0">
                 <a:solidFill>
-                  <a:srgbClr val="4C1D95"/>
+                  <a:srgbClr val="0F766E"/>
                 </a:solidFill>
                 <a:latin typeface="Trebuchet MS" pitchFamily="34" charset="0"/>
                 <a:ea typeface="Trebuchet MS" pitchFamily="34" charset="-122"/>
                 <a:cs typeface="Trebuchet MS" pitchFamily="34" charset="-120"/>
               </a:rPr>
-              <a:t>over</a:t>
+              <a:t>take</a:t>
             </a:r>
             <a:endParaRPr lang="en-US" sz="1300" dirty="0"/>
           </a:p>
@@ -8845,7 +8845,7 @@
                 <a:ea typeface="Calibri" pitchFamily="34" charset="-122"/>
                 <a:cs typeface="Calibri" pitchFamily="34" charset="-120"/>
               </a:rPr>
-              <a:t>above, beyond</a:t>
+              <a:t>to seize or receive</a:t>
             </a:r>
             <a:endParaRPr lang="en-US" sz="850" dirty="0"/>
           </a:p>
@@ -8868,11 +8868,11 @@
             </a:avLst>
           </a:prstGeom>
           <a:solidFill>
-            <a:srgbClr val="CCFBF1"/>
+            <a:srgbClr val="FCE7F3"/>
           </a:solidFill>
           <a:ln w="19050">
             <a:solidFill>
-              <a:srgbClr val="0D9488"/>
+              <a:srgbClr val="DB2777"/>
             </a:solidFill>
             <a:prstDash val="solid"/>
           </a:ln>
@@ -8912,13 +8912,13 @@
             <a:r>
               <a:rPr lang="en-US" sz="1300" b="1" dirty="0">
                 <a:solidFill>
-                  <a:srgbClr val="0F766E"/>
+                  <a:srgbClr val="9D174D"/>
                 </a:solidFill>
                 <a:latin typeface="Trebuchet MS" pitchFamily="34" charset="0"/>
                 <a:ea typeface="Trebuchet MS" pitchFamily="34" charset="-122"/>
                 <a:cs typeface="Trebuchet MS" pitchFamily="34" charset="-120"/>
               </a:rPr>
-              <a:t>take</a:t>
+              <a:t>over</a:t>
             </a:r>
             <a:endParaRPr lang="en-US" sz="1300" dirty="0"/>
           </a:p>
@@ -8957,7 +8957,7 @@
                 <a:ea typeface="Calibri" pitchFamily="34" charset="-122"/>
                 <a:cs typeface="Calibri" pitchFamily="34" charset="-120"/>
               </a:rPr>
-              <a:t>to seize or grasp</a:t>
+              <a:t>above, across, or in control</a:t>
             </a:r>
             <a:endParaRPr lang="en-US" sz="850" dirty="0"/>
           </a:p>
@@ -9116,7 +9116,7 @@
                 <a:ea typeface="Trebuchet MS" pitchFamily="34" charset="-122"/>
                 <a:cs typeface="Trebuchet MS" pitchFamily="34" charset="-120"/>
               </a:rPr>
-              <a:t>o</a:t>
+              <a:t>take</a:t>
             </a:r>
             <a:endParaRPr lang="en-US" sz="1400" dirty="0"/>
           </a:p>
@@ -9221,7 +9221,7 @@
                 <a:ea typeface="Trebuchet MS" pitchFamily="34" charset="-122"/>
                 <a:cs typeface="Trebuchet MS" pitchFamily="34" charset="-120"/>
               </a:rPr>
-              <a:t>ver</a:t>
+              <a:t>o</a:t>
             </a:r>
             <a:endParaRPr lang="en-US" sz="1400" dirty="0"/>
           </a:p>
@@ -9326,7 +9326,7 @@
                 <a:ea typeface="Trebuchet MS" pitchFamily="34" charset="-122"/>
                 <a:cs typeface="Trebuchet MS" pitchFamily="34" charset="-120"/>
               </a:rPr>
-              <a:t>take</a:t>
+              <a:t>ver</a:t>
             </a:r>
             <a:endParaRPr lang="en-US" sz="1400" dirty="0"/>
           </a:p>
@@ -9889,7 +9889,7 @@
                 <a:ea typeface="Trebuchet MS" pitchFamily="34" charset="-122"/>
                 <a:cs typeface="Trebuchet MS" pitchFamily="34" charset="-120"/>
               </a:rPr>
-              <a:t>overtake</a:t>
+              <a:t>takeover</a:t>
             </a:r>
             <a:endParaRPr lang="en-US" sz="2800" dirty="0"/>
           </a:p>
@@ -9978,11 +9978,11 @@
             </a:avLst>
           </a:prstGeom>
           <a:solidFill>
-            <a:srgbClr val="DDD6FE"/>
+            <a:srgbClr val="CCFBF1"/>
           </a:solidFill>
           <a:ln w="19050">
             <a:solidFill>
-              <a:srgbClr val="7C3AED"/>
+              <a:srgbClr val="0D9488"/>
             </a:solidFill>
             <a:prstDash val="solid"/>
           </a:ln>
@@ -10022,13 +10022,13 @@
             <a:r>
               <a:rPr lang="en-US" sz="1300" b="1" dirty="0">
                 <a:solidFill>
-                  <a:srgbClr val="4C1D95"/>
+                  <a:srgbClr val="0F766E"/>
                 </a:solidFill>
                 <a:latin typeface="Trebuchet MS" pitchFamily="34" charset="0"/>
                 <a:ea typeface="Trebuchet MS" pitchFamily="34" charset="-122"/>
                 <a:cs typeface="Trebuchet MS" pitchFamily="34" charset="-120"/>
               </a:rPr>
-              <a:t>over</a:t>
+              <a:t>take</a:t>
             </a:r>
             <a:endParaRPr lang="en-US" sz="1300" dirty="0"/>
           </a:p>
@@ -10067,7 +10067,7 @@
                 <a:ea typeface="Calibri" pitchFamily="34" charset="-122"/>
                 <a:cs typeface="Calibri" pitchFamily="34" charset="-120"/>
               </a:rPr>
-              <a:t>above, beyond</a:t>
+              <a:t>to seize or receive</a:t>
             </a:r>
             <a:endParaRPr lang="en-US" sz="850" dirty="0"/>
           </a:p>
@@ -10090,11 +10090,11 @@
             </a:avLst>
           </a:prstGeom>
           <a:solidFill>
-            <a:srgbClr val="CCFBF1"/>
+            <a:srgbClr val="FCE7F3"/>
           </a:solidFill>
           <a:ln w="19050">
             <a:solidFill>
-              <a:srgbClr val="0D9488"/>
+              <a:srgbClr val="DB2777"/>
             </a:solidFill>
             <a:prstDash val="solid"/>
           </a:ln>
@@ -10134,13 +10134,13 @@
             <a:r>
               <a:rPr lang="en-US" sz="1300" b="1" dirty="0">
                 <a:solidFill>
-                  <a:srgbClr val="0F766E"/>
+                  <a:srgbClr val="9D174D"/>
                 </a:solidFill>
                 <a:latin typeface="Trebuchet MS" pitchFamily="34" charset="0"/>
                 <a:ea typeface="Trebuchet MS" pitchFamily="34" charset="-122"/>
                 <a:cs typeface="Trebuchet MS" pitchFamily="34" charset="-120"/>
               </a:rPr>
-              <a:t>take</a:t>
+              <a:t>over</a:t>
             </a:r>
             <a:endParaRPr lang="en-US" sz="1300" dirty="0"/>
           </a:p>
@@ -10179,7 +10179,7 @@
                 <a:ea typeface="Calibri" pitchFamily="34" charset="-122"/>
                 <a:cs typeface="Calibri" pitchFamily="34" charset="-120"/>
               </a:rPr>
-              <a:t>to seize or grasp</a:t>
+              <a:t>above, across, or in control</a:t>
             </a:r>
             <a:endParaRPr lang="en-US" sz="850" dirty="0"/>
           </a:p>
@@ -10338,7 +10338,7 @@
                 <a:ea typeface="Trebuchet MS" pitchFamily="34" charset="-122"/>
                 <a:cs typeface="Trebuchet MS" pitchFamily="34" charset="-120"/>
               </a:rPr>
-              <a:t>o</a:t>
+              <a:t>take</a:t>
             </a:r>
             <a:endParaRPr lang="en-US" sz="1400" dirty="0"/>
           </a:p>
@@ -10443,7 +10443,7 @@
                 <a:ea typeface="Trebuchet MS" pitchFamily="34" charset="-122"/>
                 <a:cs typeface="Trebuchet MS" pitchFamily="34" charset="-120"/>
               </a:rPr>
-              <a:t>ver</a:t>
+              <a:t>o</a:t>
             </a:r>
             <a:endParaRPr lang="en-US" sz="1400" dirty="0"/>
           </a:p>
@@ -10548,7 +10548,7 @@
                 <a:ea typeface="Trebuchet MS" pitchFamily="34" charset="-122"/>
                 <a:cs typeface="Trebuchet MS" pitchFamily="34" charset="-120"/>
               </a:rPr>
-              <a:t>take</a:t>
+              <a:t>ver</a:t>
             </a:r>
             <a:endParaRPr lang="en-US" sz="1400" dirty="0"/>
           </a:p>
@@ -10707,7 +10707,7 @@
                 <a:ea typeface="Trebuchet MS" pitchFamily="34" charset="-122"/>
                 <a:cs typeface="Trebuchet MS" pitchFamily="34" charset="-120"/>
               </a:rPr>
-              <a:t>o</a:t>
+              <a:t>t</a:t>
             </a:r>
             <a:endParaRPr lang="en-US" sz="900" dirty="0"/>
           </a:p>
@@ -10773,7 +10773,7 @@
                 <a:ea typeface="Trebuchet MS" pitchFamily="34" charset="-122"/>
                 <a:cs typeface="Trebuchet MS" pitchFamily="34" charset="-120"/>
               </a:rPr>
-              <a:t>v</a:t>
+              <a:t>a</a:t>
             </a:r>
             <a:endParaRPr lang="en-US" sz="900" dirty="0"/>
           </a:p>
@@ -10839,7 +10839,7 @@
                 <a:ea typeface="Trebuchet MS" pitchFamily="34" charset="-122"/>
                 <a:cs typeface="Trebuchet MS" pitchFamily="34" charset="-120"/>
               </a:rPr>
-              <a:t>er</a:t>
+              <a:t>k</a:t>
             </a:r>
             <a:endParaRPr lang="en-US" sz="900" dirty="0"/>
           </a:p>
@@ -10905,7 +10905,7 @@
                 <a:ea typeface="Trebuchet MS" pitchFamily="34" charset="-122"/>
                 <a:cs typeface="Trebuchet MS" pitchFamily="34" charset="-120"/>
               </a:rPr>
-              <a:t>t</a:t>
+              <a:t>e</a:t>
             </a:r>
             <a:endParaRPr lang="en-US" sz="900" dirty="0"/>
           </a:p>
@@ -10971,7 +10971,7 @@
                 <a:ea typeface="Trebuchet MS" pitchFamily="34" charset="-122"/>
                 <a:cs typeface="Trebuchet MS" pitchFamily="34" charset="-120"/>
               </a:rPr>
-              <a:t>a</a:t>
+              <a:t>o</a:t>
             </a:r>
             <a:endParaRPr lang="en-US" sz="900" dirty="0"/>
           </a:p>
@@ -11037,7 +11037,7 @@
                 <a:ea typeface="Trebuchet MS" pitchFamily="34" charset="-122"/>
                 <a:cs typeface="Trebuchet MS" pitchFamily="34" charset="-120"/>
               </a:rPr>
-              <a:t>k</a:t>
+              <a:t>v</a:t>
             </a:r>
             <a:endParaRPr lang="en-US" sz="900" dirty="0"/>
           </a:p>
@@ -11103,7 +11103,7 @@
                 <a:ea typeface="Trebuchet MS" pitchFamily="34" charset="-122"/>
                 <a:cs typeface="Trebuchet MS" pitchFamily="34" charset="-120"/>
               </a:rPr>
-              <a:t>e</a:t>
+              <a:t>er</a:t>
             </a:r>
             <a:endParaRPr lang="en-US" sz="900" dirty="0"/>
           </a:p>
@@ -11534,7 +11534,7 @@
                 <a:ea typeface="Trebuchet MS" pitchFamily="34" charset="-122"/>
                 <a:cs typeface="Trebuchet MS" pitchFamily="34" charset="-120"/>
               </a:rPr>
-              <a:t>mistaken</a:t>
+              <a:t>mistake</a:t>
             </a:r>
             <a:endParaRPr lang="en-US" sz="2800" dirty="0"/>
           </a:p>
@@ -12361,7 +12361,7 @@
                 <a:ea typeface="Trebuchet MS" pitchFamily="34" charset="-122"/>
                 <a:cs typeface="Trebuchet MS" pitchFamily="34" charset="-120"/>
               </a:rPr>
-              <a:t>mistaken</a:t>
+              <a:t>mistake</a:t>
             </a:r>
             <a:endParaRPr lang="en-US" sz="2800" dirty="0"/>
           </a:p>
@@ -12441,7 +12441,7 @@
         </p:nvSpPr>
         <p:spPr>
           <a:xfrm>
-            <a:off x="2221992" y="2258568"/>
+            <a:off x="2938272" y="2258568"/>
             <a:ext cx="1828800" cy="292608"/>
           </a:xfrm>
           <a:prstGeom prst="rect">
@@ -12475,7 +12475,7 @@
         </p:nvSpPr>
         <p:spPr>
           <a:xfrm>
-            <a:off x="2221992" y="2258568"/>
+            <a:off x="2938272" y="2258568"/>
             <a:ext cx="1828800" cy="292608"/>
           </a:xfrm>
           <a:prstGeom prst="rect">
@@ -12514,7 +12514,7 @@
         </p:nvSpPr>
         <p:spPr>
           <a:xfrm>
-            <a:off x="2221992" y="2569464"/>
+            <a:off x="2938272" y="2569464"/>
             <a:ext cx="1828800" cy="201168"/>
           </a:xfrm>
           <a:prstGeom prst="rect">
@@ -12539,7 +12539,7 @@
                 <a:ea typeface="Calibri" pitchFamily="34" charset="-122"/>
                 <a:cs typeface="Calibri" pitchFamily="34" charset="-120"/>
               </a:rPr>
-              <a:t>wrongly</a:t>
+              <a:t>wrongly or badly</a:t>
             </a:r>
             <a:endParaRPr lang="en-US" sz="850" dirty="0"/>
           </a:p>
@@ -12553,7 +12553,7 @@
         </p:nvSpPr>
         <p:spPr>
           <a:xfrm>
-            <a:off x="4370832" y="2258568"/>
+            <a:off x="5803392" y="2258568"/>
             <a:ext cx="1828800" cy="292608"/>
           </a:xfrm>
           <a:prstGeom prst="rect">
@@ -12587,7 +12587,7 @@
         </p:nvSpPr>
         <p:spPr>
           <a:xfrm>
-            <a:off x="4370832" y="2258568"/>
+            <a:off x="5803392" y="2258568"/>
             <a:ext cx="1828800" cy="292608"/>
           </a:xfrm>
           <a:prstGeom prst="rect">
@@ -12626,7 +12626,7 @@
         </p:nvSpPr>
         <p:spPr>
           <a:xfrm>
-            <a:off x="4370832" y="2569464"/>
+            <a:off x="5803392" y="2569464"/>
             <a:ext cx="1828800" cy="201168"/>
           </a:xfrm>
           <a:prstGeom prst="rect">
@@ -12651,7 +12651,7 @@
                 <a:ea typeface="Calibri" pitchFamily="34" charset="-122"/>
                 <a:cs typeface="Calibri" pitchFamily="34" charset="-120"/>
               </a:rPr>
-              <a:t>to seize or grasp</a:t>
+              <a:t>to seize or receive</a:t>
             </a:r>
             <a:endParaRPr lang="en-US" sz="850" dirty="0"/>
           </a:p>
@@ -12665,30 +12665,23 @@
         </p:nvSpPr>
         <p:spPr>
           <a:xfrm>
-            <a:off x="6519672" y="2258568"/>
-            <a:ext cx="1828800" cy="292608"/>
+            <a:off x="365760" y="3273552"/>
+            <a:ext cx="1371600" cy="658368"/>
           </a:xfrm>
           <a:prstGeom prst="rect">
             <a:avLst>
-              <a:gd name="adj" fmla="val 25000"/>
+              <a:gd name="adj" fmla="val 8333"/>
             </a:avLst>
           </a:prstGeom>
           <a:solidFill>
-            <a:srgbClr val="FCE7F3"/>
-          </a:solidFill>
-          <a:ln w="19050">
-            <a:solidFill>
-              <a:srgbClr val="DB2777"/>
-            </a:solidFill>
-            <a:prstDash val="solid"/>
-          </a:ln>
-          <a:effectLst>
-            <a:outerShdw sx="100000" sy="100000" kx="0" ky="0" algn="bl" rotWithShape="0" blurRad="101600" dist="38100" dir="8100000">
-              <a:srgbClr val="000000">
-                <a:alpha val="12000"/>
-              </a:srgbClr>
-            </a:outerShdw>
-          </a:effectLst>
+            <a:srgbClr val="E2E8F0"/>
+          </a:solidFill>
+          <a:ln w="12700">
+            <a:solidFill>
+              <a:srgbClr val="E2E8F0"/>
+            </a:solidFill>
+            <a:prstDash val="solid"/>
+          </a:ln>
         </p:spPr>
       </p:sp>
       <p:sp>
@@ -12699,112 +12692,100 @@
         </p:nvSpPr>
         <p:spPr>
           <a:xfrm>
-            <a:off x="6519672" y="2258568"/>
-            <a:ext cx="1828800" cy="292608"/>
-          </a:xfrm>
-          <a:prstGeom prst="rect">
-            <a:avLst/>
-          </a:prstGeom>
-          <a:noFill/>
-          <a:ln/>
-        </p:spPr>
-        <p:txBody>
-          <a:bodyPr wrap="square" lIns="0" tIns="0" rIns="0" bIns="0" rtlCol="0" anchor="ctr"/>
-          <a:lstStyle/>
-          <a:p>
-            <a:pPr algn="ctr" indent="0" marL="0">
-              <a:buNone/>
-            </a:pPr>
-            <a:r>
-              <a:rPr lang="en-US" sz="1300" b="1" dirty="0">
-                <a:solidFill>
-                  <a:srgbClr val="9D174D"/>
+            <a:off x="365760" y="3273552"/>
+            <a:ext cx="1371600" cy="658368"/>
+          </a:xfrm>
+          <a:prstGeom prst="rect">
+            <a:avLst/>
+          </a:prstGeom>
+          <a:noFill/>
+          <a:ln/>
+        </p:spPr>
+        <p:txBody>
+          <a:bodyPr wrap="square" lIns="0" tIns="0" rIns="0" bIns="0" rtlCol="0" anchor="ctr"/>
+          <a:lstStyle/>
+          <a:p>
+            <a:pPr algn="ctr" indent="0" marL="0">
+              <a:buNone/>
+            </a:pPr>
+            <a:r>
+              <a:rPr lang="en-US" sz="1100" b="1" dirty="0">
+                <a:solidFill>
+                  <a:srgbClr val="475569"/>
                 </a:solidFill>
                 <a:latin typeface="Trebuchet MS" pitchFamily="34" charset="0"/>
                 <a:ea typeface="Trebuchet MS" pitchFamily="34" charset="-122"/>
                 <a:cs typeface="Trebuchet MS" pitchFamily="34" charset="-120"/>
               </a:rPr>
-              <a:t>n</a:t>
-            </a:r>
-            <a:endParaRPr lang="en-US" sz="1300" dirty="0"/>
-          </a:p>
-        </p:txBody>
-      </p:sp>
-      <p:sp>
-        <p:nvSpPr>
-          <p:cNvPr id="24" name="Text 22"/>
-          <p:cNvSpPr/>
-          <p:nvPr/>
-        </p:nvSpPr>
-        <p:spPr>
-          <a:xfrm>
-            <a:off x="6519672" y="2569464"/>
-            <a:ext cx="1828800" cy="201168"/>
-          </a:xfrm>
-          <a:prstGeom prst="rect">
-            <a:avLst/>
-          </a:prstGeom>
-          <a:noFill/>
-          <a:ln/>
-        </p:spPr>
-        <p:txBody>
-          <a:bodyPr wrap="square" lIns="0" tIns="0" rIns="0" bIns="0" rtlCol="0" anchor="t"/>
-          <a:lstStyle/>
-          <a:p>
-            <a:pPr algn="ctr" indent="0" marL="0">
-              <a:buNone/>
-            </a:pPr>
-            <a:r>
-              <a:rPr lang="en-US" sz="850" dirty="0">
-                <a:solidFill>
-                  <a:srgbClr val="475569"/>
+              <a:t>Syllables</a:t>
+            </a:r>
+            <a:endParaRPr lang="en-US" sz="1100" dirty="0"/>
+          </a:p>
+        </p:txBody>
+      </p:sp>
+      <p:sp>
+        <p:nvSpPr>
+          <p:cNvPr id="24" name="Shape 22"/>
+          <p:cNvSpPr/>
+          <p:nvPr/>
+        </p:nvSpPr>
+        <p:spPr>
+          <a:xfrm>
+            <a:off x="1874520" y="3273552"/>
+            <a:ext cx="6903720" cy="658368"/>
+          </a:xfrm>
+          <a:prstGeom prst="rect">
+            <a:avLst>
+              <a:gd name="adj" fmla="val 8333"/>
+            </a:avLst>
+          </a:prstGeom>
+          <a:solidFill>
+            <a:srgbClr val="F8FAFC"/>
+          </a:solidFill>
+          <a:ln w="12700">
+            <a:solidFill>
+              <a:srgbClr val="E2E8F0"/>
+            </a:solidFill>
+            <a:prstDash val="dash"/>
+          </a:ln>
+        </p:spPr>
+      </p:sp>
+      <p:sp>
+        <p:nvSpPr>
+          <p:cNvPr id="25" name="Text 23"/>
+          <p:cNvSpPr/>
+          <p:nvPr/>
+        </p:nvSpPr>
+        <p:spPr>
+          <a:xfrm>
+            <a:off x="1874520" y="3273552"/>
+            <a:ext cx="6903720" cy="658368"/>
+          </a:xfrm>
+          <a:prstGeom prst="rect">
+            <a:avLst/>
+          </a:prstGeom>
+          <a:noFill/>
+          <a:ln/>
+        </p:spPr>
+        <p:txBody>
+          <a:bodyPr wrap="square" rtlCol="0" anchor="ctr"/>
+          <a:lstStyle/>
+          <a:p>
+            <a:pPr algn="ctr" indent="0" marL="0">
+              <a:buNone/>
+            </a:pPr>
+            <a:r>
+              <a:rPr lang="en-US" sz="1100" i="1" dirty="0">
+                <a:solidFill>
+                  <a:srgbClr val="CBD5E1"/>
                 </a:solidFill>
                 <a:latin typeface="Calibri" pitchFamily="34" charset="0"/>
                 <a:ea typeface="Calibri" pitchFamily="34" charset="-122"/>
                 <a:cs typeface="Calibri" pitchFamily="34" charset="-120"/>
               </a:rPr>
-              <a:t>past participle ending</a:t>
-            </a:r>
-            <a:endParaRPr lang="en-US" sz="850" dirty="0"/>
-          </a:p>
-        </p:txBody>
-      </p:sp>
-      <p:sp>
-        <p:nvSpPr>
-          <p:cNvPr id="25" name="Text 23"/>
-          <p:cNvSpPr/>
-          <p:nvPr/>
-        </p:nvSpPr>
-        <p:spPr>
-          <a:xfrm>
-            <a:off x="6519672" y="2752344"/>
-            <a:ext cx="1828800" cy="182880"/>
-          </a:xfrm>
-          <a:prstGeom prst="rect">
-            <a:avLst/>
-          </a:prstGeom>
-          <a:noFill/>
-          <a:ln/>
-        </p:spPr>
-        <p:txBody>
-          <a:bodyPr wrap="square" lIns="0" tIns="0" rIns="0" bIns="0" rtlCol="0" anchor="t"/>
-          <a:lstStyle/>
-          <a:p>
-            <a:pPr algn="ctr" indent="0" marL="0">
-              <a:buNone/>
-            </a:pPr>
-            <a:r>
-              <a:rPr lang="en-US" sz="700" i="1" dirty="0">
-                <a:solidFill>
-                  <a:srgbClr val="94A3B8"/>
-                </a:solidFill>
-                <a:latin typeface="Calibri" pitchFamily="34" charset="0"/>
-                <a:ea typeface="Calibri" pitchFamily="34" charset="-122"/>
-                <a:cs typeface="Calibri" pitchFamily="34" charset="-120"/>
-              </a:rPr>
-              <a:t>'e' dropped before 'n' suffix</a:t>
-            </a:r>
-            <a:endParaRPr lang="en-US" sz="700" dirty="0"/>
+              <a:t>Write here...</a:t>
+            </a:r>
+            <a:endParaRPr lang="en-US" sz="1100" dirty="0"/>
           </a:p>
         </p:txBody>
       </p:sp>
@@ -12816,12 +12797,12 @@
         </p:nvSpPr>
         <p:spPr>
           <a:xfrm>
-            <a:off x="365760" y="3273552"/>
-            <a:ext cx="1371600" cy="658368"/>
+            <a:off x="365760" y="4096512"/>
+            <a:ext cx="1371600" cy="804672"/>
           </a:xfrm>
           <a:prstGeom prst="rect">
             <a:avLst>
-              <a:gd name="adj" fmla="val 8333"/>
+              <a:gd name="adj" fmla="val 6818"/>
             </a:avLst>
           </a:prstGeom>
           <a:solidFill>
@@ -12843,8 +12824,8 @@
         </p:nvSpPr>
         <p:spPr>
           <a:xfrm>
-            <a:off x="365760" y="3273552"/>
-            <a:ext cx="1371600" cy="658368"/>
+            <a:off x="365760" y="4096512"/>
+            <a:ext cx="1371600" cy="804672"/>
           </a:xfrm>
           <a:prstGeom prst="rect">
             <a:avLst/>
@@ -12868,7 +12849,7 @@
                 <a:ea typeface="Trebuchet MS" pitchFamily="34" charset="-122"/>
                 <a:cs typeface="Trebuchet MS" pitchFamily="34" charset="-120"/>
               </a:rPr>
-              <a:t>Syllables</a:t>
+              <a:t>Phonemes</a:t>
             </a:r>
             <a:endParaRPr lang="en-US" sz="1100" dirty="0"/>
           </a:p>
@@ -12882,74 +12863,8 @@
         </p:nvSpPr>
         <p:spPr>
           <a:xfrm>
-            <a:off x="1874520" y="3273552"/>
-            <a:ext cx="6903720" cy="658368"/>
-          </a:xfrm>
-          <a:prstGeom prst="rect">
-            <a:avLst>
-              <a:gd name="adj" fmla="val 8333"/>
-            </a:avLst>
-          </a:prstGeom>
-          <a:solidFill>
-            <a:srgbClr val="F8FAFC"/>
-          </a:solidFill>
-          <a:ln w="12700">
-            <a:solidFill>
-              <a:srgbClr val="E2E8F0"/>
-            </a:solidFill>
-            <a:prstDash val="dash"/>
-          </a:ln>
-        </p:spPr>
-      </p:sp>
-      <p:sp>
-        <p:nvSpPr>
-          <p:cNvPr id="29" name="Text 27"/>
-          <p:cNvSpPr/>
-          <p:nvPr/>
-        </p:nvSpPr>
-        <p:spPr>
-          <a:xfrm>
-            <a:off x="1874520" y="3273552"/>
-            <a:ext cx="6903720" cy="658368"/>
-          </a:xfrm>
-          <a:prstGeom prst="rect">
-            <a:avLst/>
-          </a:prstGeom>
-          <a:noFill/>
-          <a:ln/>
-        </p:spPr>
-        <p:txBody>
-          <a:bodyPr wrap="square" rtlCol="0" anchor="ctr"/>
-          <a:lstStyle/>
-          <a:p>
-            <a:pPr algn="ctr" indent="0" marL="0">
-              <a:buNone/>
-            </a:pPr>
-            <a:r>
-              <a:rPr lang="en-US" sz="1100" i="1" dirty="0">
-                <a:solidFill>
-                  <a:srgbClr val="CBD5E1"/>
-                </a:solidFill>
-                <a:latin typeface="Calibri" pitchFamily="34" charset="0"/>
-                <a:ea typeface="Calibri" pitchFamily="34" charset="-122"/>
-                <a:cs typeface="Calibri" pitchFamily="34" charset="-120"/>
-              </a:rPr>
-              <a:t>Write here...</a:t>
-            </a:r>
-            <a:endParaRPr lang="en-US" sz="1100" dirty="0"/>
-          </a:p>
-        </p:txBody>
-      </p:sp>
-      <p:sp>
-        <p:nvSpPr>
-          <p:cNvPr id="30" name="Shape 28"/>
-          <p:cNvSpPr/>
-          <p:nvPr/>
-        </p:nvSpPr>
-        <p:spPr>
-          <a:xfrm>
-            <a:off x="365760" y="4096512"/>
-            <a:ext cx="1371600" cy="804672"/>
+            <a:off x="1874520" y="4096512"/>
+            <a:ext cx="6903720" cy="804672"/>
           </a:xfrm>
           <a:prstGeom prst="rect">
             <a:avLst>
@@ -12957,85 +12872,19 @@
             </a:avLst>
           </a:prstGeom>
           <a:solidFill>
-            <a:srgbClr val="E2E8F0"/>
+            <a:srgbClr val="F8FAFC"/>
           </a:solidFill>
           <a:ln w="12700">
             <a:solidFill>
               <a:srgbClr val="E2E8F0"/>
             </a:solidFill>
-            <a:prstDash val="solid"/>
-          </a:ln>
-        </p:spPr>
-      </p:sp>
-      <p:sp>
-        <p:nvSpPr>
-          <p:cNvPr id="31" name="Text 29"/>
-          <p:cNvSpPr/>
-          <p:nvPr/>
-        </p:nvSpPr>
-        <p:spPr>
-          <a:xfrm>
-            <a:off x="365760" y="4096512"/>
-            <a:ext cx="1371600" cy="804672"/>
-          </a:xfrm>
-          <a:prstGeom prst="rect">
-            <a:avLst/>
-          </a:prstGeom>
-          <a:noFill/>
-          <a:ln/>
-        </p:spPr>
-        <p:txBody>
-          <a:bodyPr wrap="square" lIns="0" tIns="0" rIns="0" bIns="0" rtlCol="0" anchor="ctr"/>
-          <a:lstStyle/>
-          <a:p>
-            <a:pPr algn="ctr" indent="0" marL="0">
-              <a:buNone/>
-            </a:pPr>
-            <a:r>
-              <a:rPr lang="en-US" sz="1100" b="1" dirty="0">
-                <a:solidFill>
-                  <a:srgbClr val="475569"/>
-                </a:solidFill>
-                <a:latin typeface="Trebuchet MS" pitchFamily="34" charset="0"/>
-                <a:ea typeface="Trebuchet MS" pitchFamily="34" charset="-122"/>
-                <a:cs typeface="Trebuchet MS" pitchFamily="34" charset="-120"/>
-              </a:rPr>
-              <a:t>Phonemes</a:t>
-            </a:r>
-            <a:endParaRPr lang="en-US" sz="1100" dirty="0"/>
-          </a:p>
-        </p:txBody>
-      </p:sp>
-      <p:sp>
-        <p:nvSpPr>
-          <p:cNvPr id="32" name="Shape 30"/>
-          <p:cNvSpPr/>
-          <p:nvPr/>
-        </p:nvSpPr>
-        <p:spPr>
-          <a:xfrm>
-            <a:off x="1874520" y="4096512"/>
-            <a:ext cx="6903720" cy="804672"/>
-          </a:xfrm>
-          <a:prstGeom prst="rect">
-            <a:avLst>
-              <a:gd name="adj" fmla="val 6818"/>
-            </a:avLst>
-          </a:prstGeom>
-          <a:solidFill>
-            <a:srgbClr val="F8FAFC"/>
-          </a:solidFill>
-          <a:ln w="12700">
-            <a:solidFill>
-              <a:srgbClr val="E2E8F0"/>
-            </a:solidFill>
             <a:prstDash val="dash"/>
           </a:ln>
         </p:spPr>
       </p:sp>
       <p:sp>
         <p:nvSpPr>
-          <p:cNvPr id="33" name="Text 31"/>
+          <p:cNvPr id="29" name="Text 27"/>
           <p:cNvSpPr/>
           <p:nvPr/>
         </p:nvSpPr>
@@ -13497,7 +13346,7 @@
                 <a:ea typeface="Trebuchet MS" pitchFamily="34" charset="-122"/>
                 <a:cs typeface="Trebuchet MS" pitchFamily="34" charset="-120"/>
               </a:rPr>
-              <a:t>mistaken</a:t>
+              <a:t>mistake</a:t>
             </a:r>
             <a:endParaRPr lang="en-US" sz="2800" dirty="0"/>
           </a:p>
@@ -13577,7 +13426,7 @@
         </p:nvSpPr>
         <p:spPr>
           <a:xfrm>
-            <a:off x="2221992" y="2258568"/>
+            <a:off x="2938272" y="2258568"/>
             <a:ext cx="1828800" cy="292608"/>
           </a:xfrm>
           <a:prstGeom prst="rect">
@@ -13611,7 +13460,7 @@
         </p:nvSpPr>
         <p:spPr>
           <a:xfrm>
-            <a:off x="2221992" y="2258568"/>
+            <a:off x="2938272" y="2258568"/>
             <a:ext cx="1828800" cy="292608"/>
           </a:xfrm>
           <a:prstGeom prst="rect">
@@ -13650,7 +13499,7 @@
         </p:nvSpPr>
         <p:spPr>
           <a:xfrm>
-            <a:off x="2221992" y="2569464"/>
+            <a:off x="2938272" y="2569464"/>
             <a:ext cx="1828800" cy="201168"/>
           </a:xfrm>
           <a:prstGeom prst="rect">
@@ -13675,7 +13524,7 @@
                 <a:ea typeface="Calibri" pitchFamily="34" charset="-122"/>
                 <a:cs typeface="Calibri" pitchFamily="34" charset="-120"/>
               </a:rPr>
-              <a:t>wrongly</a:t>
+              <a:t>wrongly or badly</a:t>
             </a:r>
             <a:endParaRPr lang="en-US" sz="850" dirty="0"/>
           </a:p>
@@ -13689,7 +13538,7 @@
         </p:nvSpPr>
         <p:spPr>
           <a:xfrm>
-            <a:off x="4370832" y="2258568"/>
+            <a:off x="5803392" y="2258568"/>
             <a:ext cx="1828800" cy="292608"/>
           </a:xfrm>
           <a:prstGeom prst="rect">
@@ -13723,7 +13572,7 @@
         </p:nvSpPr>
         <p:spPr>
           <a:xfrm>
-            <a:off x="4370832" y="2258568"/>
+            <a:off x="5803392" y="2258568"/>
             <a:ext cx="1828800" cy="292608"/>
           </a:xfrm>
           <a:prstGeom prst="rect">
@@ -13762,7 +13611,7 @@
         </p:nvSpPr>
         <p:spPr>
           <a:xfrm>
-            <a:off x="4370832" y="2569464"/>
+            <a:off x="5803392" y="2569464"/>
             <a:ext cx="1828800" cy="201168"/>
           </a:xfrm>
           <a:prstGeom prst="rect">
@@ -13787,7 +13636,7 @@
                 <a:ea typeface="Calibri" pitchFamily="34" charset="-122"/>
                 <a:cs typeface="Calibri" pitchFamily="34" charset="-120"/>
               </a:rPr>
-              <a:t>to seize or grasp</a:t>
+              <a:t>to seize or receive</a:t>
             </a:r>
             <a:endParaRPr lang="en-US" sz="850" dirty="0"/>
           </a:p>
@@ -13801,30 +13650,23 @@
         </p:nvSpPr>
         <p:spPr>
           <a:xfrm>
-            <a:off x="6519672" y="2258568"/>
-            <a:ext cx="1828800" cy="292608"/>
+            <a:off x="365760" y="3273552"/>
+            <a:ext cx="1371600" cy="658368"/>
           </a:xfrm>
           <a:prstGeom prst="rect">
             <a:avLst>
-              <a:gd name="adj" fmla="val 25000"/>
+              <a:gd name="adj" fmla="val 8333"/>
             </a:avLst>
           </a:prstGeom>
           <a:solidFill>
-            <a:srgbClr val="FCE7F3"/>
-          </a:solidFill>
-          <a:ln w="19050">
-            <a:solidFill>
-              <a:srgbClr val="DB2777"/>
-            </a:solidFill>
-            <a:prstDash val="solid"/>
-          </a:ln>
-          <a:effectLst>
-            <a:outerShdw sx="100000" sy="100000" kx="0" ky="0" algn="bl" rotWithShape="0" blurRad="101600" dist="38100" dir="8100000">
-              <a:srgbClr val="000000">
-                <a:alpha val="12000"/>
-              </a:srgbClr>
-            </a:outerShdw>
-          </a:effectLst>
+            <a:srgbClr val="E2E8F0"/>
+          </a:solidFill>
+          <a:ln w="12700">
+            <a:solidFill>
+              <a:srgbClr val="E2E8F0"/>
+            </a:solidFill>
+            <a:prstDash val="solid"/>
+          </a:ln>
         </p:spPr>
       </p:sp>
       <p:sp>
@@ -13835,125 +13677,47 @@
         </p:nvSpPr>
         <p:spPr>
           <a:xfrm>
-            <a:off x="6519672" y="2258568"/>
-            <a:ext cx="1828800" cy="292608"/>
-          </a:xfrm>
-          <a:prstGeom prst="rect">
-            <a:avLst/>
-          </a:prstGeom>
-          <a:noFill/>
-          <a:ln/>
-        </p:spPr>
-        <p:txBody>
-          <a:bodyPr wrap="square" lIns="0" tIns="0" rIns="0" bIns="0" rtlCol="0" anchor="ctr"/>
-          <a:lstStyle/>
-          <a:p>
-            <a:pPr algn="ctr" indent="0" marL="0">
-              <a:buNone/>
-            </a:pPr>
-            <a:r>
-              <a:rPr lang="en-US" sz="1300" b="1" dirty="0">
-                <a:solidFill>
-                  <a:srgbClr val="9D174D"/>
+            <a:off x="365760" y="3273552"/>
+            <a:ext cx="1371600" cy="658368"/>
+          </a:xfrm>
+          <a:prstGeom prst="rect">
+            <a:avLst/>
+          </a:prstGeom>
+          <a:noFill/>
+          <a:ln/>
+        </p:spPr>
+        <p:txBody>
+          <a:bodyPr wrap="square" lIns="0" tIns="0" rIns="0" bIns="0" rtlCol="0" anchor="ctr"/>
+          <a:lstStyle/>
+          <a:p>
+            <a:pPr algn="ctr" indent="0" marL="0">
+              <a:buNone/>
+            </a:pPr>
+            <a:r>
+              <a:rPr lang="en-US" sz="1100" b="1" dirty="0">
+                <a:solidFill>
+                  <a:srgbClr val="475569"/>
                 </a:solidFill>
                 <a:latin typeface="Trebuchet MS" pitchFamily="34" charset="0"/>
                 <a:ea typeface="Trebuchet MS" pitchFamily="34" charset="-122"/>
                 <a:cs typeface="Trebuchet MS" pitchFamily="34" charset="-120"/>
               </a:rPr>
-              <a:t>n</a:t>
-            </a:r>
-            <a:endParaRPr lang="en-US" sz="1300" dirty="0"/>
-          </a:p>
-        </p:txBody>
-      </p:sp>
-      <p:sp>
-        <p:nvSpPr>
-          <p:cNvPr id="24" name="Text 22"/>
-          <p:cNvSpPr/>
-          <p:nvPr/>
-        </p:nvSpPr>
-        <p:spPr>
-          <a:xfrm>
-            <a:off x="6519672" y="2569464"/>
-            <a:ext cx="1828800" cy="201168"/>
-          </a:xfrm>
-          <a:prstGeom prst="rect">
-            <a:avLst/>
-          </a:prstGeom>
-          <a:noFill/>
-          <a:ln/>
-        </p:spPr>
-        <p:txBody>
-          <a:bodyPr wrap="square" lIns="0" tIns="0" rIns="0" bIns="0" rtlCol="0" anchor="t"/>
-          <a:lstStyle/>
-          <a:p>
-            <a:pPr algn="ctr" indent="0" marL="0">
-              <a:buNone/>
-            </a:pPr>
-            <a:r>
-              <a:rPr lang="en-US" sz="850" dirty="0">
-                <a:solidFill>
-                  <a:srgbClr val="475569"/>
-                </a:solidFill>
-                <a:latin typeface="Calibri" pitchFamily="34" charset="0"/>
-                <a:ea typeface="Calibri" pitchFamily="34" charset="-122"/>
-                <a:cs typeface="Calibri" pitchFamily="34" charset="-120"/>
-              </a:rPr>
-              <a:t>past participle ending</a:t>
-            </a:r>
-            <a:endParaRPr lang="en-US" sz="850" dirty="0"/>
-          </a:p>
-        </p:txBody>
-      </p:sp>
-      <p:sp>
-        <p:nvSpPr>
-          <p:cNvPr id="25" name="Text 23"/>
-          <p:cNvSpPr/>
-          <p:nvPr/>
-        </p:nvSpPr>
-        <p:spPr>
-          <a:xfrm>
-            <a:off x="6519672" y="2752344"/>
-            <a:ext cx="1828800" cy="182880"/>
-          </a:xfrm>
-          <a:prstGeom prst="rect">
-            <a:avLst/>
-          </a:prstGeom>
-          <a:noFill/>
-          <a:ln/>
-        </p:spPr>
-        <p:txBody>
-          <a:bodyPr wrap="square" lIns="0" tIns="0" rIns="0" bIns="0" rtlCol="0" anchor="t"/>
-          <a:lstStyle/>
-          <a:p>
-            <a:pPr algn="ctr" indent="0" marL="0">
-              <a:buNone/>
-            </a:pPr>
-            <a:r>
-              <a:rPr lang="en-US" sz="700" i="1" dirty="0">
-                <a:solidFill>
-                  <a:srgbClr val="94A3B8"/>
-                </a:solidFill>
-                <a:latin typeface="Calibri" pitchFamily="34" charset="0"/>
-                <a:ea typeface="Calibri" pitchFamily="34" charset="-122"/>
-                <a:cs typeface="Calibri" pitchFamily="34" charset="-120"/>
-              </a:rPr>
-              <a:t>'e' dropped before 'n' suffix</a:t>
-            </a:r>
-            <a:endParaRPr lang="en-US" sz="700" dirty="0"/>
-          </a:p>
-        </p:txBody>
-      </p:sp>
-      <p:sp>
-        <p:nvSpPr>
-          <p:cNvPr id="26" name="Shape 24"/>
-          <p:cNvSpPr/>
-          <p:nvPr/>
-        </p:nvSpPr>
-        <p:spPr>
-          <a:xfrm>
-            <a:off x="365760" y="3273552"/>
-            <a:ext cx="1371600" cy="658368"/>
+              <a:t>Syllables</a:t>
+            </a:r>
+            <a:endParaRPr lang="en-US" sz="1100" dirty="0"/>
+          </a:p>
+        </p:txBody>
+      </p:sp>
+      <p:sp>
+        <p:nvSpPr>
+          <p:cNvPr id="24" name="Shape 22"/>
+          <p:cNvSpPr/>
+          <p:nvPr/>
+        </p:nvSpPr>
+        <p:spPr>
+          <a:xfrm>
+            <a:off x="1874520" y="3273552"/>
+            <a:ext cx="6903720" cy="658368"/>
           </a:xfrm>
           <a:prstGeom prst="rect">
             <a:avLst>
@@ -13961,52 +13725,118 @@
             </a:avLst>
           </a:prstGeom>
           <a:solidFill>
-            <a:srgbClr val="E2E8F0"/>
-          </a:solidFill>
-          <a:ln w="12700">
-            <a:solidFill>
-              <a:srgbClr val="E2E8F0"/>
-            </a:solidFill>
-            <a:prstDash val="solid"/>
-          </a:ln>
-        </p:spPr>
-      </p:sp>
-      <p:sp>
-        <p:nvSpPr>
-          <p:cNvPr id="27" name="Text 25"/>
-          <p:cNvSpPr/>
-          <p:nvPr/>
-        </p:nvSpPr>
-        <p:spPr>
-          <a:xfrm>
-            <a:off x="365760" y="3273552"/>
-            <a:ext cx="1371600" cy="658368"/>
-          </a:xfrm>
-          <a:prstGeom prst="rect">
-            <a:avLst/>
-          </a:prstGeom>
-          <a:noFill/>
-          <a:ln/>
-        </p:spPr>
-        <p:txBody>
-          <a:bodyPr wrap="square" lIns="0" tIns="0" rIns="0" bIns="0" rtlCol="0" anchor="ctr"/>
-          <a:lstStyle/>
-          <a:p>
-            <a:pPr algn="ctr" indent="0" marL="0">
-              <a:buNone/>
-            </a:pPr>
-            <a:r>
-              <a:rPr lang="en-US" sz="1100" b="1" dirty="0">
-                <a:solidFill>
-                  <a:srgbClr val="475569"/>
+            <a:srgbClr val="CCFBF1"/>
+          </a:solidFill>
+          <a:ln w="12700">
+            <a:solidFill>
+              <a:srgbClr val="0D9488"/>
+            </a:solidFill>
+            <a:prstDash val="solid"/>
+          </a:ln>
+        </p:spPr>
+      </p:sp>
+      <p:sp>
+        <p:nvSpPr>
+          <p:cNvPr id="25" name="Shape 23"/>
+          <p:cNvSpPr/>
+          <p:nvPr/>
+        </p:nvSpPr>
+        <p:spPr>
+          <a:xfrm>
+            <a:off x="2999232" y="3364992"/>
+            <a:ext cx="1645920" cy="475488"/>
+          </a:xfrm>
+          <a:prstGeom prst="rect">
+            <a:avLst>
+              <a:gd name="adj" fmla="val 9615"/>
+            </a:avLst>
+          </a:prstGeom>
+          <a:solidFill>
+            <a:srgbClr val="FFFFFF"/>
+          </a:solidFill>
+          <a:ln w="12700">
+            <a:solidFill>
+              <a:srgbClr val="0D9488"/>
+            </a:solidFill>
+            <a:prstDash val="solid"/>
+          </a:ln>
+        </p:spPr>
+      </p:sp>
+      <p:sp>
+        <p:nvSpPr>
+          <p:cNvPr id="26" name="Text 24"/>
+          <p:cNvSpPr/>
+          <p:nvPr/>
+        </p:nvSpPr>
+        <p:spPr>
+          <a:xfrm>
+            <a:off x="2999232" y="3364992"/>
+            <a:ext cx="1645920" cy="475488"/>
+          </a:xfrm>
+          <a:prstGeom prst="rect">
+            <a:avLst/>
+          </a:prstGeom>
+          <a:noFill/>
+          <a:ln/>
+        </p:spPr>
+        <p:txBody>
+          <a:bodyPr wrap="square" lIns="0" tIns="0" rIns="0" bIns="0" rtlCol="0" anchor="ctr"/>
+          <a:lstStyle/>
+          <a:p>
+            <a:pPr algn="ctr" indent="0" marL="0">
+              <a:buNone/>
+            </a:pPr>
+            <a:r>
+              <a:rPr lang="en-US" sz="1400" b="1" dirty="0">
+                <a:solidFill>
+                  <a:srgbClr val="0D9488"/>
                 </a:solidFill>
                 <a:latin typeface="Trebuchet MS" pitchFamily="34" charset="0"/>
                 <a:ea typeface="Trebuchet MS" pitchFamily="34" charset="-122"/>
                 <a:cs typeface="Trebuchet MS" pitchFamily="34" charset="-120"/>
               </a:rPr>
-              <a:t>Syllables</a:t>
-            </a:r>
-            <a:endParaRPr lang="en-US" sz="1100" dirty="0"/>
+              <a:t>mis</a:t>
+            </a:r>
+            <a:endParaRPr lang="en-US" sz="1400" dirty="0"/>
+          </a:p>
+        </p:txBody>
+      </p:sp>
+      <p:sp>
+        <p:nvSpPr>
+          <p:cNvPr id="27" name="Text 25"/>
+          <p:cNvSpPr/>
+          <p:nvPr/>
+        </p:nvSpPr>
+        <p:spPr>
+          <a:xfrm>
+            <a:off x="4645152" y="3364992"/>
+            <a:ext cx="1097280" cy="475488"/>
+          </a:xfrm>
+          <a:prstGeom prst="rect">
+            <a:avLst/>
+          </a:prstGeom>
+          <a:noFill/>
+          <a:ln/>
+        </p:spPr>
+        <p:txBody>
+          <a:bodyPr wrap="square" lIns="0" tIns="0" rIns="0" bIns="0" rtlCol="0" anchor="ctr"/>
+          <a:lstStyle/>
+          <a:p>
+            <a:pPr algn="ctr" indent="0" marL="0">
+              <a:buNone/>
+            </a:pPr>
+            <a:r>
+              <a:rPr lang="en-US" sz="1600" b="1" dirty="0">
+                <a:solidFill>
+                  <a:srgbClr val="0D9488"/>
+                </a:solidFill>
+                <a:latin typeface="Trebuchet MS" pitchFamily="34" charset="0"/>
+                <a:ea typeface="Trebuchet MS" pitchFamily="34" charset="-122"/>
+                <a:cs typeface="Trebuchet MS" pitchFamily="34" charset="-120"/>
+              </a:rPr>
+              <a:t>·</a:t>
+            </a:r>
+            <a:endParaRPr lang="en-US" sz="1600" dirty="0"/>
           </a:p>
         </p:txBody>
       </p:sp>
@@ -14018,34 +13848,7 @@
         </p:nvSpPr>
         <p:spPr>
           <a:xfrm>
-            <a:off x="1874520" y="3273552"/>
-            <a:ext cx="6903720" cy="658368"/>
-          </a:xfrm>
-          <a:prstGeom prst="rect">
-            <a:avLst>
-              <a:gd name="adj" fmla="val 8333"/>
-            </a:avLst>
-          </a:prstGeom>
-          <a:solidFill>
-            <a:srgbClr val="CCFBF1"/>
-          </a:solidFill>
-          <a:ln w="12700">
-            <a:solidFill>
-              <a:srgbClr val="0D9488"/>
-            </a:solidFill>
-            <a:prstDash val="solid"/>
-          </a:ln>
-        </p:spPr>
-      </p:sp>
-      <p:sp>
-        <p:nvSpPr>
-          <p:cNvPr id="29" name="Shape 27"/>
-          <p:cNvSpPr/>
-          <p:nvPr/>
-        </p:nvSpPr>
-        <p:spPr>
-          <a:xfrm>
-            <a:off x="2313432" y="3364992"/>
+            <a:off x="5742432" y="3364992"/>
             <a:ext cx="1645920" cy="475488"/>
           </a:xfrm>
           <a:prstGeom prst="rect">
@@ -14066,13 +13869,13 @@
       </p:sp>
       <p:sp>
         <p:nvSpPr>
-          <p:cNvPr id="30" name="Text 28"/>
-          <p:cNvSpPr/>
-          <p:nvPr/>
-        </p:nvSpPr>
-        <p:spPr>
-          <a:xfrm>
-            <a:off x="2313432" y="3364992"/>
+          <p:cNvPr id="29" name="Text 27"/>
+          <p:cNvSpPr/>
+          <p:nvPr/>
+        </p:nvSpPr>
+        <p:spPr>
+          <a:xfrm>
+            <a:off x="5742432" y="3364992"/>
             <a:ext cx="1645920" cy="475488"/>
           </a:xfrm>
           <a:prstGeom prst="rect">
@@ -14097,7 +13900,7 @@
                 <a:ea typeface="Trebuchet MS" pitchFamily="34" charset="-122"/>
                 <a:cs typeface="Trebuchet MS" pitchFamily="34" charset="-120"/>
               </a:rPr>
-              <a:t>mis</a:t>
+              <a:t>take</a:t>
             </a:r>
             <a:endParaRPr lang="en-US" sz="1400" dirty="0"/>
           </a:p>
@@ -14105,40 +13908,67 @@
       </p:sp>
       <p:sp>
         <p:nvSpPr>
+          <p:cNvPr id="30" name="Shape 28"/>
+          <p:cNvSpPr/>
+          <p:nvPr/>
+        </p:nvSpPr>
+        <p:spPr>
+          <a:xfrm>
+            <a:off x="365760" y="4096512"/>
+            <a:ext cx="1371600" cy="804672"/>
+          </a:xfrm>
+          <a:prstGeom prst="rect">
+            <a:avLst>
+              <a:gd name="adj" fmla="val 6818"/>
+            </a:avLst>
+          </a:prstGeom>
+          <a:solidFill>
+            <a:srgbClr val="E2E8F0"/>
+          </a:solidFill>
+          <a:ln w="12700">
+            <a:solidFill>
+              <a:srgbClr val="E2E8F0"/>
+            </a:solidFill>
+            <a:prstDash val="solid"/>
+          </a:ln>
+        </p:spPr>
+      </p:sp>
+      <p:sp>
+        <p:nvSpPr>
           <p:cNvPr id="31" name="Text 29"/>
           <p:cNvSpPr/>
           <p:nvPr/>
         </p:nvSpPr>
         <p:spPr>
           <a:xfrm>
-            <a:off x="3959352" y="3364992"/>
-            <a:ext cx="411480" cy="475488"/>
-          </a:xfrm>
-          <a:prstGeom prst="rect">
-            <a:avLst/>
-          </a:prstGeom>
-          <a:noFill/>
-          <a:ln/>
-        </p:spPr>
-        <p:txBody>
-          <a:bodyPr wrap="square" lIns="0" tIns="0" rIns="0" bIns="0" rtlCol="0" anchor="ctr"/>
-          <a:lstStyle/>
-          <a:p>
-            <a:pPr algn="ctr" indent="0" marL="0">
-              <a:buNone/>
-            </a:pPr>
-            <a:r>
-              <a:rPr lang="en-US" sz="1600" b="1" dirty="0">
-                <a:solidFill>
-                  <a:srgbClr val="0D9488"/>
+            <a:off x="365760" y="4096512"/>
+            <a:ext cx="1371600" cy="804672"/>
+          </a:xfrm>
+          <a:prstGeom prst="rect">
+            <a:avLst/>
+          </a:prstGeom>
+          <a:noFill/>
+          <a:ln/>
+        </p:spPr>
+        <p:txBody>
+          <a:bodyPr wrap="square" lIns="0" tIns="0" rIns="0" bIns="0" rtlCol="0" anchor="ctr"/>
+          <a:lstStyle/>
+          <a:p>
+            <a:pPr algn="ctr" indent="0" marL="0">
+              <a:buNone/>
+            </a:pPr>
+            <a:r>
+              <a:rPr lang="en-US" sz="1100" b="1" dirty="0">
+                <a:solidFill>
+                  <a:srgbClr val="475569"/>
                 </a:solidFill>
                 <a:latin typeface="Trebuchet MS" pitchFamily="34" charset="0"/>
                 <a:ea typeface="Trebuchet MS" pitchFamily="34" charset="-122"/>
                 <a:cs typeface="Trebuchet MS" pitchFamily="34" charset="-120"/>
               </a:rPr>
-              <a:t>·</a:t>
-            </a:r>
-            <a:endParaRPr lang="en-US" sz="1600" dirty="0"/>
+              <a:t>Phonemes</a:t>
+            </a:r>
+            <a:endParaRPr lang="en-US" sz="1100" dirty="0"/>
           </a:p>
         </p:txBody>
       </p:sp>
@@ -14150,179 +13980,8 @@
         </p:nvSpPr>
         <p:spPr>
           <a:xfrm>
-            <a:off x="4370832" y="3364992"/>
-            <a:ext cx="1645920" cy="475488"/>
-          </a:xfrm>
-          <a:prstGeom prst="rect">
-            <a:avLst>
-              <a:gd name="adj" fmla="val 9615"/>
-            </a:avLst>
-          </a:prstGeom>
-          <a:solidFill>
-            <a:srgbClr val="FFFFFF"/>
-          </a:solidFill>
-          <a:ln w="12700">
-            <a:solidFill>
-              <a:srgbClr val="0D9488"/>
-            </a:solidFill>
-            <a:prstDash val="solid"/>
-          </a:ln>
-        </p:spPr>
-      </p:sp>
-      <p:sp>
-        <p:nvSpPr>
-          <p:cNvPr id="33" name="Text 31"/>
-          <p:cNvSpPr/>
-          <p:nvPr/>
-        </p:nvSpPr>
-        <p:spPr>
-          <a:xfrm>
-            <a:off x="4370832" y="3364992"/>
-            <a:ext cx="1645920" cy="475488"/>
-          </a:xfrm>
-          <a:prstGeom prst="rect">
-            <a:avLst/>
-          </a:prstGeom>
-          <a:noFill/>
-          <a:ln/>
-        </p:spPr>
-        <p:txBody>
-          <a:bodyPr wrap="square" lIns="0" tIns="0" rIns="0" bIns="0" rtlCol="0" anchor="ctr"/>
-          <a:lstStyle/>
-          <a:p>
-            <a:pPr algn="ctr" indent="0" marL="0">
-              <a:buNone/>
-            </a:pPr>
-            <a:r>
-              <a:rPr lang="en-US" sz="1400" b="1" dirty="0">
-                <a:solidFill>
-                  <a:srgbClr val="0D9488"/>
-                </a:solidFill>
-                <a:latin typeface="Trebuchet MS" pitchFamily="34" charset="0"/>
-                <a:ea typeface="Trebuchet MS" pitchFamily="34" charset="-122"/>
-                <a:cs typeface="Trebuchet MS" pitchFamily="34" charset="-120"/>
-              </a:rPr>
-              <a:t>ta</a:t>
-            </a:r>
-            <a:endParaRPr lang="en-US" sz="1400" dirty="0"/>
-          </a:p>
-        </p:txBody>
-      </p:sp>
-      <p:sp>
-        <p:nvSpPr>
-          <p:cNvPr id="34" name="Text 32"/>
-          <p:cNvSpPr/>
-          <p:nvPr/>
-        </p:nvSpPr>
-        <p:spPr>
-          <a:xfrm>
-            <a:off x="6016752" y="3364992"/>
-            <a:ext cx="411480" cy="475488"/>
-          </a:xfrm>
-          <a:prstGeom prst="rect">
-            <a:avLst/>
-          </a:prstGeom>
-          <a:noFill/>
-          <a:ln/>
-        </p:spPr>
-        <p:txBody>
-          <a:bodyPr wrap="square" lIns="0" tIns="0" rIns="0" bIns="0" rtlCol="0" anchor="ctr"/>
-          <a:lstStyle/>
-          <a:p>
-            <a:pPr algn="ctr" indent="0" marL="0">
-              <a:buNone/>
-            </a:pPr>
-            <a:r>
-              <a:rPr lang="en-US" sz="1600" b="1" dirty="0">
-                <a:solidFill>
-                  <a:srgbClr val="0D9488"/>
-                </a:solidFill>
-                <a:latin typeface="Trebuchet MS" pitchFamily="34" charset="0"/>
-                <a:ea typeface="Trebuchet MS" pitchFamily="34" charset="-122"/>
-                <a:cs typeface="Trebuchet MS" pitchFamily="34" charset="-120"/>
-              </a:rPr>
-              <a:t>·</a:t>
-            </a:r>
-            <a:endParaRPr lang="en-US" sz="1600" dirty="0"/>
-          </a:p>
-        </p:txBody>
-      </p:sp>
-      <p:sp>
-        <p:nvSpPr>
-          <p:cNvPr id="35" name="Shape 33"/>
-          <p:cNvSpPr/>
-          <p:nvPr/>
-        </p:nvSpPr>
-        <p:spPr>
-          <a:xfrm>
-            <a:off x="6428232" y="3364992"/>
-            <a:ext cx="1645920" cy="475488"/>
-          </a:xfrm>
-          <a:prstGeom prst="rect">
-            <a:avLst>
-              <a:gd name="adj" fmla="val 9615"/>
-            </a:avLst>
-          </a:prstGeom>
-          <a:solidFill>
-            <a:srgbClr val="FFFFFF"/>
-          </a:solidFill>
-          <a:ln w="12700">
-            <a:solidFill>
-              <a:srgbClr val="0D9488"/>
-            </a:solidFill>
-            <a:prstDash val="solid"/>
-          </a:ln>
-        </p:spPr>
-      </p:sp>
-      <p:sp>
-        <p:nvSpPr>
-          <p:cNvPr id="36" name="Text 34"/>
-          <p:cNvSpPr/>
-          <p:nvPr/>
-        </p:nvSpPr>
-        <p:spPr>
-          <a:xfrm>
-            <a:off x="6428232" y="3364992"/>
-            <a:ext cx="1645920" cy="475488"/>
-          </a:xfrm>
-          <a:prstGeom prst="rect">
-            <a:avLst/>
-          </a:prstGeom>
-          <a:noFill/>
-          <a:ln/>
-        </p:spPr>
-        <p:txBody>
-          <a:bodyPr wrap="square" lIns="0" tIns="0" rIns="0" bIns="0" rtlCol="0" anchor="ctr"/>
-          <a:lstStyle/>
-          <a:p>
-            <a:pPr algn="ctr" indent="0" marL="0">
-              <a:buNone/>
-            </a:pPr>
-            <a:r>
-              <a:rPr lang="en-US" sz="1400" b="1" dirty="0">
-                <a:solidFill>
-                  <a:srgbClr val="0D9488"/>
-                </a:solidFill>
-                <a:latin typeface="Trebuchet MS" pitchFamily="34" charset="0"/>
-                <a:ea typeface="Trebuchet MS" pitchFamily="34" charset="-122"/>
-                <a:cs typeface="Trebuchet MS" pitchFamily="34" charset="-120"/>
-              </a:rPr>
-              <a:t>ken</a:t>
-            </a:r>
-            <a:endParaRPr lang="en-US" sz="1400" dirty="0"/>
-          </a:p>
-        </p:txBody>
-      </p:sp>
-      <p:sp>
-        <p:nvSpPr>
-          <p:cNvPr id="37" name="Shape 35"/>
-          <p:cNvSpPr/>
-          <p:nvPr/>
-        </p:nvSpPr>
-        <p:spPr>
-          <a:xfrm>
-            <a:off x="365760" y="4096512"/>
-            <a:ext cx="1371600" cy="804672"/>
+            <a:off x="1874520" y="4096512"/>
+            <a:ext cx="6903720" cy="804672"/>
           </a:xfrm>
           <a:prstGeom prst="rect">
             <a:avLst>
@@ -14330,85 +13989,19 @@
             </a:avLst>
           </a:prstGeom>
           <a:solidFill>
-            <a:srgbClr val="E2E8F0"/>
+            <a:srgbClr val="F8FAFC"/>
           </a:solidFill>
           <a:ln w="12700">
             <a:solidFill>
               <a:srgbClr val="E2E8F0"/>
             </a:solidFill>
-            <a:prstDash val="solid"/>
-          </a:ln>
-        </p:spPr>
-      </p:sp>
-      <p:sp>
-        <p:nvSpPr>
-          <p:cNvPr id="38" name="Text 36"/>
-          <p:cNvSpPr/>
-          <p:nvPr/>
-        </p:nvSpPr>
-        <p:spPr>
-          <a:xfrm>
-            <a:off x="365760" y="4096512"/>
-            <a:ext cx="1371600" cy="804672"/>
-          </a:xfrm>
-          <a:prstGeom prst="rect">
-            <a:avLst/>
-          </a:prstGeom>
-          <a:noFill/>
-          <a:ln/>
-        </p:spPr>
-        <p:txBody>
-          <a:bodyPr wrap="square" lIns="0" tIns="0" rIns="0" bIns="0" rtlCol="0" anchor="ctr"/>
-          <a:lstStyle/>
-          <a:p>
-            <a:pPr algn="ctr" indent="0" marL="0">
-              <a:buNone/>
-            </a:pPr>
-            <a:r>
-              <a:rPr lang="en-US" sz="1100" b="1" dirty="0">
-                <a:solidFill>
-                  <a:srgbClr val="475569"/>
-                </a:solidFill>
-                <a:latin typeface="Trebuchet MS" pitchFamily="34" charset="0"/>
-                <a:ea typeface="Trebuchet MS" pitchFamily="34" charset="-122"/>
-                <a:cs typeface="Trebuchet MS" pitchFamily="34" charset="-120"/>
-              </a:rPr>
-              <a:t>Phonemes</a:t>
-            </a:r>
-            <a:endParaRPr lang="en-US" sz="1100" dirty="0"/>
-          </a:p>
-        </p:txBody>
-      </p:sp>
-      <p:sp>
-        <p:nvSpPr>
-          <p:cNvPr id="39" name="Shape 37"/>
-          <p:cNvSpPr/>
-          <p:nvPr/>
-        </p:nvSpPr>
-        <p:spPr>
-          <a:xfrm>
-            <a:off x="1874520" y="4096512"/>
-            <a:ext cx="6903720" cy="804672"/>
-          </a:xfrm>
-          <a:prstGeom prst="rect">
-            <a:avLst>
-              <a:gd name="adj" fmla="val 6818"/>
-            </a:avLst>
-          </a:prstGeom>
-          <a:solidFill>
-            <a:srgbClr val="F8FAFC"/>
-          </a:solidFill>
-          <a:ln w="12700">
-            <a:solidFill>
-              <a:srgbClr val="E2E8F0"/>
-            </a:solidFill>
             <a:prstDash val="dash"/>
           </a:ln>
         </p:spPr>
       </p:sp>
       <p:sp>
         <p:nvSpPr>
-          <p:cNvPr id="40" name="Text 38"/>
+          <p:cNvPr id="33" name="Text 31"/>
           <p:cNvSpPr/>
           <p:nvPr/>
         </p:nvSpPr>
@@ -15135,7 +14728,7 @@
                 <a:ea typeface="Trebuchet MS" pitchFamily="34" charset="-122"/>
                 <a:cs typeface="Trebuchet MS" pitchFamily="34" charset="-120"/>
               </a:rPr>
-              <a:t>mistaken</a:t>
+              <a:t>mistake</a:t>
             </a:r>
             <a:endParaRPr lang="en-US" sz="2800" dirty="0"/>
           </a:p>
@@ -15215,7 +14808,7 @@
         </p:nvSpPr>
         <p:spPr>
           <a:xfrm>
-            <a:off x="2221992" y="2258568"/>
+            <a:off x="2938272" y="2258568"/>
             <a:ext cx="1828800" cy="292608"/>
           </a:xfrm>
           <a:prstGeom prst="rect">
@@ -15249,7 +14842,7 @@
         </p:nvSpPr>
         <p:spPr>
           <a:xfrm>
-            <a:off x="2221992" y="2258568"/>
+            <a:off x="2938272" y="2258568"/>
             <a:ext cx="1828800" cy="292608"/>
           </a:xfrm>
           <a:prstGeom prst="rect">
@@ -15288,7 +14881,7 @@
         </p:nvSpPr>
         <p:spPr>
           <a:xfrm>
-            <a:off x="2221992" y="2569464"/>
+            <a:off x="2938272" y="2569464"/>
             <a:ext cx="1828800" cy="201168"/>
           </a:xfrm>
           <a:prstGeom prst="rect">
@@ -15313,7 +14906,7 @@
                 <a:ea typeface="Calibri" pitchFamily="34" charset="-122"/>
                 <a:cs typeface="Calibri" pitchFamily="34" charset="-120"/>
               </a:rPr>
-              <a:t>wrongly</a:t>
+              <a:t>wrongly or badly</a:t>
             </a:r>
             <a:endParaRPr lang="en-US" sz="850" dirty="0"/>
           </a:p>
@@ -15327,7 +14920,7 @@
         </p:nvSpPr>
         <p:spPr>
           <a:xfrm>
-            <a:off x="4370832" y="2258568"/>
+            <a:off x="5803392" y="2258568"/>
             <a:ext cx="1828800" cy="292608"/>
           </a:xfrm>
           <a:prstGeom prst="rect">
@@ -15361,7 +14954,7 @@
         </p:nvSpPr>
         <p:spPr>
           <a:xfrm>
-            <a:off x="4370832" y="2258568"/>
+            <a:off x="5803392" y="2258568"/>
             <a:ext cx="1828800" cy="292608"/>
           </a:xfrm>
           <a:prstGeom prst="rect">
@@ -15400,7 +14993,7 @@
         </p:nvSpPr>
         <p:spPr>
           <a:xfrm>
-            <a:off x="4370832" y="2569464"/>
+            <a:off x="5803392" y="2569464"/>
             <a:ext cx="1828800" cy="201168"/>
           </a:xfrm>
           <a:prstGeom prst="rect">
@@ -15425,7 +15018,7 @@
                 <a:ea typeface="Calibri" pitchFamily="34" charset="-122"/>
                 <a:cs typeface="Calibri" pitchFamily="34" charset="-120"/>
               </a:rPr>
-              <a:t>to seize or grasp</a:t>
+              <a:t>to seize or receive</a:t>
             </a:r>
             <a:endParaRPr lang="en-US" sz="850" dirty="0"/>
           </a:p>
@@ -15439,30 +15032,23 @@
         </p:nvSpPr>
         <p:spPr>
           <a:xfrm>
-            <a:off x="6519672" y="2258568"/>
-            <a:ext cx="1828800" cy="292608"/>
+            <a:off x="365760" y="3273552"/>
+            <a:ext cx="1371600" cy="658368"/>
           </a:xfrm>
           <a:prstGeom prst="rect">
             <a:avLst>
-              <a:gd name="adj" fmla="val 25000"/>
+              <a:gd name="adj" fmla="val 8333"/>
             </a:avLst>
           </a:prstGeom>
           <a:solidFill>
-            <a:srgbClr val="FCE7F3"/>
-          </a:solidFill>
-          <a:ln w="19050">
-            <a:solidFill>
-              <a:srgbClr val="DB2777"/>
-            </a:solidFill>
-            <a:prstDash val="solid"/>
-          </a:ln>
-          <a:effectLst>
-            <a:outerShdw sx="100000" sy="100000" kx="0" ky="0" algn="bl" rotWithShape="0" blurRad="101600" dist="38100" dir="8100000">
-              <a:srgbClr val="000000">
-                <a:alpha val="12000"/>
-              </a:srgbClr>
-            </a:outerShdw>
-          </a:effectLst>
+            <a:srgbClr val="E2E8F0"/>
+          </a:solidFill>
+          <a:ln w="12700">
+            <a:solidFill>
+              <a:srgbClr val="E2E8F0"/>
+            </a:solidFill>
+            <a:prstDash val="solid"/>
+          </a:ln>
         </p:spPr>
       </p:sp>
       <p:sp>
@@ -15473,125 +15059,47 @@
         </p:nvSpPr>
         <p:spPr>
           <a:xfrm>
-            <a:off x="6519672" y="2258568"/>
-            <a:ext cx="1828800" cy="292608"/>
-          </a:xfrm>
-          <a:prstGeom prst="rect">
-            <a:avLst/>
-          </a:prstGeom>
-          <a:noFill/>
-          <a:ln/>
-        </p:spPr>
-        <p:txBody>
-          <a:bodyPr wrap="square" lIns="0" tIns="0" rIns="0" bIns="0" rtlCol="0" anchor="ctr"/>
-          <a:lstStyle/>
-          <a:p>
-            <a:pPr algn="ctr" indent="0" marL="0">
-              <a:buNone/>
-            </a:pPr>
-            <a:r>
-              <a:rPr lang="en-US" sz="1300" b="1" dirty="0">
-                <a:solidFill>
-                  <a:srgbClr val="9D174D"/>
+            <a:off x="365760" y="3273552"/>
+            <a:ext cx="1371600" cy="658368"/>
+          </a:xfrm>
+          <a:prstGeom prst="rect">
+            <a:avLst/>
+          </a:prstGeom>
+          <a:noFill/>
+          <a:ln/>
+        </p:spPr>
+        <p:txBody>
+          <a:bodyPr wrap="square" lIns="0" tIns="0" rIns="0" bIns="0" rtlCol="0" anchor="ctr"/>
+          <a:lstStyle/>
+          <a:p>
+            <a:pPr algn="ctr" indent="0" marL="0">
+              <a:buNone/>
+            </a:pPr>
+            <a:r>
+              <a:rPr lang="en-US" sz="1100" b="1" dirty="0">
+                <a:solidFill>
+                  <a:srgbClr val="475569"/>
                 </a:solidFill>
                 <a:latin typeface="Trebuchet MS" pitchFamily="34" charset="0"/>
                 <a:ea typeface="Trebuchet MS" pitchFamily="34" charset="-122"/>
                 <a:cs typeface="Trebuchet MS" pitchFamily="34" charset="-120"/>
               </a:rPr>
-              <a:t>n</a:t>
-            </a:r>
-            <a:endParaRPr lang="en-US" sz="1300" dirty="0"/>
-          </a:p>
-        </p:txBody>
-      </p:sp>
-      <p:sp>
-        <p:nvSpPr>
-          <p:cNvPr id="24" name="Text 22"/>
-          <p:cNvSpPr/>
-          <p:nvPr/>
-        </p:nvSpPr>
-        <p:spPr>
-          <a:xfrm>
-            <a:off x="6519672" y="2569464"/>
-            <a:ext cx="1828800" cy="201168"/>
-          </a:xfrm>
-          <a:prstGeom prst="rect">
-            <a:avLst/>
-          </a:prstGeom>
-          <a:noFill/>
-          <a:ln/>
-        </p:spPr>
-        <p:txBody>
-          <a:bodyPr wrap="square" lIns="0" tIns="0" rIns="0" bIns="0" rtlCol="0" anchor="t"/>
-          <a:lstStyle/>
-          <a:p>
-            <a:pPr algn="ctr" indent="0" marL="0">
-              <a:buNone/>
-            </a:pPr>
-            <a:r>
-              <a:rPr lang="en-US" sz="850" dirty="0">
-                <a:solidFill>
-                  <a:srgbClr val="475569"/>
-                </a:solidFill>
-                <a:latin typeface="Calibri" pitchFamily="34" charset="0"/>
-                <a:ea typeface="Calibri" pitchFamily="34" charset="-122"/>
-                <a:cs typeface="Calibri" pitchFamily="34" charset="-120"/>
-              </a:rPr>
-              <a:t>past participle ending</a:t>
-            </a:r>
-            <a:endParaRPr lang="en-US" sz="850" dirty="0"/>
-          </a:p>
-        </p:txBody>
-      </p:sp>
-      <p:sp>
-        <p:nvSpPr>
-          <p:cNvPr id="25" name="Text 23"/>
-          <p:cNvSpPr/>
-          <p:nvPr/>
-        </p:nvSpPr>
-        <p:spPr>
-          <a:xfrm>
-            <a:off x="6519672" y="2752344"/>
-            <a:ext cx="1828800" cy="182880"/>
-          </a:xfrm>
-          <a:prstGeom prst="rect">
-            <a:avLst/>
-          </a:prstGeom>
-          <a:noFill/>
-          <a:ln/>
-        </p:spPr>
-        <p:txBody>
-          <a:bodyPr wrap="square" lIns="0" tIns="0" rIns="0" bIns="0" rtlCol="0" anchor="t"/>
-          <a:lstStyle/>
-          <a:p>
-            <a:pPr algn="ctr" indent="0" marL="0">
-              <a:buNone/>
-            </a:pPr>
-            <a:r>
-              <a:rPr lang="en-US" sz="700" i="1" dirty="0">
-                <a:solidFill>
-                  <a:srgbClr val="94A3B8"/>
-                </a:solidFill>
-                <a:latin typeface="Calibri" pitchFamily="34" charset="0"/>
-                <a:ea typeface="Calibri" pitchFamily="34" charset="-122"/>
-                <a:cs typeface="Calibri" pitchFamily="34" charset="-120"/>
-              </a:rPr>
-              <a:t>'e' dropped before 'n' suffix</a:t>
-            </a:r>
-            <a:endParaRPr lang="en-US" sz="700" dirty="0"/>
-          </a:p>
-        </p:txBody>
-      </p:sp>
-      <p:sp>
-        <p:nvSpPr>
-          <p:cNvPr id="26" name="Shape 24"/>
-          <p:cNvSpPr/>
-          <p:nvPr/>
-        </p:nvSpPr>
-        <p:spPr>
-          <a:xfrm>
-            <a:off x="365760" y="3273552"/>
-            <a:ext cx="1371600" cy="658368"/>
+              <a:t>Syllables</a:t>
+            </a:r>
+            <a:endParaRPr lang="en-US" sz="1100" dirty="0"/>
+          </a:p>
+        </p:txBody>
+      </p:sp>
+      <p:sp>
+        <p:nvSpPr>
+          <p:cNvPr id="24" name="Shape 22"/>
+          <p:cNvSpPr/>
+          <p:nvPr/>
+        </p:nvSpPr>
+        <p:spPr>
+          <a:xfrm>
+            <a:off x="1874520" y="3273552"/>
+            <a:ext cx="6903720" cy="658368"/>
           </a:xfrm>
           <a:prstGeom prst="rect">
             <a:avLst>
@@ -15599,50 +15107,248 @@
             </a:avLst>
           </a:prstGeom>
           <a:solidFill>
-            <a:srgbClr val="E2E8F0"/>
-          </a:solidFill>
-          <a:ln w="12700">
-            <a:solidFill>
-              <a:srgbClr val="E2E8F0"/>
-            </a:solidFill>
-            <a:prstDash val="solid"/>
-          </a:ln>
-        </p:spPr>
-      </p:sp>
-      <p:sp>
-        <p:nvSpPr>
-          <p:cNvPr id="27" name="Text 25"/>
-          <p:cNvSpPr/>
-          <p:nvPr/>
-        </p:nvSpPr>
-        <p:spPr>
-          <a:xfrm>
-            <a:off x="365760" y="3273552"/>
-            <a:ext cx="1371600" cy="658368"/>
-          </a:xfrm>
-          <a:prstGeom prst="rect">
-            <a:avLst/>
-          </a:prstGeom>
-          <a:noFill/>
-          <a:ln/>
-        </p:spPr>
-        <p:txBody>
-          <a:bodyPr wrap="square" lIns="0" tIns="0" rIns="0" bIns="0" rtlCol="0" anchor="ctr"/>
-          <a:lstStyle/>
-          <a:p>
-            <a:pPr algn="ctr" indent="0" marL="0">
-              <a:buNone/>
-            </a:pPr>
-            <a:r>
-              <a:rPr lang="en-US" sz="1100" b="1" dirty="0">
-                <a:solidFill>
-                  <a:srgbClr val="475569"/>
+            <a:srgbClr val="CCFBF1"/>
+          </a:solidFill>
+          <a:ln w="12700">
+            <a:solidFill>
+              <a:srgbClr val="0D9488"/>
+            </a:solidFill>
+            <a:prstDash val="solid"/>
+          </a:ln>
+        </p:spPr>
+      </p:sp>
+      <p:sp>
+        <p:nvSpPr>
+          <p:cNvPr id="25" name="Shape 23"/>
+          <p:cNvSpPr/>
+          <p:nvPr/>
+        </p:nvSpPr>
+        <p:spPr>
+          <a:xfrm>
+            <a:off x="2999232" y="3364992"/>
+            <a:ext cx="1645920" cy="475488"/>
+          </a:xfrm>
+          <a:prstGeom prst="rect">
+            <a:avLst>
+              <a:gd name="adj" fmla="val 9615"/>
+            </a:avLst>
+          </a:prstGeom>
+          <a:solidFill>
+            <a:srgbClr val="FFFFFF"/>
+          </a:solidFill>
+          <a:ln w="12700">
+            <a:solidFill>
+              <a:srgbClr val="0D9488"/>
+            </a:solidFill>
+            <a:prstDash val="solid"/>
+          </a:ln>
+        </p:spPr>
+      </p:sp>
+      <p:sp>
+        <p:nvSpPr>
+          <p:cNvPr id="26" name="Text 24"/>
+          <p:cNvSpPr/>
+          <p:nvPr/>
+        </p:nvSpPr>
+        <p:spPr>
+          <a:xfrm>
+            <a:off x="2999232" y="3364992"/>
+            <a:ext cx="1645920" cy="475488"/>
+          </a:xfrm>
+          <a:prstGeom prst="rect">
+            <a:avLst/>
+          </a:prstGeom>
+          <a:noFill/>
+          <a:ln/>
+        </p:spPr>
+        <p:txBody>
+          <a:bodyPr wrap="square" lIns="0" tIns="0" rIns="0" bIns="0" rtlCol="0" anchor="ctr"/>
+          <a:lstStyle/>
+          <a:p>
+            <a:pPr algn="ctr" indent="0" marL="0">
+              <a:buNone/>
+            </a:pPr>
+            <a:r>
+              <a:rPr lang="en-US" sz="1400" b="1" dirty="0">
+                <a:solidFill>
+                  <a:srgbClr val="0D9488"/>
                 </a:solidFill>
                 <a:latin typeface="Trebuchet MS" pitchFamily="34" charset="0"/>
                 <a:ea typeface="Trebuchet MS" pitchFamily="34" charset="-122"/>
                 <a:cs typeface="Trebuchet MS" pitchFamily="34" charset="-120"/>
               </a:rPr>
-              <a:t>Syllables</a:t>
+              <a:t>mis</a:t>
+            </a:r>
+            <a:endParaRPr lang="en-US" sz="1400" dirty="0"/>
+          </a:p>
+        </p:txBody>
+      </p:sp>
+      <p:sp>
+        <p:nvSpPr>
+          <p:cNvPr id="27" name="Text 25"/>
+          <p:cNvSpPr/>
+          <p:nvPr/>
+        </p:nvSpPr>
+        <p:spPr>
+          <a:xfrm>
+            <a:off x="4645152" y="3364992"/>
+            <a:ext cx="1097280" cy="475488"/>
+          </a:xfrm>
+          <a:prstGeom prst="rect">
+            <a:avLst/>
+          </a:prstGeom>
+          <a:noFill/>
+          <a:ln/>
+        </p:spPr>
+        <p:txBody>
+          <a:bodyPr wrap="square" lIns="0" tIns="0" rIns="0" bIns="0" rtlCol="0" anchor="ctr"/>
+          <a:lstStyle/>
+          <a:p>
+            <a:pPr algn="ctr" indent="0" marL="0">
+              <a:buNone/>
+            </a:pPr>
+            <a:r>
+              <a:rPr lang="en-US" sz="1600" b="1" dirty="0">
+                <a:solidFill>
+                  <a:srgbClr val="0D9488"/>
+                </a:solidFill>
+                <a:latin typeface="Trebuchet MS" pitchFamily="34" charset="0"/>
+                <a:ea typeface="Trebuchet MS" pitchFamily="34" charset="-122"/>
+                <a:cs typeface="Trebuchet MS" pitchFamily="34" charset="-120"/>
+              </a:rPr>
+              <a:t>·</a:t>
+            </a:r>
+            <a:endParaRPr lang="en-US" sz="1600" dirty="0"/>
+          </a:p>
+        </p:txBody>
+      </p:sp>
+      <p:sp>
+        <p:nvSpPr>
+          <p:cNvPr id="28" name="Shape 26"/>
+          <p:cNvSpPr/>
+          <p:nvPr/>
+        </p:nvSpPr>
+        <p:spPr>
+          <a:xfrm>
+            <a:off x="5742432" y="3364992"/>
+            <a:ext cx="1645920" cy="475488"/>
+          </a:xfrm>
+          <a:prstGeom prst="rect">
+            <a:avLst>
+              <a:gd name="adj" fmla="val 9615"/>
+            </a:avLst>
+          </a:prstGeom>
+          <a:solidFill>
+            <a:srgbClr val="FFFFFF"/>
+          </a:solidFill>
+          <a:ln w="12700">
+            <a:solidFill>
+              <a:srgbClr val="0D9488"/>
+            </a:solidFill>
+            <a:prstDash val="solid"/>
+          </a:ln>
+        </p:spPr>
+      </p:sp>
+      <p:sp>
+        <p:nvSpPr>
+          <p:cNvPr id="29" name="Text 27"/>
+          <p:cNvSpPr/>
+          <p:nvPr/>
+        </p:nvSpPr>
+        <p:spPr>
+          <a:xfrm>
+            <a:off x="5742432" y="3364992"/>
+            <a:ext cx="1645920" cy="475488"/>
+          </a:xfrm>
+          <a:prstGeom prst="rect">
+            <a:avLst/>
+          </a:prstGeom>
+          <a:noFill/>
+          <a:ln/>
+        </p:spPr>
+        <p:txBody>
+          <a:bodyPr wrap="square" lIns="0" tIns="0" rIns="0" bIns="0" rtlCol="0" anchor="ctr"/>
+          <a:lstStyle/>
+          <a:p>
+            <a:pPr algn="ctr" indent="0" marL="0">
+              <a:buNone/>
+            </a:pPr>
+            <a:r>
+              <a:rPr lang="en-US" sz="1400" b="1" dirty="0">
+                <a:solidFill>
+                  <a:srgbClr val="0D9488"/>
+                </a:solidFill>
+                <a:latin typeface="Trebuchet MS" pitchFamily="34" charset="0"/>
+                <a:ea typeface="Trebuchet MS" pitchFamily="34" charset="-122"/>
+                <a:cs typeface="Trebuchet MS" pitchFamily="34" charset="-120"/>
+              </a:rPr>
+              <a:t>take</a:t>
+            </a:r>
+            <a:endParaRPr lang="en-US" sz="1400" dirty="0"/>
+          </a:p>
+        </p:txBody>
+      </p:sp>
+      <p:sp>
+        <p:nvSpPr>
+          <p:cNvPr id="30" name="Shape 28"/>
+          <p:cNvSpPr/>
+          <p:nvPr/>
+        </p:nvSpPr>
+        <p:spPr>
+          <a:xfrm>
+            <a:off x="365760" y="4096512"/>
+            <a:ext cx="1371600" cy="804672"/>
+          </a:xfrm>
+          <a:prstGeom prst="rect">
+            <a:avLst>
+              <a:gd name="adj" fmla="val 6818"/>
+            </a:avLst>
+          </a:prstGeom>
+          <a:solidFill>
+            <a:srgbClr val="E2E8F0"/>
+          </a:solidFill>
+          <a:ln w="12700">
+            <a:solidFill>
+              <a:srgbClr val="E2E8F0"/>
+            </a:solidFill>
+            <a:prstDash val="solid"/>
+          </a:ln>
+        </p:spPr>
+      </p:sp>
+      <p:sp>
+        <p:nvSpPr>
+          <p:cNvPr id="31" name="Text 29"/>
+          <p:cNvSpPr/>
+          <p:nvPr/>
+        </p:nvSpPr>
+        <p:spPr>
+          <a:xfrm>
+            <a:off x="365760" y="4096512"/>
+            <a:ext cx="1371600" cy="804672"/>
+          </a:xfrm>
+          <a:prstGeom prst="rect">
+            <a:avLst/>
+          </a:prstGeom>
+          <a:noFill/>
+          <a:ln/>
+        </p:spPr>
+        <p:txBody>
+          <a:bodyPr wrap="square" lIns="0" tIns="0" rIns="0" bIns="0" rtlCol="0" anchor="ctr"/>
+          <a:lstStyle/>
+          <a:p>
+            <a:pPr algn="ctr" indent="0" marL="0">
+              <a:buNone/>
+            </a:pPr>
+            <a:r>
+              <a:rPr lang="en-US" sz="1100" b="1" dirty="0">
+                <a:solidFill>
+                  <a:srgbClr val="475569"/>
+                </a:solidFill>
+                <a:latin typeface="Trebuchet MS" pitchFamily="34" charset="0"/>
+                <a:ea typeface="Trebuchet MS" pitchFamily="34" charset="-122"/>
+                <a:cs typeface="Trebuchet MS" pitchFamily="34" charset="-120"/>
+              </a:rPr>
+              <a:t>Phonemes</a:t>
             </a:r>
             <a:endParaRPr lang="en-US" sz="1100" dirty="0"/>
           </a:p>
@@ -15650,13 +15356,13 @@
       </p:sp>
       <p:sp>
         <p:nvSpPr>
-          <p:cNvPr id="28" name="Shape 26"/>
-          <p:cNvSpPr/>
-          <p:nvPr/>
-        </p:nvSpPr>
-        <p:spPr>
-          <a:xfrm>
-            <a:off x="1874520" y="3273552"/>
+          <p:cNvPr id="32" name="Shape 30"/>
+          <p:cNvSpPr/>
+          <p:nvPr/>
+        </p:nvSpPr>
+        <p:spPr>
+          <a:xfrm>
+            <a:off x="1874520" y="4096512"/>
             <a:ext cx="6903720" cy="658368"/>
           </a:xfrm>
           <a:prstGeom prst="rect">
@@ -15665,30 +15371,30 @@
             </a:avLst>
           </a:prstGeom>
           <a:solidFill>
-            <a:srgbClr val="CCFBF1"/>
-          </a:solidFill>
-          <a:ln w="12700">
-            <a:solidFill>
-              <a:srgbClr val="0D9488"/>
-            </a:solidFill>
-            <a:prstDash val="solid"/>
-          </a:ln>
-        </p:spPr>
-      </p:sp>
-      <p:sp>
-        <p:nvSpPr>
-          <p:cNvPr id="29" name="Shape 27"/>
-          <p:cNvSpPr/>
-          <p:nvPr/>
-        </p:nvSpPr>
-        <p:spPr>
-          <a:xfrm>
-            <a:off x="2313432" y="3364992"/>
-            <a:ext cx="1645920" cy="475488"/>
+            <a:srgbClr val="FCE7F3"/>
+          </a:solidFill>
+          <a:ln w="12700">
+            <a:solidFill>
+              <a:srgbClr val="DB2777"/>
+            </a:solidFill>
+            <a:prstDash val="solid"/>
+          </a:ln>
+        </p:spPr>
+      </p:sp>
+      <p:sp>
+        <p:nvSpPr>
+          <p:cNvPr id="33" name="Shape 31"/>
+          <p:cNvSpPr/>
+          <p:nvPr/>
+        </p:nvSpPr>
+        <p:spPr>
+          <a:xfrm>
+            <a:off x="2124837" y="4169664"/>
+            <a:ext cx="685800" cy="475488"/>
           </a:xfrm>
           <a:prstGeom prst="rect">
             <a:avLst>
-              <a:gd name="adj" fmla="val 9615"/>
+              <a:gd name="adj" fmla="val 7692"/>
             </a:avLst>
           </a:prstGeom>
           <a:solidFill>
@@ -15696,104 +15402,131 @@
           </a:solidFill>
           <a:ln w="12700">
             <a:solidFill>
-              <a:srgbClr val="0D9488"/>
-            </a:solidFill>
-            <a:prstDash val="solid"/>
-          </a:ln>
-        </p:spPr>
-      </p:sp>
-      <p:sp>
-        <p:nvSpPr>
-          <p:cNvPr id="30" name="Text 28"/>
-          <p:cNvSpPr/>
-          <p:nvPr/>
-        </p:nvSpPr>
-        <p:spPr>
-          <a:xfrm>
-            <a:off x="2313432" y="3364992"/>
-            <a:ext cx="1645920" cy="475488"/>
-          </a:xfrm>
-          <a:prstGeom prst="rect">
-            <a:avLst/>
-          </a:prstGeom>
-          <a:noFill/>
-          <a:ln/>
-        </p:spPr>
-        <p:txBody>
-          <a:bodyPr wrap="square" lIns="0" tIns="0" rIns="0" bIns="0" rtlCol="0" anchor="ctr"/>
-          <a:lstStyle/>
-          <a:p>
-            <a:pPr algn="ctr" indent="0" marL="0">
-              <a:buNone/>
-            </a:pPr>
-            <a:r>
-              <a:rPr lang="en-US" sz="1400" b="1" dirty="0">
-                <a:solidFill>
-                  <a:srgbClr val="0D9488"/>
+              <a:srgbClr val="DB2777"/>
+            </a:solidFill>
+            <a:prstDash val="solid"/>
+          </a:ln>
+        </p:spPr>
+      </p:sp>
+      <p:sp>
+        <p:nvSpPr>
+          <p:cNvPr id="34" name="Text 32"/>
+          <p:cNvSpPr/>
+          <p:nvPr/>
+        </p:nvSpPr>
+        <p:spPr>
+          <a:xfrm>
+            <a:off x="2124837" y="4169664"/>
+            <a:ext cx="685800" cy="475488"/>
+          </a:xfrm>
+          <a:prstGeom prst="rect">
+            <a:avLst/>
+          </a:prstGeom>
+          <a:noFill/>
+          <a:ln/>
+        </p:spPr>
+        <p:txBody>
+          <a:bodyPr wrap="square" lIns="0" tIns="0" rIns="0" bIns="0" rtlCol="0" anchor="ctr"/>
+          <a:lstStyle/>
+          <a:p>
+            <a:pPr algn="ctr" indent="0" marL="0">
+              <a:buNone/>
+            </a:pPr>
+            <a:r>
+              <a:rPr lang="en-US" sz="900" b="1" dirty="0">
+                <a:solidFill>
+                  <a:srgbClr val="9D174D"/>
                 </a:solidFill>
                 <a:latin typeface="Trebuchet MS" pitchFamily="34" charset="0"/>
                 <a:ea typeface="Trebuchet MS" pitchFamily="34" charset="-122"/>
                 <a:cs typeface="Trebuchet MS" pitchFamily="34" charset="-120"/>
               </a:rPr>
-              <a:t>mis</a:t>
-            </a:r>
-            <a:endParaRPr lang="en-US" sz="1400" dirty="0"/>
-          </a:p>
-        </p:txBody>
-      </p:sp>
-      <p:sp>
-        <p:nvSpPr>
-          <p:cNvPr id="31" name="Text 29"/>
-          <p:cNvSpPr/>
-          <p:nvPr/>
-        </p:nvSpPr>
-        <p:spPr>
-          <a:xfrm>
-            <a:off x="3959352" y="3364992"/>
-            <a:ext cx="411480" cy="475488"/>
-          </a:xfrm>
-          <a:prstGeom prst="rect">
-            <a:avLst/>
-          </a:prstGeom>
-          <a:noFill/>
-          <a:ln/>
-        </p:spPr>
-        <p:txBody>
-          <a:bodyPr wrap="square" lIns="0" tIns="0" rIns="0" bIns="0" rtlCol="0" anchor="ctr"/>
-          <a:lstStyle/>
-          <a:p>
-            <a:pPr algn="ctr" indent="0" marL="0">
-              <a:buNone/>
-            </a:pPr>
-            <a:r>
-              <a:rPr lang="en-US" sz="1600" b="1" dirty="0">
-                <a:solidFill>
-                  <a:srgbClr val="0D9488"/>
+              <a:t>m</a:t>
+            </a:r>
+            <a:endParaRPr lang="en-US" sz="900" dirty="0"/>
+          </a:p>
+        </p:txBody>
+      </p:sp>
+      <p:sp>
+        <p:nvSpPr>
+          <p:cNvPr id="35" name="Shape 33"/>
+          <p:cNvSpPr/>
+          <p:nvPr/>
+        </p:nvSpPr>
+        <p:spPr>
+          <a:xfrm>
+            <a:off x="3033522" y="4169664"/>
+            <a:ext cx="685800" cy="475488"/>
+          </a:xfrm>
+          <a:prstGeom prst="rect">
+            <a:avLst>
+              <a:gd name="adj" fmla="val 7692"/>
+            </a:avLst>
+          </a:prstGeom>
+          <a:solidFill>
+            <a:srgbClr val="FFFFFF"/>
+          </a:solidFill>
+          <a:ln w="12700">
+            <a:solidFill>
+              <a:srgbClr val="DB2777"/>
+            </a:solidFill>
+            <a:prstDash val="solid"/>
+          </a:ln>
+        </p:spPr>
+      </p:sp>
+      <p:sp>
+        <p:nvSpPr>
+          <p:cNvPr id="36" name="Text 34"/>
+          <p:cNvSpPr/>
+          <p:nvPr/>
+        </p:nvSpPr>
+        <p:spPr>
+          <a:xfrm>
+            <a:off x="3033522" y="4169664"/>
+            <a:ext cx="685800" cy="475488"/>
+          </a:xfrm>
+          <a:prstGeom prst="rect">
+            <a:avLst/>
+          </a:prstGeom>
+          <a:noFill/>
+          <a:ln/>
+        </p:spPr>
+        <p:txBody>
+          <a:bodyPr wrap="square" lIns="0" tIns="0" rIns="0" bIns="0" rtlCol="0" anchor="ctr"/>
+          <a:lstStyle/>
+          <a:p>
+            <a:pPr algn="ctr" indent="0" marL="0">
+              <a:buNone/>
+            </a:pPr>
+            <a:r>
+              <a:rPr lang="en-US" sz="900" b="1" dirty="0">
+                <a:solidFill>
+                  <a:srgbClr val="9D174D"/>
                 </a:solidFill>
                 <a:latin typeface="Trebuchet MS" pitchFamily="34" charset="0"/>
                 <a:ea typeface="Trebuchet MS" pitchFamily="34" charset="-122"/>
                 <a:cs typeface="Trebuchet MS" pitchFamily="34" charset="-120"/>
               </a:rPr>
-              <a:t>·</a:t>
-            </a:r>
-            <a:endParaRPr lang="en-US" sz="1600" dirty="0"/>
-          </a:p>
-        </p:txBody>
-      </p:sp>
-      <p:sp>
-        <p:nvSpPr>
-          <p:cNvPr id="32" name="Shape 30"/>
-          <p:cNvSpPr/>
-          <p:nvPr/>
-        </p:nvSpPr>
-        <p:spPr>
-          <a:xfrm>
-            <a:off x="4370832" y="3364992"/>
-            <a:ext cx="1645920" cy="475488"/>
+              <a:t>i</a:t>
+            </a:r>
+            <a:endParaRPr lang="en-US" sz="900" dirty="0"/>
+          </a:p>
+        </p:txBody>
+      </p:sp>
+      <p:sp>
+        <p:nvSpPr>
+          <p:cNvPr id="37" name="Shape 35"/>
+          <p:cNvSpPr/>
+          <p:nvPr/>
+        </p:nvSpPr>
+        <p:spPr>
+          <a:xfrm>
+            <a:off x="3942207" y="4169664"/>
+            <a:ext cx="685800" cy="475488"/>
           </a:xfrm>
           <a:prstGeom prst="rect">
             <a:avLst>
-              <a:gd name="adj" fmla="val 9615"/>
+              <a:gd name="adj" fmla="val 7692"/>
             </a:avLst>
           </a:prstGeom>
           <a:solidFill>
@@ -15801,104 +15534,131 @@
           </a:solidFill>
           <a:ln w="12700">
             <a:solidFill>
-              <a:srgbClr val="0D9488"/>
-            </a:solidFill>
-            <a:prstDash val="solid"/>
-          </a:ln>
-        </p:spPr>
-      </p:sp>
-      <p:sp>
-        <p:nvSpPr>
-          <p:cNvPr id="33" name="Text 31"/>
-          <p:cNvSpPr/>
-          <p:nvPr/>
-        </p:nvSpPr>
-        <p:spPr>
-          <a:xfrm>
-            <a:off x="4370832" y="3364992"/>
-            <a:ext cx="1645920" cy="475488"/>
-          </a:xfrm>
-          <a:prstGeom prst="rect">
-            <a:avLst/>
-          </a:prstGeom>
-          <a:noFill/>
-          <a:ln/>
-        </p:spPr>
-        <p:txBody>
-          <a:bodyPr wrap="square" lIns="0" tIns="0" rIns="0" bIns="0" rtlCol="0" anchor="ctr"/>
-          <a:lstStyle/>
-          <a:p>
-            <a:pPr algn="ctr" indent="0" marL="0">
-              <a:buNone/>
-            </a:pPr>
-            <a:r>
-              <a:rPr lang="en-US" sz="1400" b="1" dirty="0">
-                <a:solidFill>
-                  <a:srgbClr val="0D9488"/>
+              <a:srgbClr val="DB2777"/>
+            </a:solidFill>
+            <a:prstDash val="solid"/>
+          </a:ln>
+        </p:spPr>
+      </p:sp>
+      <p:sp>
+        <p:nvSpPr>
+          <p:cNvPr id="38" name="Text 36"/>
+          <p:cNvSpPr/>
+          <p:nvPr/>
+        </p:nvSpPr>
+        <p:spPr>
+          <a:xfrm>
+            <a:off x="3942207" y="4169664"/>
+            <a:ext cx="685800" cy="475488"/>
+          </a:xfrm>
+          <a:prstGeom prst="rect">
+            <a:avLst/>
+          </a:prstGeom>
+          <a:noFill/>
+          <a:ln/>
+        </p:spPr>
+        <p:txBody>
+          <a:bodyPr wrap="square" lIns="0" tIns="0" rIns="0" bIns="0" rtlCol="0" anchor="ctr"/>
+          <a:lstStyle/>
+          <a:p>
+            <a:pPr algn="ctr" indent="0" marL="0">
+              <a:buNone/>
+            </a:pPr>
+            <a:r>
+              <a:rPr lang="en-US" sz="900" b="1" dirty="0">
+                <a:solidFill>
+                  <a:srgbClr val="9D174D"/>
                 </a:solidFill>
                 <a:latin typeface="Trebuchet MS" pitchFamily="34" charset="0"/>
                 <a:ea typeface="Trebuchet MS" pitchFamily="34" charset="-122"/>
                 <a:cs typeface="Trebuchet MS" pitchFamily="34" charset="-120"/>
               </a:rPr>
-              <a:t>ta</a:t>
-            </a:r>
-            <a:endParaRPr lang="en-US" sz="1400" dirty="0"/>
-          </a:p>
-        </p:txBody>
-      </p:sp>
-      <p:sp>
-        <p:nvSpPr>
-          <p:cNvPr id="34" name="Text 32"/>
-          <p:cNvSpPr/>
-          <p:nvPr/>
-        </p:nvSpPr>
-        <p:spPr>
-          <a:xfrm>
-            <a:off x="6016752" y="3364992"/>
-            <a:ext cx="411480" cy="475488"/>
-          </a:xfrm>
-          <a:prstGeom prst="rect">
-            <a:avLst/>
-          </a:prstGeom>
-          <a:noFill/>
-          <a:ln/>
-        </p:spPr>
-        <p:txBody>
-          <a:bodyPr wrap="square" lIns="0" tIns="0" rIns="0" bIns="0" rtlCol="0" anchor="ctr"/>
-          <a:lstStyle/>
-          <a:p>
-            <a:pPr algn="ctr" indent="0" marL="0">
-              <a:buNone/>
-            </a:pPr>
-            <a:r>
-              <a:rPr lang="en-US" sz="1600" b="1" dirty="0">
-                <a:solidFill>
-                  <a:srgbClr val="0D9488"/>
+              <a:t>s</a:t>
+            </a:r>
+            <a:endParaRPr lang="en-US" sz="900" dirty="0"/>
+          </a:p>
+        </p:txBody>
+      </p:sp>
+      <p:sp>
+        <p:nvSpPr>
+          <p:cNvPr id="39" name="Shape 37"/>
+          <p:cNvSpPr/>
+          <p:nvPr/>
+        </p:nvSpPr>
+        <p:spPr>
+          <a:xfrm>
+            <a:off x="4850892" y="4169664"/>
+            <a:ext cx="685800" cy="475488"/>
+          </a:xfrm>
+          <a:prstGeom prst="rect">
+            <a:avLst>
+              <a:gd name="adj" fmla="val 7692"/>
+            </a:avLst>
+          </a:prstGeom>
+          <a:solidFill>
+            <a:srgbClr val="FFFFFF"/>
+          </a:solidFill>
+          <a:ln w="12700">
+            <a:solidFill>
+              <a:srgbClr val="DB2777"/>
+            </a:solidFill>
+            <a:prstDash val="solid"/>
+          </a:ln>
+        </p:spPr>
+      </p:sp>
+      <p:sp>
+        <p:nvSpPr>
+          <p:cNvPr id="40" name="Text 38"/>
+          <p:cNvSpPr/>
+          <p:nvPr/>
+        </p:nvSpPr>
+        <p:spPr>
+          <a:xfrm>
+            <a:off x="4850892" y="4169664"/>
+            <a:ext cx="685800" cy="475488"/>
+          </a:xfrm>
+          <a:prstGeom prst="rect">
+            <a:avLst/>
+          </a:prstGeom>
+          <a:noFill/>
+          <a:ln/>
+        </p:spPr>
+        <p:txBody>
+          <a:bodyPr wrap="square" lIns="0" tIns="0" rIns="0" bIns="0" rtlCol="0" anchor="ctr"/>
+          <a:lstStyle/>
+          <a:p>
+            <a:pPr algn="ctr" indent="0" marL="0">
+              <a:buNone/>
+            </a:pPr>
+            <a:r>
+              <a:rPr lang="en-US" sz="900" b="1" dirty="0">
+                <a:solidFill>
+                  <a:srgbClr val="9D174D"/>
                 </a:solidFill>
                 <a:latin typeface="Trebuchet MS" pitchFamily="34" charset="0"/>
                 <a:ea typeface="Trebuchet MS" pitchFamily="34" charset="-122"/>
                 <a:cs typeface="Trebuchet MS" pitchFamily="34" charset="-120"/>
               </a:rPr>
-              <a:t>·</a:t>
-            </a:r>
-            <a:endParaRPr lang="en-US" sz="1600" dirty="0"/>
-          </a:p>
-        </p:txBody>
-      </p:sp>
-      <p:sp>
-        <p:nvSpPr>
-          <p:cNvPr id="35" name="Shape 33"/>
-          <p:cNvSpPr/>
-          <p:nvPr/>
-        </p:nvSpPr>
-        <p:spPr>
-          <a:xfrm>
-            <a:off x="6428232" y="3364992"/>
-            <a:ext cx="1645920" cy="475488"/>
+              <a:t>t</a:t>
+            </a:r>
+            <a:endParaRPr lang="en-US" sz="900" dirty="0"/>
+          </a:p>
+        </p:txBody>
+      </p:sp>
+      <p:sp>
+        <p:nvSpPr>
+          <p:cNvPr id="41" name="Shape 39"/>
+          <p:cNvSpPr/>
+          <p:nvPr/>
+        </p:nvSpPr>
+        <p:spPr>
+          <a:xfrm>
+            <a:off x="5759577" y="4169664"/>
+            <a:ext cx="685800" cy="475488"/>
           </a:xfrm>
           <a:prstGeom prst="rect">
             <a:avLst>
-              <a:gd name="adj" fmla="val 9615"/>
+              <a:gd name="adj" fmla="val 7692"/>
             </a:avLst>
           </a:prstGeom>
           <a:solidFill>
@@ -15906,153 +15666,126 @@
           </a:solidFill>
           <a:ln w="12700">
             <a:solidFill>
-              <a:srgbClr val="0D9488"/>
-            </a:solidFill>
-            <a:prstDash val="solid"/>
-          </a:ln>
-        </p:spPr>
-      </p:sp>
-      <p:sp>
-        <p:nvSpPr>
-          <p:cNvPr id="36" name="Text 34"/>
-          <p:cNvSpPr/>
-          <p:nvPr/>
-        </p:nvSpPr>
-        <p:spPr>
-          <a:xfrm>
-            <a:off x="6428232" y="3364992"/>
-            <a:ext cx="1645920" cy="475488"/>
-          </a:xfrm>
-          <a:prstGeom prst="rect">
-            <a:avLst/>
-          </a:prstGeom>
-          <a:noFill/>
-          <a:ln/>
-        </p:spPr>
-        <p:txBody>
-          <a:bodyPr wrap="square" lIns="0" tIns="0" rIns="0" bIns="0" rtlCol="0" anchor="ctr"/>
-          <a:lstStyle/>
-          <a:p>
-            <a:pPr algn="ctr" indent="0" marL="0">
-              <a:buNone/>
-            </a:pPr>
-            <a:r>
-              <a:rPr lang="en-US" sz="1400" b="1" dirty="0">
-                <a:solidFill>
-                  <a:srgbClr val="0D9488"/>
+              <a:srgbClr val="DB2777"/>
+            </a:solidFill>
+            <a:prstDash val="solid"/>
+          </a:ln>
+        </p:spPr>
+      </p:sp>
+      <p:sp>
+        <p:nvSpPr>
+          <p:cNvPr id="42" name="Text 40"/>
+          <p:cNvSpPr/>
+          <p:nvPr/>
+        </p:nvSpPr>
+        <p:spPr>
+          <a:xfrm>
+            <a:off x="5759577" y="4169664"/>
+            <a:ext cx="685800" cy="475488"/>
+          </a:xfrm>
+          <a:prstGeom prst="rect">
+            <a:avLst/>
+          </a:prstGeom>
+          <a:noFill/>
+          <a:ln/>
+        </p:spPr>
+        <p:txBody>
+          <a:bodyPr wrap="square" lIns="0" tIns="0" rIns="0" bIns="0" rtlCol="0" anchor="ctr"/>
+          <a:lstStyle/>
+          <a:p>
+            <a:pPr algn="ctr" indent="0" marL="0">
+              <a:buNone/>
+            </a:pPr>
+            <a:r>
+              <a:rPr lang="en-US" sz="900" b="1" dirty="0">
+                <a:solidFill>
+                  <a:srgbClr val="9D174D"/>
                 </a:solidFill>
                 <a:latin typeface="Trebuchet MS" pitchFamily="34" charset="0"/>
                 <a:ea typeface="Trebuchet MS" pitchFamily="34" charset="-122"/>
                 <a:cs typeface="Trebuchet MS" pitchFamily="34" charset="-120"/>
               </a:rPr>
-              <a:t>ken</a:t>
-            </a:r>
-            <a:endParaRPr lang="en-US" sz="1400" dirty="0"/>
-          </a:p>
-        </p:txBody>
-      </p:sp>
-      <p:sp>
-        <p:nvSpPr>
-          <p:cNvPr id="37" name="Shape 35"/>
-          <p:cNvSpPr/>
-          <p:nvPr/>
-        </p:nvSpPr>
-        <p:spPr>
-          <a:xfrm>
-            <a:off x="365760" y="4096512"/>
-            <a:ext cx="1371600" cy="804672"/>
+              <a:t>a</a:t>
+            </a:r>
+            <a:endParaRPr lang="en-US" sz="900" dirty="0"/>
+          </a:p>
+        </p:txBody>
+      </p:sp>
+      <p:sp>
+        <p:nvSpPr>
+          <p:cNvPr id="43" name="Shape 41"/>
+          <p:cNvSpPr/>
+          <p:nvPr/>
+        </p:nvSpPr>
+        <p:spPr>
+          <a:xfrm>
+            <a:off x="6668262" y="4169664"/>
+            <a:ext cx="685800" cy="475488"/>
           </a:xfrm>
           <a:prstGeom prst="rect">
             <a:avLst>
-              <a:gd name="adj" fmla="val 6818"/>
+              <a:gd name="adj" fmla="val 7692"/>
             </a:avLst>
           </a:prstGeom>
           <a:solidFill>
-            <a:srgbClr val="E2E8F0"/>
-          </a:solidFill>
-          <a:ln w="12700">
-            <a:solidFill>
-              <a:srgbClr val="E2E8F0"/>
-            </a:solidFill>
-            <a:prstDash val="solid"/>
-          </a:ln>
-        </p:spPr>
-      </p:sp>
-      <p:sp>
-        <p:nvSpPr>
-          <p:cNvPr id="38" name="Text 36"/>
-          <p:cNvSpPr/>
-          <p:nvPr/>
-        </p:nvSpPr>
-        <p:spPr>
-          <a:xfrm>
-            <a:off x="365760" y="4096512"/>
-            <a:ext cx="1371600" cy="804672"/>
-          </a:xfrm>
-          <a:prstGeom prst="rect">
-            <a:avLst/>
-          </a:prstGeom>
-          <a:noFill/>
-          <a:ln/>
-        </p:spPr>
-        <p:txBody>
-          <a:bodyPr wrap="square" lIns="0" tIns="0" rIns="0" bIns="0" rtlCol="0" anchor="ctr"/>
-          <a:lstStyle/>
-          <a:p>
-            <a:pPr algn="ctr" indent="0" marL="0">
-              <a:buNone/>
-            </a:pPr>
-            <a:r>
-              <a:rPr lang="en-US" sz="1100" b="1" dirty="0">
-                <a:solidFill>
-                  <a:srgbClr val="475569"/>
+            <a:srgbClr val="FFFFFF"/>
+          </a:solidFill>
+          <a:ln w="12700">
+            <a:solidFill>
+              <a:srgbClr val="DB2777"/>
+            </a:solidFill>
+            <a:prstDash val="solid"/>
+          </a:ln>
+        </p:spPr>
+      </p:sp>
+      <p:sp>
+        <p:nvSpPr>
+          <p:cNvPr id="44" name="Text 42"/>
+          <p:cNvSpPr/>
+          <p:nvPr/>
+        </p:nvSpPr>
+        <p:spPr>
+          <a:xfrm>
+            <a:off x="6668262" y="4169664"/>
+            <a:ext cx="685800" cy="475488"/>
+          </a:xfrm>
+          <a:prstGeom prst="rect">
+            <a:avLst/>
+          </a:prstGeom>
+          <a:noFill/>
+          <a:ln/>
+        </p:spPr>
+        <p:txBody>
+          <a:bodyPr wrap="square" lIns="0" tIns="0" rIns="0" bIns="0" rtlCol="0" anchor="ctr"/>
+          <a:lstStyle/>
+          <a:p>
+            <a:pPr algn="ctr" indent="0" marL="0">
+              <a:buNone/>
+            </a:pPr>
+            <a:r>
+              <a:rPr lang="en-US" sz="900" b="1" dirty="0">
+                <a:solidFill>
+                  <a:srgbClr val="9D174D"/>
                 </a:solidFill>
                 <a:latin typeface="Trebuchet MS" pitchFamily="34" charset="0"/>
                 <a:ea typeface="Trebuchet MS" pitchFamily="34" charset="-122"/>
                 <a:cs typeface="Trebuchet MS" pitchFamily="34" charset="-120"/>
               </a:rPr>
-              <a:t>Phonemes</a:t>
-            </a:r>
-            <a:endParaRPr lang="en-US" sz="1100" dirty="0"/>
-          </a:p>
-        </p:txBody>
-      </p:sp>
-      <p:sp>
-        <p:nvSpPr>
-          <p:cNvPr id="39" name="Shape 37"/>
-          <p:cNvSpPr/>
-          <p:nvPr/>
-        </p:nvSpPr>
-        <p:spPr>
-          <a:xfrm>
-            <a:off x="1874520" y="4096512"/>
-            <a:ext cx="6903720" cy="658368"/>
-          </a:xfrm>
-          <a:prstGeom prst="rect">
-            <a:avLst>
-              <a:gd name="adj" fmla="val 8333"/>
-            </a:avLst>
-          </a:prstGeom>
-          <a:solidFill>
-            <a:srgbClr val="FCE7F3"/>
-          </a:solidFill>
-          <a:ln w="12700">
-            <a:solidFill>
-              <a:srgbClr val="DB2777"/>
-            </a:solidFill>
-            <a:prstDash val="solid"/>
-          </a:ln>
-        </p:spPr>
-      </p:sp>
-      <p:sp>
-        <p:nvSpPr>
-          <p:cNvPr id="40" name="Shape 38"/>
-          <p:cNvSpPr/>
-          <p:nvPr/>
-        </p:nvSpPr>
-        <p:spPr>
-          <a:xfrm>
-            <a:off x="2023872" y="4169664"/>
+              <a:t>k</a:t>
+            </a:r>
+            <a:endParaRPr lang="en-US" sz="900" dirty="0"/>
+          </a:p>
+        </p:txBody>
+      </p:sp>
+      <p:sp>
+        <p:nvSpPr>
+          <p:cNvPr id="45" name="Shape 43"/>
+          <p:cNvSpPr/>
+          <p:nvPr/>
+        </p:nvSpPr>
+        <p:spPr>
+          <a:xfrm>
+            <a:off x="7576947" y="4169664"/>
             <a:ext cx="685800" cy="475488"/>
           </a:xfrm>
           <a:prstGeom prst="rect">
@@ -16073,13 +15806,13 @@
       </p:sp>
       <p:sp>
         <p:nvSpPr>
-          <p:cNvPr id="41" name="Text 39"/>
-          <p:cNvSpPr/>
-          <p:nvPr/>
-        </p:nvSpPr>
-        <p:spPr>
-          <a:xfrm>
-            <a:off x="2023872" y="4169664"/>
+          <p:cNvPr id="46" name="Text 44"/>
+          <p:cNvSpPr/>
+          <p:nvPr/>
+        </p:nvSpPr>
+        <p:spPr>
+          <a:xfrm>
+            <a:off x="7576947" y="4169664"/>
             <a:ext cx="685800" cy="475488"/>
           </a:xfrm>
           <a:prstGeom prst="rect">
@@ -16104,469 +15837,7 @@
                 <a:ea typeface="Trebuchet MS" pitchFamily="34" charset="-122"/>
                 <a:cs typeface="Trebuchet MS" pitchFamily="34" charset="-120"/>
               </a:rPr>
-              <a:t>m</a:t>
-            </a:r>
-            <a:endParaRPr lang="en-US" sz="900" dirty="0"/>
-          </a:p>
-        </p:txBody>
-      </p:sp>
-      <p:sp>
-        <p:nvSpPr>
-          <p:cNvPr id="42" name="Shape 40"/>
-          <p:cNvSpPr/>
-          <p:nvPr/>
-        </p:nvSpPr>
-        <p:spPr>
-          <a:xfrm>
-            <a:off x="2831592" y="4169664"/>
-            <a:ext cx="685800" cy="475488"/>
-          </a:xfrm>
-          <a:prstGeom prst="rect">
-            <a:avLst>
-              <a:gd name="adj" fmla="val 7692"/>
-            </a:avLst>
-          </a:prstGeom>
-          <a:solidFill>
-            <a:srgbClr val="FFFFFF"/>
-          </a:solidFill>
-          <a:ln w="12700">
-            <a:solidFill>
-              <a:srgbClr val="DB2777"/>
-            </a:solidFill>
-            <a:prstDash val="solid"/>
-          </a:ln>
-        </p:spPr>
-      </p:sp>
-      <p:sp>
-        <p:nvSpPr>
-          <p:cNvPr id="43" name="Text 41"/>
-          <p:cNvSpPr/>
-          <p:nvPr/>
-        </p:nvSpPr>
-        <p:spPr>
-          <a:xfrm>
-            <a:off x="2831592" y="4169664"/>
-            <a:ext cx="685800" cy="475488"/>
-          </a:xfrm>
-          <a:prstGeom prst="rect">
-            <a:avLst/>
-          </a:prstGeom>
-          <a:noFill/>
-          <a:ln/>
-        </p:spPr>
-        <p:txBody>
-          <a:bodyPr wrap="square" lIns="0" tIns="0" rIns="0" bIns="0" rtlCol="0" anchor="ctr"/>
-          <a:lstStyle/>
-          <a:p>
-            <a:pPr algn="ctr" indent="0" marL="0">
-              <a:buNone/>
-            </a:pPr>
-            <a:r>
-              <a:rPr lang="en-US" sz="900" b="1" dirty="0">
-                <a:solidFill>
-                  <a:srgbClr val="9D174D"/>
-                </a:solidFill>
-                <a:latin typeface="Trebuchet MS" pitchFamily="34" charset="0"/>
-                <a:ea typeface="Trebuchet MS" pitchFamily="34" charset="-122"/>
-                <a:cs typeface="Trebuchet MS" pitchFamily="34" charset="-120"/>
-              </a:rPr>
-              <a:t>i</a:t>
-            </a:r>
-            <a:endParaRPr lang="en-US" sz="900" dirty="0"/>
-          </a:p>
-        </p:txBody>
-      </p:sp>
-      <p:sp>
-        <p:nvSpPr>
-          <p:cNvPr id="44" name="Shape 42"/>
-          <p:cNvSpPr/>
-          <p:nvPr/>
-        </p:nvSpPr>
-        <p:spPr>
-          <a:xfrm>
-            <a:off x="3639312" y="4169664"/>
-            <a:ext cx="685800" cy="475488"/>
-          </a:xfrm>
-          <a:prstGeom prst="rect">
-            <a:avLst>
-              <a:gd name="adj" fmla="val 7692"/>
-            </a:avLst>
-          </a:prstGeom>
-          <a:solidFill>
-            <a:srgbClr val="FFFFFF"/>
-          </a:solidFill>
-          <a:ln w="12700">
-            <a:solidFill>
-              <a:srgbClr val="DB2777"/>
-            </a:solidFill>
-            <a:prstDash val="solid"/>
-          </a:ln>
-        </p:spPr>
-      </p:sp>
-      <p:sp>
-        <p:nvSpPr>
-          <p:cNvPr id="45" name="Text 43"/>
-          <p:cNvSpPr/>
-          <p:nvPr/>
-        </p:nvSpPr>
-        <p:spPr>
-          <a:xfrm>
-            <a:off x="3639312" y="4169664"/>
-            <a:ext cx="685800" cy="475488"/>
-          </a:xfrm>
-          <a:prstGeom prst="rect">
-            <a:avLst/>
-          </a:prstGeom>
-          <a:noFill/>
-          <a:ln/>
-        </p:spPr>
-        <p:txBody>
-          <a:bodyPr wrap="square" lIns="0" tIns="0" rIns="0" bIns="0" rtlCol="0" anchor="ctr"/>
-          <a:lstStyle/>
-          <a:p>
-            <a:pPr algn="ctr" indent="0" marL="0">
-              <a:buNone/>
-            </a:pPr>
-            <a:r>
-              <a:rPr lang="en-US" sz="900" b="1" dirty="0">
-                <a:solidFill>
-                  <a:srgbClr val="9D174D"/>
-                </a:solidFill>
-                <a:latin typeface="Trebuchet MS" pitchFamily="34" charset="0"/>
-                <a:ea typeface="Trebuchet MS" pitchFamily="34" charset="-122"/>
-                <a:cs typeface="Trebuchet MS" pitchFamily="34" charset="-120"/>
-              </a:rPr>
-              <a:t>s</a:t>
-            </a:r>
-            <a:endParaRPr lang="en-US" sz="900" dirty="0"/>
-          </a:p>
-        </p:txBody>
-      </p:sp>
-      <p:sp>
-        <p:nvSpPr>
-          <p:cNvPr id="46" name="Shape 44"/>
-          <p:cNvSpPr/>
-          <p:nvPr/>
-        </p:nvSpPr>
-        <p:spPr>
-          <a:xfrm>
-            <a:off x="4447032" y="4169664"/>
-            <a:ext cx="685800" cy="475488"/>
-          </a:xfrm>
-          <a:prstGeom prst="rect">
-            <a:avLst>
-              <a:gd name="adj" fmla="val 7692"/>
-            </a:avLst>
-          </a:prstGeom>
-          <a:solidFill>
-            <a:srgbClr val="FFFFFF"/>
-          </a:solidFill>
-          <a:ln w="12700">
-            <a:solidFill>
-              <a:srgbClr val="DB2777"/>
-            </a:solidFill>
-            <a:prstDash val="solid"/>
-          </a:ln>
-        </p:spPr>
-      </p:sp>
-      <p:sp>
-        <p:nvSpPr>
-          <p:cNvPr id="47" name="Text 45"/>
-          <p:cNvSpPr/>
-          <p:nvPr/>
-        </p:nvSpPr>
-        <p:spPr>
-          <a:xfrm>
-            <a:off x="4447032" y="4169664"/>
-            <a:ext cx="685800" cy="475488"/>
-          </a:xfrm>
-          <a:prstGeom prst="rect">
-            <a:avLst/>
-          </a:prstGeom>
-          <a:noFill/>
-          <a:ln/>
-        </p:spPr>
-        <p:txBody>
-          <a:bodyPr wrap="square" lIns="0" tIns="0" rIns="0" bIns="0" rtlCol="0" anchor="ctr"/>
-          <a:lstStyle/>
-          <a:p>
-            <a:pPr algn="ctr" indent="0" marL="0">
-              <a:buNone/>
-            </a:pPr>
-            <a:r>
-              <a:rPr lang="en-US" sz="900" b="1" dirty="0">
-                <a:solidFill>
-                  <a:srgbClr val="9D174D"/>
-                </a:solidFill>
-                <a:latin typeface="Trebuchet MS" pitchFamily="34" charset="0"/>
-                <a:ea typeface="Trebuchet MS" pitchFamily="34" charset="-122"/>
-                <a:cs typeface="Trebuchet MS" pitchFamily="34" charset="-120"/>
-              </a:rPr>
-              <a:t>t</a:t>
-            </a:r>
-            <a:endParaRPr lang="en-US" sz="900" dirty="0"/>
-          </a:p>
-        </p:txBody>
-      </p:sp>
-      <p:sp>
-        <p:nvSpPr>
-          <p:cNvPr id="48" name="Shape 46"/>
-          <p:cNvSpPr/>
-          <p:nvPr/>
-        </p:nvSpPr>
-        <p:spPr>
-          <a:xfrm>
-            <a:off x="5254752" y="4169664"/>
-            <a:ext cx="685800" cy="475488"/>
-          </a:xfrm>
-          <a:prstGeom prst="rect">
-            <a:avLst>
-              <a:gd name="adj" fmla="val 7692"/>
-            </a:avLst>
-          </a:prstGeom>
-          <a:solidFill>
-            <a:srgbClr val="FFFFFF"/>
-          </a:solidFill>
-          <a:ln w="12700">
-            <a:solidFill>
-              <a:srgbClr val="DB2777"/>
-            </a:solidFill>
-            <a:prstDash val="solid"/>
-          </a:ln>
-        </p:spPr>
-      </p:sp>
-      <p:sp>
-        <p:nvSpPr>
-          <p:cNvPr id="49" name="Text 47"/>
-          <p:cNvSpPr/>
-          <p:nvPr/>
-        </p:nvSpPr>
-        <p:spPr>
-          <a:xfrm>
-            <a:off x="5254752" y="4169664"/>
-            <a:ext cx="685800" cy="475488"/>
-          </a:xfrm>
-          <a:prstGeom prst="rect">
-            <a:avLst/>
-          </a:prstGeom>
-          <a:noFill/>
-          <a:ln/>
-        </p:spPr>
-        <p:txBody>
-          <a:bodyPr wrap="square" lIns="0" tIns="0" rIns="0" bIns="0" rtlCol="0" anchor="ctr"/>
-          <a:lstStyle/>
-          <a:p>
-            <a:pPr algn="ctr" indent="0" marL="0">
-              <a:buNone/>
-            </a:pPr>
-            <a:r>
-              <a:rPr lang="en-US" sz="900" b="1" dirty="0">
-                <a:solidFill>
-                  <a:srgbClr val="9D174D"/>
-                </a:solidFill>
-                <a:latin typeface="Trebuchet MS" pitchFamily="34" charset="0"/>
-                <a:ea typeface="Trebuchet MS" pitchFamily="34" charset="-122"/>
-                <a:cs typeface="Trebuchet MS" pitchFamily="34" charset="-120"/>
-              </a:rPr>
-              <a:t>a</a:t>
-            </a:r>
-            <a:endParaRPr lang="en-US" sz="900" dirty="0"/>
-          </a:p>
-        </p:txBody>
-      </p:sp>
-      <p:sp>
-        <p:nvSpPr>
-          <p:cNvPr id="50" name="Shape 48"/>
-          <p:cNvSpPr/>
-          <p:nvPr/>
-        </p:nvSpPr>
-        <p:spPr>
-          <a:xfrm>
-            <a:off x="6062472" y="4169664"/>
-            <a:ext cx="685800" cy="475488"/>
-          </a:xfrm>
-          <a:prstGeom prst="rect">
-            <a:avLst>
-              <a:gd name="adj" fmla="val 7692"/>
-            </a:avLst>
-          </a:prstGeom>
-          <a:solidFill>
-            <a:srgbClr val="FFFFFF"/>
-          </a:solidFill>
-          <a:ln w="12700">
-            <a:solidFill>
-              <a:srgbClr val="DB2777"/>
-            </a:solidFill>
-            <a:prstDash val="solid"/>
-          </a:ln>
-        </p:spPr>
-      </p:sp>
-      <p:sp>
-        <p:nvSpPr>
-          <p:cNvPr id="51" name="Text 49"/>
-          <p:cNvSpPr/>
-          <p:nvPr/>
-        </p:nvSpPr>
-        <p:spPr>
-          <a:xfrm>
-            <a:off x="6062472" y="4169664"/>
-            <a:ext cx="685800" cy="475488"/>
-          </a:xfrm>
-          <a:prstGeom prst="rect">
-            <a:avLst/>
-          </a:prstGeom>
-          <a:noFill/>
-          <a:ln/>
-        </p:spPr>
-        <p:txBody>
-          <a:bodyPr wrap="square" lIns="0" tIns="0" rIns="0" bIns="0" rtlCol="0" anchor="ctr"/>
-          <a:lstStyle/>
-          <a:p>
-            <a:pPr algn="ctr" indent="0" marL="0">
-              <a:buNone/>
-            </a:pPr>
-            <a:r>
-              <a:rPr lang="en-US" sz="900" b="1" dirty="0">
-                <a:solidFill>
-                  <a:srgbClr val="9D174D"/>
-                </a:solidFill>
-                <a:latin typeface="Trebuchet MS" pitchFamily="34" charset="0"/>
-                <a:ea typeface="Trebuchet MS" pitchFamily="34" charset="-122"/>
-                <a:cs typeface="Trebuchet MS" pitchFamily="34" charset="-120"/>
-              </a:rPr>
-              <a:t>k</a:t>
-            </a:r>
-            <a:endParaRPr lang="en-US" sz="900" dirty="0"/>
-          </a:p>
-        </p:txBody>
-      </p:sp>
-      <p:sp>
-        <p:nvSpPr>
-          <p:cNvPr id="52" name="Shape 50"/>
-          <p:cNvSpPr/>
-          <p:nvPr/>
-        </p:nvSpPr>
-        <p:spPr>
-          <a:xfrm>
-            <a:off x="6870192" y="4169664"/>
-            <a:ext cx="685800" cy="475488"/>
-          </a:xfrm>
-          <a:prstGeom prst="rect">
-            <a:avLst>
-              <a:gd name="adj" fmla="val 7692"/>
-            </a:avLst>
-          </a:prstGeom>
-          <a:solidFill>
-            <a:srgbClr val="FFFFFF"/>
-          </a:solidFill>
-          <a:ln w="12700">
-            <a:solidFill>
-              <a:srgbClr val="DB2777"/>
-            </a:solidFill>
-            <a:prstDash val="solid"/>
-          </a:ln>
-        </p:spPr>
-      </p:sp>
-      <p:sp>
-        <p:nvSpPr>
-          <p:cNvPr id="53" name="Text 51"/>
-          <p:cNvSpPr/>
-          <p:nvPr/>
-        </p:nvSpPr>
-        <p:spPr>
-          <a:xfrm>
-            <a:off x="6870192" y="4169664"/>
-            <a:ext cx="685800" cy="475488"/>
-          </a:xfrm>
-          <a:prstGeom prst="rect">
-            <a:avLst/>
-          </a:prstGeom>
-          <a:noFill/>
-          <a:ln/>
-        </p:spPr>
-        <p:txBody>
-          <a:bodyPr wrap="square" lIns="0" tIns="0" rIns="0" bIns="0" rtlCol="0" anchor="ctr"/>
-          <a:lstStyle/>
-          <a:p>
-            <a:pPr algn="ctr" indent="0" marL="0">
-              <a:buNone/>
-            </a:pPr>
-            <a:r>
-              <a:rPr lang="en-US" sz="900" b="1" dirty="0">
-                <a:solidFill>
-                  <a:srgbClr val="9D174D"/>
-                </a:solidFill>
-                <a:latin typeface="Trebuchet MS" pitchFamily="34" charset="0"/>
-                <a:ea typeface="Trebuchet MS" pitchFamily="34" charset="-122"/>
-                <a:cs typeface="Trebuchet MS" pitchFamily="34" charset="-120"/>
-              </a:rPr>
               <a:t>e</a:t>
-            </a:r>
-            <a:endParaRPr lang="en-US" sz="900" dirty="0"/>
-          </a:p>
-        </p:txBody>
-      </p:sp>
-      <p:sp>
-        <p:nvSpPr>
-          <p:cNvPr id="54" name="Shape 52"/>
-          <p:cNvSpPr/>
-          <p:nvPr/>
-        </p:nvSpPr>
-        <p:spPr>
-          <a:xfrm>
-            <a:off x="7677912" y="4169664"/>
-            <a:ext cx="685800" cy="475488"/>
-          </a:xfrm>
-          <a:prstGeom prst="rect">
-            <a:avLst>
-              <a:gd name="adj" fmla="val 7692"/>
-            </a:avLst>
-          </a:prstGeom>
-          <a:solidFill>
-            <a:srgbClr val="FFFFFF"/>
-          </a:solidFill>
-          <a:ln w="12700">
-            <a:solidFill>
-              <a:srgbClr val="DB2777"/>
-            </a:solidFill>
-            <a:prstDash val="solid"/>
-          </a:ln>
-        </p:spPr>
-      </p:sp>
-      <p:sp>
-        <p:nvSpPr>
-          <p:cNvPr id="55" name="Text 53"/>
-          <p:cNvSpPr/>
-          <p:nvPr/>
-        </p:nvSpPr>
-        <p:spPr>
-          <a:xfrm>
-            <a:off x="7677912" y="4169664"/>
-            <a:ext cx="685800" cy="475488"/>
-          </a:xfrm>
-          <a:prstGeom prst="rect">
-            <a:avLst/>
-          </a:prstGeom>
-          <a:noFill/>
-          <a:ln/>
-        </p:spPr>
-        <p:txBody>
-          <a:bodyPr wrap="square" lIns="0" tIns="0" rIns="0" bIns="0" rtlCol="0" anchor="ctr"/>
-          <a:lstStyle/>
-          <a:p>
-            <a:pPr algn="ctr" indent="0" marL="0">
-              <a:buNone/>
-            </a:pPr>
-            <a:r>
-              <a:rPr lang="en-US" sz="900" b="1" dirty="0">
-                <a:solidFill>
-                  <a:srgbClr val="9D174D"/>
-                </a:solidFill>
-                <a:latin typeface="Trebuchet MS" pitchFamily="34" charset="0"/>
-                <a:ea typeface="Trebuchet MS" pitchFamily="34" charset="-122"/>
-                <a:cs typeface="Trebuchet MS" pitchFamily="34" charset="-120"/>
-              </a:rPr>
-              <a:t>n</a:t>
             </a:r>
             <a:endParaRPr lang="en-US" sz="900" dirty="0"/>
           </a:p>
@@ -17892,7 +17163,7 @@
                 <a:ea typeface="Calibri" pitchFamily="34" charset="-122"/>
                 <a:cs typeface="Calibri" pitchFamily="34" charset="-120"/>
               </a:rPr>
-              <a:t>The </a:t>
+              <a:t>After deciding to </a:t>
             </a:r>
             <a:pPr algn="l" indent="0" marL="0">
               <a:buNone/>
@@ -17909,7 +17180,7 @@
                 <a:ea typeface="Calibri" pitchFamily="34" charset="-122"/>
                 <a:cs typeface="Calibri" pitchFamily="34" charset="-120"/>
               </a:rPr>
-              <a:t>undertaker</a:t>
+              <a:t>undertake</a:t>
             </a:r>
             <a:pPr algn="l" indent="0" marL="0">
               <a:buNone/>
@@ -17923,7 +17194,7 @@
                 <a:ea typeface="Calibri" pitchFamily="34" charset="-122"/>
                 <a:cs typeface="Calibri" pitchFamily="34" charset="-120"/>
               </a:rPr>
-              <a:t> had to </a:t>
+              <a:t> the project, the class had to </a:t>
             </a:r>
             <a:pPr algn="l" indent="0" marL="0">
               <a:buNone/>
@@ -17954,7 +17225,7 @@
                 <a:ea typeface="Calibri" pitchFamily="34" charset="-122"/>
                 <a:cs typeface="Calibri" pitchFamily="34" charset="-120"/>
               </a:rPr>
-              <a:t> the photo, but his assistant was </a:t>
+              <a:t> their survey; luckily, they avoided </a:t>
             </a:r>
             <a:pPr algn="l" indent="0" marL="0">
               <a:buNone/>
@@ -17971,7 +17242,7 @@
                 <a:ea typeface="Calibri" pitchFamily="34" charset="-122"/>
                 <a:cs typeface="Calibri" pitchFamily="34" charset="-120"/>
               </a:rPr>
-              <a:t>mistaken</a:t>
+              <a:t>overtaking</a:t>
             </a:r>
             <a:pPr algn="l" indent="0" marL="0">
               <a:buNone/>
@@ -17985,7 +17256,7 @@
                 <a:ea typeface="Calibri" pitchFamily="34" charset="-122"/>
                 <a:cs typeface="Calibri" pitchFamily="34" charset="-120"/>
               </a:rPr>
-              <a:t> about which camera to use.</a:t>
+              <a:t> their time limit.</a:t>
             </a:r>
             <a:endParaRPr lang="en-US" sz="1800" dirty="0"/>
           </a:p>
@@ -18140,7 +17411,7 @@
                 <a:ea typeface="Trebuchet MS" pitchFamily="34" charset="-122"/>
                 <a:cs typeface="Trebuchet MS" pitchFamily="34" charset="-120"/>
               </a:rPr>
-              <a:t>undertaker</a:t>
+              <a:t>undertake</a:t>
             </a:r>
             <a:endParaRPr lang="en-US" sz="1400" dirty="0"/>
           </a:p>
@@ -18396,7 +17667,7 @@
                 <a:ea typeface="Trebuchet MS" pitchFamily="34" charset="-122"/>
                 <a:cs typeface="Trebuchet MS" pitchFamily="34" charset="-120"/>
               </a:rPr>
-              <a:t>mistaken</a:t>
+              <a:t>overtaking</a:t>
             </a:r>
             <a:endParaRPr lang="en-US" sz="1400" dirty="0"/>
           </a:p>
@@ -18866,7 +18137,7 @@
                 <a:ea typeface="Trebuchet MS" pitchFamily="34" charset="-122"/>
                 <a:cs typeface="Trebuchet MS" pitchFamily="34" charset="-120"/>
               </a:rPr>
-              <a:t>undertaker</a:t>
+              <a:t>undertake</a:t>
             </a:r>
             <a:endParaRPr lang="en-US" sz="2800" dirty="0"/>
           </a:p>
@@ -19693,7 +18964,7 @@
                 <a:ea typeface="Trebuchet MS" pitchFamily="34" charset="-122"/>
                 <a:cs typeface="Trebuchet MS" pitchFamily="34" charset="-120"/>
               </a:rPr>
-              <a:t>undertaker</a:t>
+              <a:t>undertake</a:t>
             </a:r>
             <a:endParaRPr lang="en-US" sz="2800" dirty="0"/>
           </a:p>
@@ -19773,7 +19044,7 @@
         </p:nvSpPr>
         <p:spPr>
           <a:xfrm>
-            <a:off x="2221992" y="2258568"/>
+            <a:off x="2938272" y="2258568"/>
             <a:ext cx="1828800" cy="292608"/>
           </a:xfrm>
           <a:prstGeom prst="rect">
@@ -19807,7 +19078,7 @@
         </p:nvSpPr>
         <p:spPr>
           <a:xfrm>
-            <a:off x="2221992" y="2258568"/>
+            <a:off x="2938272" y="2258568"/>
             <a:ext cx="1828800" cy="292608"/>
           </a:xfrm>
           <a:prstGeom prst="rect">
@@ -19846,7 +19117,7 @@
         </p:nvSpPr>
         <p:spPr>
           <a:xfrm>
-            <a:off x="2221992" y="2569464"/>
+            <a:off x="2938272" y="2569464"/>
             <a:ext cx="1828800" cy="201168"/>
           </a:xfrm>
           <a:prstGeom prst="rect">
@@ -19871,7 +19142,7 @@
                 <a:ea typeface="Calibri" pitchFamily="34" charset="-122"/>
                 <a:cs typeface="Calibri" pitchFamily="34" charset="-120"/>
               </a:rPr>
-              <a:t>below, beneath</a:t>
+              <a:t>below or in a lesser position</a:t>
             </a:r>
             <a:endParaRPr lang="en-US" sz="850" dirty="0"/>
           </a:p>
@@ -19885,7 +19156,7 @@
         </p:nvSpPr>
         <p:spPr>
           <a:xfrm>
-            <a:off x="4370832" y="2258568"/>
+            <a:off x="5803392" y="2258568"/>
             <a:ext cx="1828800" cy="292608"/>
           </a:xfrm>
           <a:prstGeom prst="rect">
@@ -19919,7 +19190,7 @@
         </p:nvSpPr>
         <p:spPr>
           <a:xfrm>
-            <a:off x="4370832" y="2258568"/>
+            <a:off x="5803392" y="2258568"/>
             <a:ext cx="1828800" cy="292608"/>
           </a:xfrm>
           <a:prstGeom prst="rect">
@@ -19958,7 +19229,7 @@
         </p:nvSpPr>
         <p:spPr>
           <a:xfrm>
-            <a:off x="4370832" y="2569464"/>
+            <a:off x="5803392" y="2569464"/>
             <a:ext cx="1828800" cy="201168"/>
           </a:xfrm>
           <a:prstGeom prst="rect">
@@ -19983,7 +19254,7 @@
                 <a:ea typeface="Calibri" pitchFamily="34" charset="-122"/>
                 <a:cs typeface="Calibri" pitchFamily="34" charset="-120"/>
               </a:rPr>
-              <a:t>to seize or grasp</a:t>
+              <a:t>to seize or receive</a:t>
             </a:r>
             <a:endParaRPr lang="en-US" sz="850" dirty="0"/>
           </a:p>
@@ -19997,30 +19268,23 @@
         </p:nvSpPr>
         <p:spPr>
           <a:xfrm>
-            <a:off x="6519672" y="2258568"/>
-            <a:ext cx="1828800" cy="292608"/>
+            <a:off x="365760" y="3273552"/>
+            <a:ext cx="1371600" cy="658368"/>
           </a:xfrm>
           <a:prstGeom prst="rect">
             <a:avLst>
-              <a:gd name="adj" fmla="val 25000"/>
+              <a:gd name="adj" fmla="val 8333"/>
             </a:avLst>
           </a:prstGeom>
           <a:solidFill>
-            <a:srgbClr val="FCE7F3"/>
-          </a:solidFill>
-          <a:ln w="19050">
-            <a:solidFill>
-              <a:srgbClr val="DB2777"/>
-            </a:solidFill>
-            <a:prstDash val="solid"/>
-          </a:ln>
-          <a:effectLst>
-            <a:outerShdw sx="100000" sy="100000" kx="0" ky="0" algn="bl" rotWithShape="0" blurRad="101600" dist="38100" dir="8100000">
-              <a:srgbClr val="000000">
-                <a:alpha val="12000"/>
-              </a:srgbClr>
-            </a:outerShdw>
-          </a:effectLst>
+            <a:srgbClr val="E2E8F0"/>
+          </a:solidFill>
+          <a:ln w="12700">
+            <a:solidFill>
+              <a:srgbClr val="E2E8F0"/>
+            </a:solidFill>
+            <a:prstDash val="solid"/>
+          </a:ln>
         </p:spPr>
       </p:sp>
       <p:sp>
@@ -20031,112 +19295,100 @@
         </p:nvSpPr>
         <p:spPr>
           <a:xfrm>
-            <a:off x="6519672" y="2258568"/>
-            <a:ext cx="1828800" cy="292608"/>
-          </a:xfrm>
-          <a:prstGeom prst="rect">
-            <a:avLst/>
-          </a:prstGeom>
-          <a:noFill/>
-          <a:ln/>
-        </p:spPr>
-        <p:txBody>
-          <a:bodyPr wrap="square" lIns="0" tIns="0" rIns="0" bIns="0" rtlCol="0" anchor="ctr"/>
-          <a:lstStyle/>
-          <a:p>
-            <a:pPr algn="ctr" indent="0" marL="0">
-              <a:buNone/>
-            </a:pPr>
-            <a:r>
-              <a:rPr lang="en-US" sz="1300" b="1" dirty="0">
-                <a:solidFill>
-                  <a:srgbClr val="9D174D"/>
+            <a:off x="365760" y="3273552"/>
+            <a:ext cx="1371600" cy="658368"/>
+          </a:xfrm>
+          <a:prstGeom prst="rect">
+            <a:avLst/>
+          </a:prstGeom>
+          <a:noFill/>
+          <a:ln/>
+        </p:spPr>
+        <p:txBody>
+          <a:bodyPr wrap="square" lIns="0" tIns="0" rIns="0" bIns="0" rtlCol="0" anchor="ctr"/>
+          <a:lstStyle/>
+          <a:p>
+            <a:pPr algn="ctr" indent="0" marL="0">
+              <a:buNone/>
+            </a:pPr>
+            <a:r>
+              <a:rPr lang="en-US" sz="1100" b="1" dirty="0">
+                <a:solidFill>
+                  <a:srgbClr val="475569"/>
                 </a:solidFill>
                 <a:latin typeface="Trebuchet MS" pitchFamily="34" charset="0"/>
                 <a:ea typeface="Trebuchet MS" pitchFamily="34" charset="-122"/>
                 <a:cs typeface="Trebuchet MS" pitchFamily="34" charset="-120"/>
               </a:rPr>
-              <a:t>er</a:t>
-            </a:r>
-            <a:endParaRPr lang="en-US" sz="1300" dirty="0"/>
-          </a:p>
-        </p:txBody>
-      </p:sp>
-      <p:sp>
-        <p:nvSpPr>
-          <p:cNvPr id="24" name="Text 22"/>
-          <p:cNvSpPr/>
-          <p:nvPr/>
-        </p:nvSpPr>
-        <p:spPr>
-          <a:xfrm>
-            <a:off x="6519672" y="2569464"/>
-            <a:ext cx="1828800" cy="201168"/>
-          </a:xfrm>
-          <a:prstGeom prst="rect">
-            <a:avLst/>
-          </a:prstGeom>
-          <a:noFill/>
-          <a:ln/>
-        </p:spPr>
-        <p:txBody>
-          <a:bodyPr wrap="square" lIns="0" tIns="0" rIns="0" bIns="0" rtlCol="0" anchor="t"/>
-          <a:lstStyle/>
-          <a:p>
-            <a:pPr algn="ctr" indent="0" marL="0">
-              <a:buNone/>
-            </a:pPr>
-            <a:r>
-              <a:rPr lang="en-US" sz="850" dirty="0">
-                <a:solidFill>
-                  <a:srgbClr val="475569"/>
+              <a:t>Syllables</a:t>
+            </a:r>
+            <a:endParaRPr lang="en-US" sz="1100" dirty="0"/>
+          </a:p>
+        </p:txBody>
+      </p:sp>
+      <p:sp>
+        <p:nvSpPr>
+          <p:cNvPr id="24" name="Shape 22"/>
+          <p:cNvSpPr/>
+          <p:nvPr/>
+        </p:nvSpPr>
+        <p:spPr>
+          <a:xfrm>
+            <a:off x="1874520" y="3273552"/>
+            <a:ext cx="6903720" cy="658368"/>
+          </a:xfrm>
+          <a:prstGeom prst="rect">
+            <a:avLst>
+              <a:gd name="adj" fmla="val 8333"/>
+            </a:avLst>
+          </a:prstGeom>
+          <a:solidFill>
+            <a:srgbClr val="F8FAFC"/>
+          </a:solidFill>
+          <a:ln w="12700">
+            <a:solidFill>
+              <a:srgbClr val="E2E8F0"/>
+            </a:solidFill>
+            <a:prstDash val="dash"/>
+          </a:ln>
+        </p:spPr>
+      </p:sp>
+      <p:sp>
+        <p:nvSpPr>
+          <p:cNvPr id="25" name="Text 23"/>
+          <p:cNvSpPr/>
+          <p:nvPr/>
+        </p:nvSpPr>
+        <p:spPr>
+          <a:xfrm>
+            <a:off x="1874520" y="3273552"/>
+            <a:ext cx="6903720" cy="658368"/>
+          </a:xfrm>
+          <a:prstGeom prst="rect">
+            <a:avLst/>
+          </a:prstGeom>
+          <a:noFill/>
+          <a:ln/>
+        </p:spPr>
+        <p:txBody>
+          <a:bodyPr wrap="square" rtlCol="0" anchor="ctr"/>
+          <a:lstStyle/>
+          <a:p>
+            <a:pPr algn="ctr" indent="0" marL="0">
+              <a:buNone/>
+            </a:pPr>
+            <a:r>
+              <a:rPr lang="en-US" sz="1100" i="1" dirty="0">
+                <a:solidFill>
+                  <a:srgbClr val="CBD5E1"/>
                 </a:solidFill>
                 <a:latin typeface="Calibri" pitchFamily="34" charset="0"/>
                 <a:ea typeface="Calibri" pitchFamily="34" charset="-122"/>
                 <a:cs typeface="Calibri" pitchFamily="34" charset="-120"/>
               </a:rPr>
-              <a:t>a person who does something</a:t>
-            </a:r>
-            <a:endParaRPr lang="en-US" sz="850" dirty="0"/>
-          </a:p>
-        </p:txBody>
-      </p:sp>
-      <p:sp>
-        <p:nvSpPr>
-          <p:cNvPr id="25" name="Text 23"/>
-          <p:cNvSpPr/>
-          <p:nvPr/>
-        </p:nvSpPr>
-        <p:spPr>
-          <a:xfrm>
-            <a:off x="6519672" y="2752344"/>
-            <a:ext cx="1828800" cy="182880"/>
-          </a:xfrm>
-          <a:prstGeom prst="rect">
-            <a:avLst/>
-          </a:prstGeom>
-          <a:noFill/>
-          <a:ln/>
-        </p:spPr>
-        <p:txBody>
-          <a:bodyPr wrap="square" lIns="0" tIns="0" rIns="0" bIns="0" rtlCol="0" anchor="t"/>
-          <a:lstStyle/>
-          <a:p>
-            <a:pPr algn="ctr" indent="0" marL="0">
-              <a:buNone/>
-            </a:pPr>
-            <a:r>
-              <a:rPr lang="en-US" sz="700" i="1" dirty="0">
-                <a:solidFill>
-                  <a:srgbClr val="94A3B8"/>
-                </a:solidFill>
-                <a:latin typeface="Calibri" pitchFamily="34" charset="0"/>
-                <a:ea typeface="Calibri" pitchFamily="34" charset="-122"/>
-                <a:cs typeface="Calibri" pitchFamily="34" charset="-120"/>
-              </a:rPr>
-              <a:t>'e' dropped before vowel suffix</a:t>
-            </a:r>
-            <a:endParaRPr lang="en-US" sz="700" dirty="0"/>
+              <a:t>Write here...</a:t>
+            </a:r>
+            <a:endParaRPr lang="en-US" sz="1100" dirty="0"/>
           </a:p>
         </p:txBody>
       </p:sp>
@@ -20148,12 +19400,12 @@
         </p:nvSpPr>
         <p:spPr>
           <a:xfrm>
-            <a:off x="365760" y="3273552"/>
-            <a:ext cx="1371600" cy="658368"/>
+            <a:off x="365760" y="4096512"/>
+            <a:ext cx="1371600" cy="804672"/>
           </a:xfrm>
           <a:prstGeom prst="rect">
             <a:avLst>
-              <a:gd name="adj" fmla="val 8333"/>
+              <a:gd name="adj" fmla="val 6818"/>
             </a:avLst>
           </a:prstGeom>
           <a:solidFill>
@@ -20175,8 +19427,8 @@
         </p:nvSpPr>
         <p:spPr>
           <a:xfrm>
-            <a:off x="365760" y="3273552"/>
-            <a:ext cx="1371600" cy="658368"/>
+            <a:off x="365760" y="4096512"/>
+            <a:ext cx="1371600" cy="804672"/>
           </a:xfrm>
           <a:prstGeom prst="rect">
             <a:avLst/>
@@ -20200,7 +19452,7 @@
                 <a:ea typeface="Trebuchet MS" pitchFamily="34" charset="-122"/>
                 <a:cs typeface="Trebuchet MS" pitchFamily="34" charset="-120"/>
               </a:rPr>
-              <a:t>Syllables</a:t>
+              <a:t>Phonemes</a:t>
             </a:r>
             <a:endParaRPr lang="en-US" sz="1100" dirty="0"/>
           </a:p>
@@ -20214,74 +19466,8 @@
         </p:nvSpPr>
         <p:spPr>
           <a:xfrm>
-            <a:off x="1874520" y="3273552"/>
-            <a:ext cx="6903720" cy="658368"/>
-          </a:xfrm>
-          <a:prstGeom prst="rect">
-            <a:avLst>
-              <a:gd name="adj" fmla="val 8333"/>
-            </a:avLst>
-          </a:prstGeom>
-          <a:solidFill>
-            <a:srgbClr val="F8FAFC"/>
-          </a:solidFill>
-          <a:ln w="12700">
-            <a:solidFill>
-              <a:srgbClr val="E2E8F0"/>
-            </a:solidFill>
-            <a:prstDash val="dash"/>
-          </a:ln>
-        </p:spPr>
-      </p:sp>
-      <p:sp>
-        <p:nvSpPr>
-          <p:cNvPr id="29" name="Text 27"/>
-          <p:cNvSpPr/>
-          <p:nvPr/>
-        </p:nvSpPr>
-        <p:spPr>
-          <a:xfrm>
-            <a:off x="1874520" y="3273552"/>
-            <a:ext cx="6903720" cy="658368"/>
-          </a:xfrm>
-          <a:prstGeom prst="rect">
-            <a:avLst/>
-          </a:prstGeom>
-          <a:noFill/>
-          <a:ln/>
-        </p:spPr>
-        <p:txBody>
-          <a:bodyPr wrap="square" rtlCol="0" anchor="ctr"/>
-          <a:lstStyle/>
-          <a:p>
-            <a:pPr algn="ctr" indent="0" marL="0">
-              <a:buNone/>
-            </a:pPr>
-            <a:r>
-              <a:rPr lang="en-US" sz="1100" i="1" dirty="0">
-                <a:solidFill>
-                  <a:srgbClr val="CBD5E1"/>
-                </a:solidFill>
-                <a:latin typeface="Calibri" pitchFamily="34" charset="0"/>
-                <a:ea typeface="Calibri" pitchFamily="34" charset="-122"/>
-                <a:cs typeface="Calibri" pitchFamily="34" charset="-120"/>
-              </a:rPr>
-              <a:t>Write here...</a:t>
-            </a:r>
-            <a:endParaRPr lang="en-US" sz="1100" dirty="0"/>
-          </a:p>
-        </p:txBody>
-      </p:sp>
-      <p:sp>
-        <p:nvSpPr>
-          <p:cNvPr id="30" name="Shape 28"/>
-          <p:cNvSpPr/>
-          <p:nvPr/>
-        </p:nvSpPr>
-        <p:spPr>
-          <a:xfrm>
-            <a:off x="365760" y="4096512"/>
-            <a:ext cx="1371600" cy="804672"/>
+            <a:off x="1874520" y="4096512"/>
+            <a:ext cx="6903720" cy="804672"/>
           </a:xfrm>
           <a:prstGeom prst="rect">
             <a:avLst>
@@ -20289,85 +19475,19 @@
             </a:avLst>
           </a:prstGeom>
           <a:solidFill>
-            <a:srgbClr val="E2E8F0"/>
+            <a:srgbClr val="F8FAFC"/>
           </a:solidFill>
           <a:ln w="12700">
             <a:solidFill>
               <a:srgbClr val="E2E8F0"/>
             </a:solidFill>
-            <a:prstDash val="solid"/>
-          </a:ln>
-        </p:spPr>
-      </p:sp>
-      <p:sp>
-        <p:nvSpPr>
-          <p:cNvPr id="31" name="Text 29"/>
-          <p:cNvSpPr/>
-          <p:nvPr/>
-        </p:nvSpPr>
-        <p:spPr>
-          <a:xfrm>
-            <a:off x="365760" y="4096512"/>
-            <a:ext cx="1371600" cy="804672"/>
-          </a:xfrm>
-          <a:prstGeom prst="rect">
-            <a:avLst/>
-          </a:prstGeom>
-          <a:noFill/>
-          <a:ln/>
-        </p:spPr>
-        <p:txBody>
-          <a:bodyPr wrap="square" lIns="0" tIns="0" rIns="0" bIns="0" rtlCol="0" anchor="ctr"/>
-          <a:lstStyle/>
-          <a:p>
-            <a:pPr algn="ctr" indent="0" marL="0">
-              <a:buNone/>
-            </a:pPr>
-            <a:r>
-              <a:rPr lang="en-US" sz="1100" b="1" dirty="0">
-                <a:solidFill>
-                  <a:srgbClr val="475569"/>
-                </a:solidFill>
-                <a:latin typeface="Trebuchet MS" pitchFamily="34" charset="0"/>
-                <a:ea typeface="Trebuchet MS" pitchFamily="34" charset="-122"/>
-                <a:cs typeface="Trebuchet MS" pitchFamily="34" charset="-120"/>
-              </a:rPr>
-              <a:t>Phonemes</a:t>
-            </a:r>
-            <a:endParaRPr lang="en-US" sz="1100" dirty="0"/>
-          </a:p>
-        </p:txBody>
-      </p:sp>
-      <p:sp>
-        <p:nvSpPr>
-          <p:cNvPr id="32" name="Shape 30"/>
-          <p:cNvSpPr/>
-          <p:nvPr/>
-        </p:nvSpPr>
-        <p:spPr>
-          <a:xfrm>
-            <a:off x="1874520" y="4096512"/>
-            <a:ext cx="6903720" cy="804672"/>
-          </a:xfrm>
-          <a:prstGeom prst="rect">
-            <a:avLst>
-              <a:gd name="adj" fmla="val 6818"/>
-            </a:avLst>
-          </a:prstGeom>
-          <a:solidFill>
-            <a:srgbClr val="F8FAFC"/>
-          </a:solidFill>
-          <a:ln w="12700">
-            <a:solidFill>
-              <a:srgbClr val="E2E8F0"/>
-            </a:solidFill>
             <a:prstDash val="dash"/>
           </a:ln>
         </p:spPr>
       </p:sp>
       <p:sp>
         <p:nvSpPr>
-          <p:cNvPr id="33" name="Text 31"/>
+          <p:cNvPr id="29" name="Text 27"/>
           <p:cNvSpPr/>
           <p:nvPr/>
         </p:nvSpPr>
@@ -20829,7 +19949,7 @@
                 <a:ea typeface="Trebuchet MS" pitchFamily="34" charset="-122"/>
                 <a:cs typeface="Trebuchet MS" pitchFamily="34" charset="-120"/>
               </a:rPr>
-              <a:t>undertaker</a:t>
+              <a:t>undertake</a:t>
             </a:r>
             <a:endParaRPr lang="en-US" sz="2800" dirty="0"/>
           </a:p>
@@ -20909,7 +20029,7 @@
         </p:nvSpPr>
         <p:spPr>
           <a:xfrm>
-            <a:off x="2221992" y="2258568"/>
+            <a:off x="2938272" y="2258568"/>
             <a:ext cx="1828800" cy="292608"/>
           </a:xfrm>
           <a:prstGeom prst="rect">
@@ -20943,7 +20063,7 @@
         </p:nvSpPr>
         <p:spPr>
           <a:xfrm>
-            <a:off x="2221992" y="2258568"/>
+            <a:off x="2938272" y="2258568"/>
             <a:ext cx="1828800" cy="292608"/>
           </a:xfrm>
           <a:prstGeom prst="rect">
@@ -20982,7 +20102,7 @@
         </p:nvSpPr>
         <p:spPr>
           <a:xfrm>
-            <a:off x="2221992" y="2569464"/>
+            <a:off x="2938272" y="2569464"/>
             <a:ext cx="1828800" cy="201168"/>
           </a:xfrm>
           <a:prstGeom prst="rect">
@@ -21007,7 +20127,7 @@
                 <a:ea typeface="Calibri" pitchFamily="34" charset="-122"/>
                 <a:cs typeface="Calibri" pitchFamily="34" charset="-120"/>
               </a:rPr>
-              <a:t>below, beneath</a:t>
+              <a:t>below or in a lesser position</a:t>
             </a:r>
             <a:endParaRPr lang="en-US" sz="850" dirty="0"/>
           </a:p>
@@ -21021,7 +20141,7 @@
         </p:nvSpPr>
         <p:spPr>
           <a:xfrm>
-            <a:off x="4370832" y="2258568"/>
+            <a:off x="5803392" y="2258568"/>
             <a:ext cx="1828800" cy="292608"/>
           </a:xfrm>
           <a:prstGeom prst="rect">
@@ -21055,7 +20175,7 @@
         </p:nvSpPr>
         <p:spPr>
           <a:xfrm>
-            <a:off x="4370832" y="2258568"/>
+            <a:off x="5803392" y="2258568"/>
             <a:ext cx="1828800" cy="292608"/>
           </a:xfrm>
           <a:prstGeom prst="rect">
@@ -21094,7 +20214,7 @@
         </p:nvSpPr>
         <p:spPr>
           <a:xfrm>
-            <a:off x="4370832" y="2569464"/>
+            <a:off x="5803392" y="2569464"/>
             <a:ext cx="1828800" cy="201168"/>
           </a:xfrm>
           <a:prstGeom prst="rect">
@@ -21119,7 +20239,7 @@
                 <a:ea typeface="Calibri" pitchFamily="34" charset="-122"/>
                 <a:cs typeface="Calibri" pitchFamily="34" charset="-120"/>
               </a:rPr>
-              <a:t>to seize or grasp</a:t>
+              <a:t>to seize or receive</a:t>
             </a:r>
             <a:endParaRPr lang="en-US" sz="850" dirty="0"/>
           </a:p>
@@ -21133,30 +20253,23 @@
         </p:nvSpPr>
         <p:spPr>
           <a:xfrm>
-            <a:off x="6519672" y="2258568"/>
-            <a:ext cx="1828800" cy="292608"/>
+            <a:off x="365760" y="3273552"/>
+            <a:ext cx="1371600" cy="658368"/>
           </a:xfrm>
           <a:prstGeom prst="rect">
             <a:avLst>
-              <a:gd name="adj" fmla="val 25000"/>
+              <a:gd name="adj" fmla="val 8333"/>
             </a:avLst>
           </a:prstGeom>
           <a:solidFill>
-            <a:srgbClr val="FCE7F3"/>
-          </a:solidFill>
-          <a:ln w="19050">
-            <a:solidFill>
-              <a:srgbClr val="DB2777"/>
-            </a:solidFill>
-            <a:prstDash val="solid"/>
-          </a:ln>
-          <a:effectLst>
-            <a:outerShdw sx="100000" sy="100000" kx="0" ky="0" algn="bl" rotWithShape="0" blurRad="101600" dist="38100" dir="8100000">
-              <a:srgbClr val="000000">
-                <a:alpha val="12000"/>
-              </a:srgbClr>
-            </a:outerShdw>
-          </a:effectLst>
+            <a:srgbClr val="E2E8F0"/>
+          </a:solidFill>
+          <a:ln w="12700">
+            <a:solidFill>
+              <a:srgbClr val="E2E8F0"/>
+            </a:solidFill>
+            <a:prstDash val="solid"/>
+          </a:ln>
         </p:spPr>
       </p:sp>
       <p:sp>
@@ -21167,125 +20280,47 @@
         </p:nvSpPr>
         <p:spPr>
           <a:xfrm>
-            <a:off x="6519672" y="2258568"/>
-            <a:ext cx="1828800" cy="292608"/>
-          </a:xfrm>
-          <a:prstGeom prst="rect">
-            <a:avLst/>
-          </a:prstGeom>
-          <a:noFill/>
-          <a:ln/>
-        </p:spPr>
-        <p:txBody>
-          <a:bodyPr wrap="square" lIns="0" tIns="0" rIns="0" bIns="0" rtlCol="0" anchor="ctr"/>
-          <a:lstStyle/>
-          <a:p>
-            <a:pPr algn="ctr" indent="0" marL="0">
-              <a:buNone/>
-            </a:pPr>
-            <a:r>
-              <a:rPr lang="en-US" sz="1300" b="1" dirty="0">
-                <a:solidFill>
-                  <a:srgbClr val="9D174D"/>
+            <a:off x="365760" y="3273552"/>
+            <a:ext cx="1371600" cy="658368"/>
+          </a:xfrm>
+          <a:prstGeom prst="rect">
+            <a:avLst/>
+          </a:prstGeom>
+          <a:noFill/>
+          <a:ln/>
+        </p:spPr>
+        <p:txBody>
+          <a:bodyPr wrap="square" lIns="0" tIns="0" rIns="0" bIns="0" rtlCol="0" anchor="ctr"/>
+          <a:lstStyle/>
+          <a:p>
+            <a:pPr algn="ctr" indent="0" marL="0">
+              <a:buNone/>
+            </a:pPr>
+            <a:r>
+              <a:rPr lang="en-US" sz="1100" b="1" dirty="0">
+                <a:solidFill>
+                  <a:srgbClr val="475569"/>
                 </a:solidFill>
                 <a:latin typeface="Trebuchet MS" pitchFamily="34" charset="0"/>
                 <a:ea typeface="Trebuchet MS" pitchFamily="34" charset="-122"/>
                 <a:cs typeface="Trebuchet MS" pitchFamily="34" charset="-120"/>
               </a:rPr>
-              <a:t>er</a:t>
-            </a:r>
-            <a:endParaRPr lang="en-US" sz="1300" dirty="0"/>
-          </a:p>
-        </p:txBody>
-      </p:sp>
-      <p:sp>
-        <p:nvSpPr>
-          <p:cNvPr id="24" name="Text 22"/>
-          <p:cNvSpPr/>
-          <p:nvPr/>
-        </p:nvSpPr>
-        <p:spPr>
-          <a:xfrm>
-            <a:off x="6519672" y="2569464"/>
-            <a:ext cx="1828800" cy="201168"/>
-          </a:xfrm>
-          <a:prstGeom prst="rect">
-            <a:avLst/>
-          </a:prstGeom>
-          <a:noFill/>
-          <a:ln/>
-        </p:spPr>
-        <p:txBody>
-          <a:bodyPr wrap="square" lIns="0" tIns="0" rIns="0" bIns="0" rtlCol="0" anchor="t"/>
-          <a:lstStyle/>
-          <a:p>
-            <a:pPr algn="ctr" indent="0" marL="0">
-              <a:buNone/>
-            </a:pPr>
-            <a:r>
-              <a:rPr lang="en-US" sz="850" dirty="0">
-                <a:solidFill>
-                  <a:srgbClr val="475569"/>
-                </a:solidFill>
-                <a:latin typeface="Calibri" pitchFamily="34" charset="0"/>
-                <a:ea typeface="Calibri" pitchFamily="34" charset="-122"/>
-                <a:cs typeface="Calibri" pitchFamily="34" charset="-120"/>
-              </a:rPr>
-              <a:t>a person who does something</a:t>
-            </a:r>
-            <a:endParaRPr lang="en-US" sz="850" dirty="0"/>
-          </a:p>
-        </p:txBody>
-      </p:sp>
-      <p:sp>
-        <p:nvSpPr>
-          <p:cNvPr id="25" name="Text 23"/>
-          <p:cNvSpPr/>
-          <p:nvPr/>
-        </p:nvSpPr>
-        <p:spPr>
-          <a:xfrm>
-            <a:off x="6519672" y="2752344"/>
-            <a:ext cx="1828800" cy="182880"/>
-          </a:xfrm>
-          <a:prstGeom prst="rect">
-            <a:avLst/>
-          </a:prstGeom>
-          <a:noFill/>
-          <a:ln/>
-        </p:spPr>
-        <p:txBody>
-          <a:bodyPr wrap="square" lIns="0" tIns="0" rIns="0" bIns="0" rtlCol="0" anchor="t"/>
-          <a:lstStyle/>
-          <a:p>
-            <a:pPr algn="ctr" indent="0" marL="0">
-              <a:buNone/>
-            </a:pPr>
-            <a:r>
-              <a:rPr lang="en-US" sz="700" i="1" dirty="0">
-                <a:solidFill>
-                  <a:srgbClr val="94A3B8"/>
-                </a:solidFill>
-                <a:latin typeface="Calibri" pitchFamily="34" charset="0"/>
-                <a:ea typeface="Calibri" pitchFamily="34" charset="-122"/>
-                <a:cs typeface="Calibri" pitchFamily="34" charset="-120"/>
-              </a:rPr>
-              <a:t>'e' dropped before vowel suffix</a:t>
-            </a:r>
-            <a:endParaRPr lang="en-US" sz="700" dirty="0"/>
-          </a:p>
-        </p:txBody>
-      </p:sp>
-      <p:sp>
-        <p:nvSpPr>
-          <p:cNvPr id="26" name="Shape 24"/>
-          <p:cNvSpPr/>
-          <p:nvPr/>
-        </p:nvSpPr>
-        <p:spPr>
-          <a:xfrm>
-            <a:off x="365760" y="3273552"/>
-            <a:ext cx="1371600" cy="658368"/>
+              <a:t>Syllables</a:t>
+            </a:r>
+            <a:endParaRPr lang="en-US" sz="1100" dirty="0"/>
+          </a:p>
+        </p:txBody>
+      </p:sp>
+      <p:sp>
+        <p:nvSpPr>
+          <p:cNvPr id="24" name="Shape 22"/>
+          <p:cNvSpPr/>
+          <p:nvPr/>
+        </p:nvSpPr>
+        <p:spPr>
+          <a:xfrm>
+            <a:off x="1874520" y="3273552"/>
+            <a:ext cx="6903720" cy="658368"/>
           </a:xfrm>
           <a:prstGeom prst="rect">
             <a:avLst>
@@ -21293,52 +20328,118 @@
             </a:avLst>
           </a:prstGeom>
           <a:solidFill>
-            <a:srgbClr val="E2E8F0"/>
-          </a:solidFill>
-          <a:ln w="12700">
-            <a:solidFill>
-              <a:srgbClr val="E2E8F0"/>
-            </a:solidFill>
-            <a:prstDash val="solid"/>
-          </a:ln>
-        </p:spPr>
-      </p:sp>
-      <p:sp>
-        <p:nvSpPr>
-          <p:cNvPr id="27" name="Text 25"/>
-          <p:cNvSpPr/>
-          <p:nvPr/>
-        </p:nvSpPr>
-        <p:spPr>
-          <a:xfrm>
-            <a:off x="365760" y="3273552"/>
-            <a:ext cx="1371600" cy="658368"/>
-          </a:xfrm>
-          <a:prstGeom prst="rect">
-            <a:avLst/>
-          </a:prstGeom>
-          <a:noFill/>
-          <a:ln/>
-        </p:spPr>
-        <p:txBody>
-          <a:bodyPr wrap="square" lIns="0" tIns="0" rIns="0" bIns="0" rtlCol="0" anchor="ctr"/>
-          <a:lstStyle/>
-          <a:p>
-            <a:pPr algn="ctr" indent="0" marL="0">
-              <a:buNone/>
-            </a:pPr>
-            <a:r>
-              <a:rPr lang="en-US" sz="1100" b="1" dirty="0">
-                <a:solidFill>
-                  <a:srgbClr val="475569"/>
+            <a:srgbClr val="CCFBF1"/>
+          </a:solidFill>
+          <a:ln w="12700">
+            <a:solidFill>
+              <a:srgbClr val="0D9488"/>
+            </a:solidFill>
+            <a:prstDash val="solid"/>
+          </a:ln>
+        </p:spPr>
+      </p:sp>
+      <p:sp>
+        <p:nvSpPr>
+          <p:cNvPr id="25" name="Shape 23"/>
+          <p:cNvSpPr/>
+          <p:nvPr/>
+        </p:nvSpPr>
+        <p:spPr>
+          <a:xfrm>
+            <a:off x="2313432" y="3364992"/>
+            <a:ext cx="1645920" cy="475488"/>
+          </a:xfrm>
+          <a:prstGeom prst="rect">
+            <a:avLst>
+              <a:gd name="adj" fmla="val 9615"/>
+            </a:avLst>
+          </a:prstGeom>
+          <a:solidFill>
+            <a:srgbClr val="FFFFFF"/>
+          </a:solidFill>
+          <a:ln w="12700">
+            <a:solidFill>
+              <a:srgbClr val="0D9488"/>
+            </a:solidFill>
+            <a:prstDash val="solid"/>
+          </a:ln>
+        </p:spPr>
+      </p:sp>
+      <p:sp>
+        <p:nvSpPr>
+          <p:cNvPr id="26" name="Text 24"/>
+          <p:cNvSpPr/>
+          <p:nvPr/>
+        </p:nvSpPr>
+        <p:spPr>
+          <a:xfrm>
+            <a:off x="2313432" y="3364992"/>
+            <a:ext cx="1645920" cy="475488"/>
+          </a:xfrm>
+          <a:prstGeom prst="rect">
+            <a:avLst/>
+          </a:prstGeom>
+          <a:noFill/>
+          <a:ln/>
+        </p:spPr>
+        <p:txBody>
+          <a:bodyPr wrap="square" lIns="0" tIns="0" rIns="0" bIns="0" rtlCol="0" anchor="ctr"/>
+          <a:lstStyle/>
+          <a:p>
+            <a:pPr algn="ctr" indent="0" marL="0">
+              <a:buNone/>
+            </a:pPr>
+            <a:r>
+              <a:rPr lang="en-US" sz="1400" b="1" dirty="0">
+                <a:solidFill>
+                  <a:srgbClr val="0D9488"/>
                 </a:solidFill>
                 <a:latin typeface="Trebuchet MS" pitchFamily="34" charset="0"/>
                 <a:ea typeface="Trebuchet MS" pitchFamily="34" charset="-122"/>
                 <a:cs typeface="Trebuchet MS" pitchFamily="34" charset="-120"/>
               </a:rPr>
-              <a:t>Syllables</a:t>
-            </a:r>
-            <a:endParaRPr lang="en-US" sz="1100" dirty="0"/>
+              <a:t>un</a:t>
+            </a:r>
+            <a:endParaRPr lang="en-US" sz="1400" dirty="0"/>
+          </a:p>
+        </p:txBody>
+      </p:sp>
+      <p:sp>
+        <p:nvSpPr>
+          <p:cNvPr id="27" name="Text 25"/>
+          <p:cNvSpPr/>
+          <p:nvPr/>
+        </p:nvSpPr>
+        <p:spPr>
+          <a:xfrm>
+            <a:off x="3959352" y="3364992"/>
+            <a:ext cx="411480" cy="475488"/>
+          </a:xfrm>
+          <a:prstGeom prst="rect">
+            <a:avLst/>
+          </a:prstGeom>
+          <a:noFill/>
+          <a:ln/>
+        </p:spPr>
+        <p:txBody>
+          <a:bodyPr wrap="square" lIns="0" tIns="0" rIns="0" bIns="0" rtlCol="0" anchor="ctr"/>
+          <a:lstStyle/>
+          <a:p>
+            <a:pPr algn="ctr" indent="0" marL="0">
+              <a:buNone/>
+            </a:pPr>
+            <a:r>
+              <a:rPr lang="en-US" sz="1600" b="1" dirty="0">
+                <a:solidFill>
+                  <a:srgbClr val="0D9488"/>
+                </a:solidFill>
+                <a:latin typeface="Trebuchet MS" pitchFamily="34" charset="0"/>
+                <a:ea typeface="Trebuchet MS" pitchFamily="34" charset="-122"/>
+                <a:cs typeface="Trebuchet MS" pitchFamily="34" charset="-120"/>
+              </a:rPr>
+              <a:t>·</a:t>
+            </a:r>
+            <a:endParaRPr lang="en-US" sz="1600" dirty="0"/>
           </a:p>
         </p:txBody>
       </p:sp>
@@ -21350,35 +20451,8 @@
         </p:nvSpPr>
         <p:spPr>
           <a:xfrm>
-            <a:off x="1874520" y="3273552"/>
-            <a:ext cx="6903720" cy="658368"/>
-          </a:xfrm>
-          <a:prstGeom prst="rect">
-            <a:avLst>
-              <a:gd name="adj" fmla="val 8333"/>
-            </a:avLst>
-          </a:prstGeom>
-          <a:solidFill>
-            <a:srgbClr val="CCFBF1"/>
-          </a:solidFill>
-          <a:ln w="12700">
-            <a:solidFill>
-              <a:srgbClr val="0D9488"/>
-            </a:solidFill>
-            <a:prstDash val="solid"/>
-          </a:ln>
-        </p:spPr>
-      </p:sp>
-      <p:sp>
-        <p:nvSpPr>
-          <p:cNvPr id="29" name="Shape 27"/>
-          <p:cNvSpPr/>
-          <p:nvPr/>
-        </p:nvSpPr>
-        <p:spPr>
-          <a:xfrm>
-            <a:off x="1975104" y="3364992"/>
-            <a:ext cx="1554480" cy="475488"/>
+            <a:off x="4370832" y="3364992"/>
+            <a:ext cx="1645920" cy="475488"/>
           </a:xfrm>
           <a:prstGeom prst="rect">
             <a:avLst>
@@ -21398,14 +20472,14 @@
       </p:sp>
       <p:sp>
         <p:nvSpPr>
-          <p:cNvPr id="30" name="Text 28"/>
-          <p:cNvSpPr/>
-          <p:nvPr/>
-        </p:nvSpPr>
-        <p:spPr>
-          <a:xfrm>
-            <a:off x="1975104" y="3364992"/>
-            <a:ext cx="1554480" cy="475488"/>
+          <p:cNvPr id="29" name="Text 27"/>
+          <p:cNvSpPr/>
+          <p:nvPr/>
+        </p:nvSpPr>
+        <p:spPr>
+          <a:xfrm>
+            <a:off x="4370832" y="3364992"/>
+            <a:ext cx="1645920" cy="475488"/>
           </a:xfrm>
           <a:prstGeom prst="rect">
             <a:avLst/>
@@ -21429,7 +20503,7 @@
                 <a:ea typeface="Trebuchet MS" pitchFamily="34" charset="-122"/>
                 <a:cs typeface="Trebuchet MS" pitchFamily="34" charset="-120"/>
               </a:rPr>
-              <a:t>un</a:t>
+              <a:t>der</a:t>
             </a:r>
             <a:endParaRPr lang="en-US" sz="1400" dirty="0"/>
           </a:p>
@@ -21437,14 +20511,14 @@
       </p:sp>
       <p:sp>
         <p:nvSpPr>
-          <p:cNvPr id="31" name="Text 29"/>
-          <p:cNvSpPr/>
-          <p:nvPr/>
-        </p:nvSpPr>
-        <p:spPr>
-          <a:xfrm>
-            <a:off x="3529584" y="3364992"/>
-            <a:ext cx="73152" cy="475488"/>
+          <p:cNvPr id="30" name="Text 28"/>
+          <p:cNvSpPr/>
+          <p:nvPr/>
+        </p:nvSpPr>
+        <p:spPr>
+          <a:xfrm>
+            <a:off x="6016752" y="3364992"/>
+            <a:ext cx="411480" cy="475488"/>
           </a:xfrm>
           <a:prstGeom prst="rect">
             <a:avLst/>
@@ -21476,14 +20550,14 @@
       </p:sp>
       <p:sp>
         <p:nvSpPr>
-          <p:cNvPr id="32" name="Shape 30"/>
-          <p:cNvSpPr/>
-          <p:nvPr/>
-        </p:nvSpPr>
-        <p:spPr>
-          <a:xfrm>
-            <a:off x="3602736" y="3364992"/>
-            <a:ext cx="1554480" cy="475488"/>
+          <p:cNvPr id="31" name="Shape 29"/>
+          <p:cNvSpPr/>
+          <p:nvPr/>
+        </p:nvSpPr>
+        <p:spPr>
+          <a:xfrm>
+            <a:off x="6428232" y="3364992"/>
+            <a:ext cx="1645920" cy="475488"/>
           </a:xfrm>
           <a:prstGeom prst="rect">
             <a:avLst>
@@ -21503,14 +20577,14 @@
       </p:sp>
       <p:sp>
         <p:nvSpPr>
-          <p:cNvPr id="33" name="Text 31"/>
-          <p:cNvSpPr/>
-          <p:nvPr/>
-        </p:nvSpPr>
-        <p:spPr>
-          <a:xfrm>
-            <a:off x="3602736" y="3364992"/>
-            <a:ext cx="1554480" cy="475488"/>
+          <p:cNvPr id="32" name="Text 30"/>
+          <p:cNvSpPr/>
+          <p:nvPr/>
+        </p:nvSpPr>
+        <p:spPr>
+          <a:xfrm>
+            <a:off x="6428232" y="3364992"/>
+            <a:ext cx="1645920" cy="475488"/>
           </a:xfrm>
           <a:prstGeom prst="rect">
             <a:avLst/>
@@ -21534,7 +20608,7 @@
                 <a:ea typeface="Trebuchet MS" pitchFamily="34" charset="-122"/>
                 <a:cs typeface="Trebuchet MS" pitchFamily="34" charset="-120"/>
               </a:rPr>
-              <a:t>der</a:t>
+              <a:t>take</a:t>
             </a:r>
             <a:endParaRPr lang="en-US" sz="1400" dirty="0"/>
           </a:p>
@@ -21542,40 +20616,67 @@
       </p:sp>
       <p:sp>
         <p:nvSpPr>
+          <p:cNvPr id="33" name="Shape 31"/>
+          <p:cNvSpPr/>
+          <p:nvPr/>
+        </p:nvSpPr>
+        <p:spPr>
+          <a:xfrm>
+            <a:off x="365760" y="4096512"/>
+            <a:ext cx="1371600" cy="804672"/>
+          </a:xfrm>
+          <a:prstGeom prst="rect">
+            <a:avLst>
+              <a:gd name="adj" fmla="val 6818"/>
+            </a:avLst>
+          </a:prstGeom>
+          <a:solidFill>
+            <a:srgbClr val="E2E8F0"/>
+          </a:solidFill>
+          <a:ln w="12700">
+            <a:solidFill>
+              <a:srgbClr val="E2E8F0"/>
+            </a:solidFill>
+            <a:prstDash val="solid"/>
+          </a:ln>
+        </p:spPr>
+      </p:sp>
+      <p:sp>
+        <p:nvSpPr>
           <p:cNvPr id="34" name="Text 32"/>
           <p:cNvSpPr/>
           <p:nvPr/>
         </p:nvSpPr>
         <p:spPr>
           <a:xfrm>
-            <a:off x="5157216" y="3364992"/>
-            <a:ext cx="73152" cy="475488"/>
-          </a:xfrm>
-          <a:prstGeom prst="rect">
-            <a:avLst/>
-          </a:prstGeom>
-          <a:noFill/>
-          <a:ln/>
-        </p:spPr>
-        <p:txBody>
-          <a:bodyPr wrap="square" lIns="0" tIns="0" rIns="0" bIns="0" rtlCol="0" anchor="ctr"/>
-          <a:lstStyle/>
-          <a:p>
-            <a:pPr algn="ctr" indent="0" marL="0">
-              <a:buNone/>
-            </a:pPr>
-            <a:r>
-              <a:rPr lang="en-US" sz="1600" b="1" dirty="0">
-                <a:solidFill>
-                  <a:srgbClr val="0D9488"/>
+            <a:off x="365760" y="4096512"/>
+            <a:ext cx="1371600" cy="804672"/>
+          </a:xfrm>
+          <a:prstGeom prst="rect">
+            <a:avLst/>
+          </a:prstGeom>
+          <a:noFill/>
+          <a:ln/>
+        </p:spPr>
+        <p:txBody>
+          <a:bodyPr wrap="square" lIns="0" tIns="0" rIns="0" bIns="0" rtlCol="0" anchor="ctr"/>
+          <a:lstStyle/>
+          <a:p>
+            <a:pPr algn="ctr" indent="0" marL="0">
+              <a:buNone/>
+            </a:pPr>
+            <a:r>
+              <a:rPr lang="en-US" sz="1100" b="1" dirty="0">
+                <a:solidFill>
+                  <a:srgbClr val="475569"/>
                 </a:solidFill>
                 <a:latin typeface="Trebuchet MS" pitchFamily="34" charset="0"/>
                 <a:ea typeface="Trebuchet MS" pitchFamily="34" charset="-122"/>
                 <a:cs typeface="Trebuchet MS" pitchFamily="34" charset="-120"/>
               </a:rPr>
-              <a:t>·</a:t>
-            </a:r>
-            <a:endParaRPr lang="en-US" sz="1600" dirty="0"/>
+              <a:t>Phonemes</a:t>
+            </a:r>
+            <a:endParaRPr lang="en-US" sz="1100" dirty="0"/>
           </a:p>
         </p:txBody>
       </p:sp>
@@ -21587,179 +20688,8 @@
         </p:nvSpPr>
         <p:spPr>
           <a:xfrm>
-            <a:off x="5230368" y="3364992"/>
-            <a:ext cx="1554480" cy="475488"/>
-          </a:xfrm>
-          <a:prstGeom prst="rect">
-            <a:avLst>
-              <a:gd name="adj" fmla="val 9615"/>
-            </a:avLst>
-          </a:prstGeom>
-          <a:solidFill>
-            <a:srgbClr val="FFFFFF"/>
-          </a:solidFill>
-          <a:ln w="12700">
-            <a:solidFill>
-              <a:srgbClr val="0D9488"/>
-            </a:solidFill>
-            <a:prstDash val="solid"/>
-          </a:ln>
-        </p:spPr>
-      </p:sp>
-      <p:sp>
-        <p:nvSpPr>
-          <p:cNvPr id="36" name="Text 34"/>
-          <p:cNvSpPr/>
-          <p:nvPr/>
-        </p:nvSpPr>
-        <p:spPr>
-          <a:xfrm>
-            <a:off x="5230368" y="3364992"/>
-            <a:ext cx="1554480" cy="475488"/>
-          </a:xfrm>
-          <a:prstGeom prst="rect">
-            <a:avLst/>
-          </a:prstGeom>
-          <a:noFill/>
-          <a:ln/>
-        </p:spPr>
-        <p:txBody>
-          <a:bodyPr wrap="square" lIns="0" tIns="0" rIns="0" bIns="0" rtlCol="0" anchor="ctr"/>
-          <a:lstStyle/>
-          <a:p>
-            <a:pPr algn="ctr" indent="0" marL="0">
-              <a:buNone/>
-            </a:pPr>
-            <a:r>
-              <a:rPr lang="en-US" sz="1400" b="1" dirty="0">
-                <a:solidFill>
-                  <a:srgbClr val="0D9488"/>
-                </a:solidFill>
-                <a:latin typeface="Trebuchet MS" pitchFamily="34" charset="0"/>
-                <a:ea typeface="Trebuchet MS" pitchFamily="34" charset="-122"/>
-                <a:cs typeface="Trebuchet MS" pitchFamily="34" charset="-120"/>
-              </a:rPr>
-              <a:t>ta</a:t>
-            </a:r>
-            <a:endParaRPr lang="en-US" sz="1400" dirty="0"/>
-          </a:p>
-        </p:txBody>
-      </p:sp>
-      <p:sp>
-        <p:nvSpPr>
-          <p:cNvPr id="37" name="Text 35"/>
-          <p:cNvSpPr/>
-          <p:nvPr/>
-        </p:nvSpPr>
-        <p:spPr>
-          <a:xfrm>
-            <a:off x="6784848" y="3364992"/>
-            <a:ext cx="73152" cy="475488"/>
-          </a:xfrm>
-          <a:prstGeom prst="rect">
-            <a:avLst/>
-          </a:prstGeom>
-          <a:noFill/>
-          <a:ln/>
-        </p:spPr>
-        <p:txBody>
-          <a:bodyPr wrap="square" lIns="0" tIns="0" rIns="0" bIns="0" rtlCol="0" anchor="ctr"/>
-          <a:lstStyle/>
-          <a:p>
-            <a:pPr algn="ctr" indent="0" marL="0">
-              <a:buNone/>
-            </a:pPr>
-            <a:r>
-              <a:rPr lang="en-US" sz="1600" b="1" dirty="0">
-                <a:solidFill>
-                  <a:srgbClr val="0D9488"/>
-                </a:solidFill>
-                <a:latin typeface="Trebuchet MS" pitchFamily="34" charset="0"/>
-                <a:ea typeface="Trebuchet MS" pitchFamily="34" charset="-122"/>
-                <a:cs typeface="Trebuchet MS" pitchFamily="34" charset="-120"/>
-              </a:rPr>
-              <a:t>·</a:t>
-            </a:r>
-            <a:endParaRPr lang="en-US" sz="1600" dirty="0"/>
-          </a:p>
-        </p:txBody>
-      </p:sp>
-      <p:sp>
-        <p:nvSpPr>
-          <p:cNvPr id="38" name="Shape 36"/>
-          <p:cNvSpPr/>
-          <p:nvPr/>
-        </p:nvSpPr>
-        <p:spPr>
-          <a:xfrm>
-            <a:off x="6858000" y="3364992"/>
-            <a:ext cx="1554480" cy="475488"/>
-          </a:xfrm>
-          <a:prstGeom prst="rect">
-            <a:avLst>
-              <a:gd name="adj" fmla="val 9615"/>
-            </a:avLst>
-          </a:prstGeom>
-          <a:solidFill>
-            <a:srgbClr val="FFFFFF"/>
-          </a:solidFill>
-          <a:ln w="12700">
-            <a:solidFill>
-              <a:srgbClr val="0D9488"/>
-            </a:solidFill>
-            <a:prstDash val="solid"/>
-          </a:ln>
-        </p:spPr>
-      </p:sp>
-      <p:sp>
-        <p:nvSpPr>
-          <p:cNvPr id="39" name="Text 37"/>
-          <p:cNvSpPr/>
-          <p:nvPr/>
-        </p:nvSpPr>
-        <p:spPr>
-          <a:xfrm>
-            <a:off x="6858000" y="3364992"/>
-            <a:ext cx="1554480" cy="475488"/>
-          </a:xfrm>
-          <a:prstGeom prst="rect">
-            <a:avLst/>
-          </a:prstGeom>
-          <a:noFill/>
-          <a:ln/>
-        </p:spPr>
-        <p:txBody>
-          <a:bodyPr wrap="square" lIns="0" tIns="0" rIns="0" bIns="0" rtlCol="0" anchor="ctr"/>
-          <a:lstStyle/>
-          <a:p>
-            <a:pPr algn="ctr" indent="0" marL="0">
-              <a:buNone/>
-            </a:pPr>
-            <a:r>
-              <a:rPr lang="en-US" sz="1400" b="1" dirty="0">
-                <a:solidFill>
-                  <a:srgbClr val="0D9488"/>
-                </a:solidFill>
-                <a:latin typeface="Trebuchet MS" pitchFamily="34" charset="0"/>
-                <a:ea typeface="Trebuchet MS" pitchFamily="34" charset="-122"/>
-                <a:cs typeface="Trebuchet MS" pitchFamily="34" charset="-120"/>
-              </a:rPr>
-              <a:t>ker</a:t>
-            </a:r>
-            <a:endParaRPr lang="en-US" sz="1400" dirty="0"/>
-          </a:p>
-        </p:txBody>
-      </p:sp>
-      <p:sp>
-        <p:nvSpPr>
-          <p:cNvPr id="40" name="Shape 38"/>
-          <p:cNvSpPr/>
-          <p:nvPr/>
-        </p:nvSpPr>
-        <p:spPr>
-          <a:xfrm>
-            <a:off x="365760" y="4096512"/>
-            <a:ext cx="1371600" cy="804672"/>
+            <a:off x="1874520" y="4096512"/>
+            <a:ext cx="6903720" cy="804672"/>
           </a:xfrm>
           <a:prstGeom prst="rect">
             <a:avLst>
@@ -21767,85 +20697,19 @@
             </a:avLst>
           </a:prstGeom>
           <a:solidFill>
-            <a:srgbClr val="E2E8F0"/>
+            <a:srgbClr val="F8FAFC"/>
           </a:solidFill>
           <a:ln w="12700">
             <a:solidFill>
               <a:srgbClr val="E2E8F0"/>
             </a:solidFill>
-            <a:prstDash val="solid"/>
-          </a:ln>
-        </p:spPr>
-      </p:sp>
-      <p:sp>
-        <p:nvSpPr>
-          <p:cNvPr id="41" name="Text 39"/>
-          <p:cNvSpPr/>
-          <p:nvPr/>
-        </p:nvSpPr>
-        <p:spPr>
-          <a:xfrm>
-            <a:off x="365760" y="4096512"/>
-            <a:ext cx="1371600" cy="804672"/>
-          </a:xfrm>
-          <a:prstGeom prst="rect">
-            <a:avLst/>
-          </a:prstGeom>
-          <a:noFill/>
-          <a:ln/>
-        </p:spPr>
-        <p:txBody>
-          <a:bodyPr wrap="square" lIns="0" tIns="0" rIns="0" bIns="0" rtlCol="0" anchor="ctr"/>
-          <a:lstStyle/>
-          <a:p>
-            <a:pPr algn="ctr" indent="0" marL="0">
-              <a:buNone/>
-            </a:pPr>
-            <a:r>
-              <a:rPr lang="en-US" sz="1100" b="1" dirty="0">
-                <a:solidFill>
-                  <a:srgbClr val="475569"/>
-                </a:solidFill>
-                <a:latin typeface="Trebuchet MS" pitchFamily="34" charset="0"/>
-                <a:ea typeface="Trebuchet MS" pitchFamily="34" charset="-122"/>
-                <a:cs typeface="Trebuchet MS" pitchFamily="34" charset="-120"/>
-              </a:rPr>
-              <a:t>Phonemes</a:t>
-            </a:r>
-            <a:endParaRPr lang="en-US" sz="1100" dirty="0"/>
-          </a:p>
-        </p:txBody>
-      </p:sp>
-      <p:sp>
-        <p:nvSpPr>
-          <p:cNvPr id="42" name="Shape 40"/>
-          <p:cNvSpPr/>
-          <p:nvPr/>
-        </p:nvSpPr>
-        <p:spPr>
-          <a:xfrm>
-            <a:off x="1874520" y="4096512"/>
-            <a:ext cx="6903720" cy="804672"/>
-          </a:xfrm>
-          <a:prstGeom prst="rect">
-            <a:avLst>
-              <a:gd name="adj" fmla="val 6818"/>
-            </a:avLst>
-          </a:prstGeom>
-          <a:solidFill>
-            <a:srgbClr val="F8FAFC"/>
-          </a:solidFill>
-          <a:ln w="12700">
-            <a:solidFill>
-              <a:srgbClr val="E2E8F0"/>
-            </a:solidFill>
             <a:prstDash val="dash"/>
           </a:ln>
         </p:spPr>
       </p:sp>
       <p:sp>
         <p:nvSpPr>
-          <p:cNvPr id="43" name="Text 41"/>
+          <p:cNvPr id="36" name="Text 34"/>
           <p:cNvSpPr/>
           <p:nvPr/>
         </p:nvSpPr>
@@ -22307,7 +21171,7 @@
                 <a:ea typeface="Trebuchet MS" pitchFamily="34" charset="-122"/>
                 <a:cs typeface="Trebuchet MS" pitchFamily="34" charset="-120"/>
               </a:rPr>
-              <a:t>undertaker</a:t>
+              <a:t>undertake</a:t>
             </a:r>
             <a:endParaRPr lang="en-US" sz="2800" dirty="0"/>
           </a:p>
@@ -22387,7 +21251,7 @@
         </p:nvSpPr>
         <p:spPr>
           <a:xfrm>
-            <a:off x="2221992" y="2258568"/>
+            <a:off x="2938272" y="2258568"/>
             <a:ext cx="1828800" cy="292608"/>
           </a:xfrm>
           <a:prstGeom prst="rect">
@@ -22421,7 +21285,7 @@
         </p:nvSpPr>
         <p:spPr>
           <a:xfrm>
-            <a:off x="2221992" y="2258568"/>
+            <a:off x="2938272" y="2258568"/>
             <a:ext cx="1828800" cy="292608"/>
           </a:xfrm>
           <a:prstGeom prst="rect">
@@ -22460,7 +21324,7 @@
         </p:nvSpPr>
         <p:spPr>
           <a:xfrm>
-            <a:off x="2221992" y="2569464"/>
+            <a:off x="2938272" y="2569464"/>
             <a:ext cx="1828800" cy="201168"/>
           </a:xfrm>
           <a:prstGeom prst="rect">
@@ -22485,7 +21349,7 @@
                 <a:ea typeface="Calibri" pitchFamily="34" charset="-122"/>
                 <a:cs typeface="Calibri" pitchFamily="34" charset="-120"/>
               </a:rPr>
-              <a:t>below, beneath</a:t>
+              <a:t>below or in a lesser position</a:t>
             </a:r>
             <a:endParaRPr lang="en-US" sz="850" dirty="0"/>
           </a:p>
@@ -22499,7 +21363,7 @@
         </p:nvSpPr>
         <p:spPr>
           <a:xfrm>
-            <a:off x="4370832" y="2258568"/>
+            <a:off x="5803392" y="2258568"/>
             <a:ext cx="1828800" cy="292608"/>
           </a:xfrm>
           <a:prstGeom prst="rect">
@@ -22533,7 +21397,7 @@
         </p:nvSpPr>
         <p:spPr>
           <a:xfrm>
-            <a:off x="4370832" y="2258568"/>
+            <a:off x="5803392" y="2258568"/>
             <a:ext cx="1828800" cy="292608"/>
           </a:xfrm>
           <a:prstGeom prst="rect">
@@ -22572,7 +21436,7 @@
         </p:nvSpPr>
         <p:spPr>
           <a:xfrm>
-            <a:off x="4370832" y="2569464"/>
+            <a:off x="5803392" y="2569464"/>
             <a:ext cx="1828800" cy="201168"/>
           </a:xfrm>
           <a:prstGeom prst="rect">
@@ -22597,7 +21461,7 @@
                 <a:ea typeface="Calibri" pitchFamily="34" charset="-122"/>
                 <a:cs typeface="Calibri" pitchFamily="34" charset="-120"/>
               </a:rPr>
-              <a:t>to seize or grasp</a:t>
+              <a:t>to seize or receive</a:t>
             </a:r>
             <a:endParaRPr lang="en-US" sz="850" dirty="0"/>
           </a:p>
@@ -22611,30 +21475,23 @@
         </p:nvSpPr>
         <p:spPr>
           <a:xfrm>
-            <a:off x="6519672" y="2258568"/>
-            <a:ext cx="1828800" cy="292608"/>
+            <a:off x="365760" y="3273552"/>
+            <a:ext cx="1371600" cy="658368"/>
           </a:xfrm>
           <a:prstGeom prst="rect">
             <a:avLst>
-              <a:gd name="adj" fmla="val 25000"/>
+              <a:gd name="adj" fmla="val 8333"/>
             </a:avLst>
           </a:prstGeom>
           <a:solidFill>
-            <a:srgbClr val="FCE7F3"/>
-          </a:solidFill>
-          <a:ln w="19050">
-            <a:solidFill>
-              <a:srgbClr val="DB2777"/>
-            </a:solidFill>
-            <a:prstDash val="solid"/>
-          </a:ln>
-          <a:effectLst>
-            <a:outerShdw sx="100000" sy="100000" kx="0" ky="0" algn="bl" rotWithShape="0" blurRad="101600" dist="38100" dir="8100000">
-              <a:srgbClr val="000000">
-                <a:alpha val="12000"/>
-              </a:srgbClr>
-            </a:outerShdw>
-          </a:effectLst>
+            <a:srgbClr val="E2E8F0"/>
+          </a:solidFill>
+          <a:ln w="12700">
+            <a:solidFill>
+              <a:srgbClr val="E2E8F0"/>
+            </a:solidFill>
+            <a:prstDash val="solid"/>
+          </a:ln>
         </p:spPr>
       </p:sp>
       <p:sp>
@@ -22645,125 +21502,47 @@
         </p:nvSpPr>
         <p:spPr>
           <a:xfrm>
-            <a:off x="6519672" y="2258568"/>
-            <a:ext cx="1828800" cy="292608"/>
-          </a:xfrm>
-          <a:prstGeom prst="rect">
-            <a:avLst/>
-          </a:prstGeom>
-          <a:noFill/>
-          <a:ln/>
-        </p:spPr>
-        <p:txBody>
-          <a:bodyPr wrap="square" lIns="0" tIns="0" rIns="0" bIns="0" rtlCol="0" anchor="ctr"/>
-          <a:lstStyle/>
-          <a:p>
-            <a:pPr algn="ctr" indent="0" marL="0">
-              <a:buNone/>
-            </a:pPr>
-            <a:r>
-              <a:rPr lang="en-US" sz="1300" b="1" dirty="0">
-                <a:solidFill>
-                  <a:srgbClr val="9D174D"/>
+            <a:off x="365760" y="3273552"/>
+            <a:ext cx="1371600" cy="658368"/>
+          </a:xfrm>
+          <a:prstGeom prst="rect">
+            <a:avLst/>
+          </a:prstGeom>
+          <a:noFill/>
+          <a:ln/>
+        </p:spPr>
+        <p:txBody>
+          <a:bodyPr wrap="square" lIns="0" tIns="0" rIns="0" bIns="0" rtlCol="0" anchor="ctr"/>
+          <a:lstStyle/>
+          <a:p>
+            <a:pPr algn="ctr" indent="0" marL="0">
+              <a:buNone/>
+            </a:pPr>
+            <a:r>
+              <a:rPr lang="en-US" sz="1100" b="1" dirty="0">
+                <a:solidFill>
+                  <a:srgbClr val="475569"/>
                 </a:solidFill>
                 <a:latin typeface="Trebuchet MS" pitchFamily="34" charset="0"/>
                 <a:ea typeface="Trebuchet MS" pitchFamily="34" charset="-122"/>
                 <a:cs typeface="Trebuchet MS" pitchFamily="34" charset="-120"/>
               </a:rPr>
-              <a:t>er</a:t>
-            </a:r>
-            <a:endParaRPr lang="en-US" sz="1300" dirty="0"/>
-          </a:p>
-        </p:txBody>
-      </p:sp>
-      <p:sp>
-        <p:nvSpPr>
-          <p:cNvPr id="24" name="Text 22"/>
-          <p:cNvSpPr/>
-          <p:nvPr/>
-        </p:nvSpPr>
-        <p:spPr>
-          <a:xfrm>
-            <a:off x="6519672" y="2569464"/>
-            <a:ext cx="1828800" cy="201168"/>
-          </a:xfrm>
-          <a:prstGeom prst="rect">
-            <a:avLst/>
-          </a:prstGeom>
-          <a:noFill/>
-          <a:ln/>
-        </p:spPr>
-        <p:txBody>
-          <a:bodyPr wrap="square" lIns="0" tIns="0" rIns="0" bIns="0" rtlCol="0" anchor="t"/>
-          <a:lstStyle/>
-          <a:p>
-            <a:pPr algn="ctr" indent="0" marL="0">
-              <a:buNone/>
-            </a:pPr>
-            <a:r>
-              <a:rPr lang="en-US" sz="850" dirty="0">
-                <a:solidFill>
-                  <a:srgbClr val="475569"/>
-                </a:solidFill>
-                <a:latin typeface="Calibri" pitchFamily="34" charset="0"/>
-                <a:ea typeface="Calibri" pitchFamily="34" charset="-122"/>
-                <a:cs typeface="Calibri" pitchFamily="34" charset="-120"/>
-              </a:rPr>
-              <a:t>a person who does something</a:t>
-            </a:r>
-            <a:endParaRPr lang="en-US" sz="850" dirty="0"/>
-          </a:p>
-        </p:txBody>
-      </p:sp>
-      <p:sp>
-        <p:nvSpPr>
-          <p:cNvPr id="25" name="Text 23"/>
-          <p:cNvSpPr/>
-          <p:nvPr/>
-        </p:nvSpPr>
-        <p:spPr>
-          <a:xfrm>
-            <a:off x="6519672" y="2752344"/>
-            <a:ext cx="1828800" cy="182880"/>
-          </a:xfrm>
-          <a:prstGeom prst="rect">
-            <a:avLst/>
-          </a:prstGeom>
-          <a:noFill/>
-          <a:ln/>
-        </p:spPr>
-        <p:txBody>
-          <a:bodyPr wrap="square" lIns="0" tIns="0" rIns="0" bIns="0" rtlCol="0" anchor="t"/>
-          <a:lstStyle/>
-          <a:p>
-            <a:pPr algn="ctr" indent="0" marL="0">
-              <a:buNone/>
-            </a:pPr>
-            <a:r>
-              <a:rPr lang="en-US" sz="700" i="1" dirty="0">
-                <a:solidFill>
-                  <a:srgbClr val="94A3B8"/>
-                </a:solidFill>
-                <a:latin typeface="Calibri" pitchFamily="34" charset="0"/>
-                <a:ea typeface="Calibri" pitchFamily="34" charset="-122"/>
-                <a:cs typeface="Calibri" pitchFamily="34" charset="-120"/>
-              </a:rPr>
-              <a:t>'e' dropped before vowel suffix</a:t>
-            </a:r>
-            <a:endParaRPr lang="en-US" sz="700" dirty="0"/>
-          </a:p>
-        </p:txBody>
-      </p:sp>
-      <p:sp>
-        <p:nvSpPr>
-          <p:cNvPr id="26" name="Shape 24"/>
-          <p:cNvSpPr/>
-          <p:nvPr/>
-        </p:nvSpPr>
-        <p:spPr>
-          <a:xfrm>
-            <a:off x="365760" y="3273552"/>
-            <a:ext cx="1371600" cy="658368"/>
+              <a:t>Syllables</a:t>
+            </a:r>
+            <a:endParaRPr lang="en-US" sz="1100" dirty="0"/>
+          </a:p>
+        </p:txBody>
+      </p:sp>
+      <p:sp>
+        <p:nvSpPr>
+          <p:cNvPr id="24" name="Shape 22"/>
+          <p:cNvSpPr/>
+          <p:nvPr/>
+        </p:nvSpPr>
+        <p:spPr>
+          <a:xfrm>
+            <a:off x="1874520" y="3273552"/>
+            <a:ext cx="6903720" cy="658368"/>
           </a:xfrm>
           <a:prstGeom prst="rect">
             <a:avLst>
@@ -22771,50 +21550,353 @@
             </a:avLst>
           </a:prstGeom>
           <a:solidFill>
-            <a:srgbClr val="E2E8F0"/>
-          </a:solidFill>
-          <a:ln w="12700">
-            <a:solidFill>
-              <a:srgbClr val="E2E8F0"/>
-            </a:solidFill>
-            <a:prstDash val="solid"/>
-          </a:ln>
-        </p:spPr>
-      </p:sp>
-      <p:sp>
-        <p:nvSpPr>
-          <p:cNvPr id="27" name="Text 25"/>
-          <p:cNvSpPr/>
-          <p:nvPr/>
-        </p:nvSpPr>
-        <p:spPr>
-          <a:xfrm>
-            <a:off x="365760" y="3273552"/>
-            <a:ext cx="1371600" cy="658368"/>
-          </a:xfrm>
-          <a:prstGeom prst="rect">
-            <a:avLst/>
-          </a:prstGeom>
-          <a:noFill/>
-          <a:ln/>
-        </p:spPr>
-        <p:txBody>
-          <a:bodyPr wrap="square" lIns="0" tIns="0" rIns="0" bIns="0" rtlCol="0" anchor="ctr"/>
-          <a:lstStyle/>
-          <a:p>
-            <a:pPr algn="ctr" indent="0" marL="0">
-              <a:buNone/>
-            </a:pPr>
-            <a:r>
-              <a:rPr lang="en-US" sz="1100" b="1" dirty="0">
-                <a:solidFill>
-                  <a:srgbClr val="475569"/>
+            <a:srgbClr val="CCFBF1"/>
+          </a:solidFill>
+          <a:ln w="12700">
+            <a:solidFill>
+              <a:srgbClr val="0D9488"/>
+            </a:solidFill>
+            <a:prstDash val="solid"/>
+          </a:ln>
+        </p:spPr>
+      </p:sp>
+      <p:sp>
+        <p:nvSpPr>
+          <p:cNvPr id="25" name="Shape 23"/>
+          <p:cNvSpPr/>
+          <p:nvPr/>
+        </p:nvSpPr>
+        <p:spPr>
+          <a:xfrm>
+            <a:off x="2313432" y="3364992"/>
+            <a:ext cx="1645920" cy="475488"/>
+          </a:xfrm>
+          <a:prstGeom prst="rect">
+            <a:avLst>
+              <a:gd name="adj" fmla="val 9615"/>
+            </a:avLst>
+          </a:prstGeom>
+          <a:solidFill>
+            <a:srgbClr val="FFFFFF"/>
+          </a:solidFill>
+          <a:ln w="12700">
+            <a:solidFill>
+              <a:srgbClr val="0D9488"/>
+            </a:solidFill>
+            <a:prstDash val="solid"/>
+          </a:ln>
+        </p:spPr>
+      </p:sp>
+      <p:sp>
+        <p:nvSpPr>
+          <p:cNvPr id="26" name="Text 24"/>
+          <p:cNvSpPr/>
+          <p:nvPr/>
+        </p:nvSpPr>
+        <p:spPr>
+          <a:xfrm>
+            <a:off x="2313432" y="3364992"/>
+            <a:ext cx="1645920" cy="475488"/>
+          </a:xfrm>
+          <a:prstGeom prst="rect">
+            <a:avLst/>
+          </a:prstGeom>
+          <a:noFill/>
+          <a:ln/>
+        </p:spPr>
+        <p:txBody>
+          <a:bodyPr wrap="square" lIns="0" tIns="0" rIns="0" bIns="0" rtlCol="0" anchor="ctr"/>
+          <a:lstStyle/>
+          <a:p>
+            <a:pPr algn="ctr" indent="0" marL="0">
+              <a:buNone/>
+            </a:pPr>
+            <a:r>
+              <a:rPr lang="en-US" sz="1400" b="1" dirty="0">
+                <a:solidFill>
+                  <a:srgbClr val="0D9488"/>
                 </a:solidFill>
                 <a:latin typeface="Trebuchet MS" pitchFamily="34" charset="0"/>
                 <a:ea typeface="Trebuchet MS" pitchFamily="34" charset="-122"/>
                 <a:cs typeface="Trebuchet MS" pitchFamily="34" charset="-120"/>
               </a:rPr>
-              <a:t>Syllables</a:t>
+              <a:t>un</a:t>
+            </a:r>
+            <a:endParaRPr lang="en-US" sz="1400" dirty="0"/>
+          </a:p>
+        </p:txBody>
+      </p:sp>
+      <p:sp>
+        <p:nvSpPr>
+          <p:cNvPr id="27" name="Text 25"/>
+          <p:cNvSpPr/>
+          <p:nvPr/>
+        </p:nvSpPr>
+        <p:spPr>
+          <a:xfrm>
+            <a:off x="3959352" y="3364992"/>
+            <a:ext cx="411480" cy="475488"/>
+          </a:xfrm>
+          <a:prstGeom prst="rect">
+            <a:avLst/>
+          </a:prstGeom>
+          <a:noFill/>
+          <a:ln/>
+        </p:spPr>
+        <p:txBody>
+          <a:bodyPr wrap="square" lIns="0" tIns="0" rIns="0" bIns="0" rtlCol="0" anchor="ctr"/>
+          <a:lstStyle/>
+          <a:p>
+            <a:pPr algn="ctr" indent="0" marL="0">
+              <a:buNone/>
+            </a:pPr>
+            <a:r>
+              <a:rPr lang="en-US" sz="1600" b="1" dirty="0">
+                <a:solidFill>
+                  <a:srgbClr val="0D9488"/>
+                </a:solidFill>
+                <a:latin typeface="Trebuchet MS" pitchFamily="34" charset="0"/>
+                <a:ea typeface="Trebuchet MS" pitchFamily="34" charset="-122"/>
+                <a:cs typeface="Trebuchet MS" pitchFamily="34" charset="-120"/>
+              </a:rPr>
+              <a:t>·</a:t>
+            </a:r>
+            <a:endParaRPr lang="en-US" sz="1600" dirty="0"/>
+          </a:p>
+        </p:txBody>
+      </p:sp>
+      <p:sp>
+        <p:nvSpPr>
+          <p:cNvPr id="28" name="Shape 26"/>
+          <p:cNvSpPr/>
+          <p:nvPr/>
+        </p:nvSpPr>
+        <p:spPr>
+          <a:xfrm>
+            <a:off x="4370832" y="3364992"/>
+            <a:ext cx="1645920" cy="475488"/>
+          </a:xfrm>
+          <a:prstGeom prst="rect">
+            <a:avLst>
+              <a:gd name="adj" fmla="val 9615"/>
+            </a:avLst>
+          </a:prstGeom>
+          <a:solidFill>
+            <a:srgbClr val="FFFFFF"/>
+          </a:solidFill>
+          <a:ln w="12700">
+            <a:solidFill>
+              <a:srgbClr val="0D9488"/>
+            </a:solidFill>
+            <a:prstDash val="solid"/>
+          </a:ln>
+        </p:spPr>
+      </p:sp>
+      <p:sp>
+        <p:nvSpPr>
+          <p:cNvPr id="29" name="Text 27"/>
+          <p:cNvSpPr/>
+          <p:nvPr/>
+        </p:nvSpPr>
+        <p:spPr>
+          <a:xfrm>
+            <a:off x="4370832" y="3364992"/>
+            <a:ext cx="1645920" cy="475488"/>
+          </a:xfrm>
+          <a:prstGeom prst="rect">
+            <a:avLst/>
+          </a:prstGeom>
+          <a:noFill/>
+          <a:ln/>
+        </p:spPr>
+        <p:txBody>
+          <a:bodyPr wrap="square" lIns="0" tIns="0" rIns="0" bIns="0" rtlCol="0" anchor="ctr"/>
+          <a:lstStyle/>
+          <a:p>
+            <a:pPr algn="ctr" indent="0" marL="0">
+              <a:buNone/>
+            </a:pPr>
+            <a:r>
+              <a:rPr lang="en-US" sz="1400" b="1" dirty="0">
+                <a:solidFill>
+                  <a:srgbClr val="0D9488"/>
+                </a:solidFill>
+                <a:latin typeface="Trebuchet MS" pitchFamily="34" charset="0"/>
+                <a:ea typeface="Trebuchet MS" pitchFamily="34" charset="-122"/>
+                <a:cs typeface="Trebuchet MS" pitchFamily="34" charset="-120"/>
+              </a:rPr>
+              <a:t>der</a:t>
+            </a:r>
+            <a:endParaRPr lang="en-US" sz="1400" dirty="0"/>
+          </a:p>
+        </p:txBody>
+      </p:sp>
+      <p:sp>
+        <p:nvSpPr>
+          <p:cNvPr id="30" name="Text 28"/>
+          <p:cNvSpPr/>
+          <p:nvPr/>
+        </p:nvSpPr>
+        <p:spPr>
+          <a:xfrm>
+            <a:off x="6016752" y="3364992"/>
+            <a:ext cx="411480" cy="475488"/>
+          </a:xfrm>
+          <a:prstGeom prst="rect">
+            <a:avLst/>
+          </a:prstGeom>
+          <a:noFill/>
+          <a:ln/>
+        </p:spPr>
+        <p:txBody>
+          <a:bodyPr wrap="square" lIns="0" tIns="0" rIns="0" bIns="0" rtlCol="0" anchor="ctr"/>
+          <a:lstStyle/>
+          <a:p>
+            <a:pPr algn="ctr" indent="0" marL="0">
+              <a:buNone/>
+            </a:pPr>
+            <a:r>
+              <a:rPr lang="en-US" sz="1600" b="1" dirty="0">
+                <a:solidFill>
+                  <a:srgbClr val="0D9488"/>
+                </a:solidFill>
+                <a:latin typeface="Trebuchet MS" pitchFamily="34" charset="0"/>
+                <a:ea typeface="Trebuchet MS" pitchFamily="34" charset="-122"/>
+                <a:cs typeface="Trebuchet MS" pitchFamily="34" charset="-120"/>
+              </a:rPr>
+              <a:t>·</a:t>
+            </a:r>
+            <a:endParaRPr lang="en-US" sz="1600" dirty="0"/>
+          </a:p>
+        </p:txBody>
+      </p:sp>
+      <p:sp>
+        <p:nvSpPr>
+          <p:cNvPr id="31" name="Shape 29"/>
+          <p:cNvSpPr/>
+          <p:nvPr/>
+        </p:nvSpPr>
+        <p:spPr>
+          <a:xfrm>
+            <a:off x="6428232" y="3364992"/>
+            <a:ext cx="1645920" cy="475488"/>
+          </a:xfrm>
+          <a:prstGeom prst="rect">
+            <a:avLst>
+              <a:gd name="adj" fmla="val 9615"/>
+            </a:avLst>
+          </a:prstGeom>
+          <a:solidFill>
+            <a:srgbClr val="FFFFFF"/>
+          </a:solidFill>
+          <a:ln w="12700">
+            <a:solidFill>
+              <a:srgbClr val="0D9488"/>
+            </a:solidFill>
+            <a:prstDash val="solid"/>
+          </a:ln>
+        </p:spPr>
+      </p:sp>
+      <p:sp>
+        <p:nvSpPr>
+          <p:cNvPr id="32" name="Text 30"/>
+          <p:cNvSpPr/>
+          <p:nvPr/>
+        </p:nvSpPr>
+        <p:spPr>
+          <a:xfrm>
+            <a:off x="6428232" y="3364992"/>
+            <a:ext cx="1645920" cy="475488"/>
+          </a:xfrm>
+          <a:prstGeom prst="rect">
+            <a:avLst/>
+          </a:prstGeom>
+          <a:noFill/>
+          <a:ln/>
+        </p:spPr>
+        <p:txBody>
+          <a:bodyPr wrap="square" lIns="0" tIns="0" rIns="0" bIns="0" rtlCol="0" anchor="ctr"/>
+          <a:lstStyle/>
+          <a:p>
+            <a:pPr algn="ctr" indent="0" marL="0">
+              <a:buNone/>
+            </a:pPr>
+            <a:r>
+              <a:rPr lang="en-US" sz="1400" b="1" dirty="0">
+                <a:solidFill>
+                  <a:srgbClr val="0D9488"/>
+                </a:solidFill>
+                <a:latin typeface="Trebuchet MS" pitchFamily="34" charset="0"/>
+                <a:ea typeface="Trebuchet MS" pitchFamily="34" charset="-122"/>
+                <a:cs typeface="Trebuchet MS" pitchFamily="34" charset="-120"/>
+              </a:rPr>
+              <a:t>take</a:t>
+            </a:r>
+            <a:endParaRPr lang="en-US" sz="1400" dirty="0"/>
+          </a:p>
+        </p:txBody>
+      </p:sp>
+      <p:sp>
+        <p:nvSpPr>
+          <p:cNvPr id="33" name="Shape 31"/>
+          <p:cNvSpPr/>
+          <p:nvPr/>
+        </p:nvSpPr>
+        <p:spPr>
+          <a:xfrm>
+            <a:off x="365760" y="4096512"/>
+            <a:ext cx="1371600" cy="804672"/>
+          </a:xfrm>
+          <a:prstGeom prst="rect">
+            <a:avLst>
+              <a:gd name="adj" fmla="val 6818"/>
+            </a:avLst>
+          </a:prstGeom>
+          <a:solidFill>
+            <a:srgbClr val="E2E8F0"/>
+          </a:solidFill>
+          <a:ln w="12700">
+            <a:solidFill>
+              <a:srgbClr val="E2E8F0"/>
+            </a:solidFill>
+            <a:prstDash val="solid"/>
+          </a:ln>
+        </p:spPr>
+      </p:sp>
+      <p:sp>
+        <p:nvSpPr>
+          <p:cNvPr id="34" name="Text 32"/>
+          <p:cNvSpPr/>
+          <p:nvPr/>
+        </p:nvSpPr>
+        <p:spPr>
+          <a:xfrm>
+            <a:off x="365760" y="4096512"/>
+            <a:ext cx="1371600" cy="804672"/>
+          </a:xfrm>
+          <a:prstGeom prst="rect">
+            <a:avLst/>
+          </a:prstGeom>
+          <a:noFill/>
+          <a:ln/>
+        </p:spPr>
+        <p:txBody>
+          <a:bodyPr wrap="square" lIns="0" tIns="0" rIns="0" bIns="0" rtlCol="0" anchor="ctr"/>
+          <a:lstStyle/>
+          <a:p>
+            <a:pPr algn="ctr" indent="0" marL="0">
+              <a:buNone/>
+            </a:pPr>
+            <a:r>
+              <a:rPr lang="en-US" sz="1100" b="1" dirty="0">
+                <a:solidFill>
+                  <a:srgbClr val="475569"/>
+                </a:solidFill>
+                <a:latin typeface="Trebuchet MS" pitchFamily="34" charset="0"/>
+                <a:ea typeface="Trebuchet MS" pitchFamily="34" charset="-122"/>
+                <a:cs typeface="Trebuchet MS" pitchFamily="34" charset="-120"/>
+              </a:rPr>
+              <a:t>Phonemes</a:t>
             </a:r>
             <a:endParaRPr lang="en-US" sz="1100" dirty="0"/>
           </a:p>
@@ -22822,13 +21904,13 @@
       </p:sp>
       <p:sp>
         <p:nvSpPr>
-          <p:cNvPr id="28" name="Shape 26"/>
-          <p:cNvSpPr/>
-          <p:nvPr/>
-        </p:nvSpPr>
-        <p:spPr>
-          <a:xfrm>
-            <a:off x="1874520" y="3273552"/>
+          <p:cNvPr id="35" name="Shape 33"/>
+          <p:cNvSpPr/>
+          <p:nvPr/>
+        </p:nvSpPr>
+        <p:spPr>
+          <a:xfrm>
+            <a:off x="1874520" y="4096512"/>
             <a:ext cx="6903720" cy="658368"/>
           </a:xfrm>
           <a:prstGeom prst="rect">
@@ -22837,30 +21919,30 @@
             </a:avLst>
           </a:prstGeom>
           <a:solidFill>
-            <a:srgbClr val="CCFBF1"/>
-          </a:solidFill>
-          <a:ln w="12700">
-            <a:solidFill>
-              <a:srgbClr val="0D9488"/>
-            </a:solidFill>
-            <a:prstDash val="solid"/>
-          </a:ln>
-        </p:spPr>
-      </p:sp>
-      <p:sp>
-        <p:nvSpPr>
-          <p:cNvPr id="29" name="Shape 27"/>
-          <p:cNvSpPr/>
-          <p:nvPr/>
-        </p:nvSpPr>
-        <p:spPr>
-          <a:xfrm>
-            <a:off x="1975104" y="3364992"/>
-            <a:ext cx="1554480" cy="475488"/>
+            <a:srgbClr val="FCE7F3"/>
+          </a:solidFill>
+          <a:ln w="12700">
+            <a:solidFill>
+              <a:srgbClr val="DB2777"/>
+            </a:solidFill>
+            <a:prstDash val="solid"/>
+          </a:ln>
+        </p:spPr>
+      </p:sp>
+      <p:sp>
+        <p:nvSpPr>
+          <p:cNvPr id="36" name="Shape 34"/>
+          <p:cNvSpPr/>
+          <p:nvPr/>
+        </p:nvSpPr>
+        <p:spPr>
+          <a:xfrm>
+            <a:off x="2023872" y="4169664"/>
+            <a:ext cx="685800" cy="475488"/>
           </a:xfrm>
           <a:prstGeom prst="rect">
             <a:avLst>
-              <a:gd name="adj" fmla="val 9615"/>
+              <a:gd name="adj" fmla="val 7692"/>
             </a:avLst>
           </a:prstGeom>
           <a:solidFill>
@@ -22868,104 +21950,131 @@
           </a:solidFill>
           <a:ln w="12700">
             <a:solidFill>
-              <a:srgbClr val="0D9488"/>
-            </a:solidFill>
-            <a:prstDash val="solid"/>
-          </a:ln>
-        </p:spPr>
-      </p:sp>
-      <p:sp>
-        <p:nvSpPr>
-          <p:cNvPr id="30" name="Text 28"/>
-          <p:cNvSpPr/>
-          <p:nvPr/>
-        </p:nvSpPr>
-        <p:spPr>
-          <a:xfrm>
-            <a:off x="1975104" y="3364992"/>
-            <a:ext cx="1554480" cy="475488"/>
-          </a:xfrm>
-          <a:prstGeom prst="rect">
-            <a:avLst/>
-          </a:prstGeom>
-          <a:noFill/>
-          <a:ln/>
-        </p:spPr>
-        <p:txBody>
-          <a:bodyPr wrap="square" lIns="0" tIns="0" rIns="0" bIns="0" rtlCol="0" anchor="ctr"/>
-          <a:lstStyle/>
-          <a:p>
-            <a:pPr algn="ctr" indent="0" marL="0">
-              <a:buNone/>
-            </a:pPr>
-            <a:r>
-              <a:rPr lang="en-US" sz="1400" b="1" dirty="0">
-                <a:solidFill>
-                  <a:srgbClr val="0D9488"/>
+              <a:srgbClr val="DB2777"/>
+            </a:solidFill>
+            <a:prstDash val="solid"/>
+          </a:ln>
+        </p:spPr>
+      </p:sp>
+      <p:sp>
+        <p:nvSpPr>
+          <p:cNvPr id="37" name="Text 35"/>
+          <p:cNvSpPr/>
+          <p:nvPr/>
+        </p:nvSpPr>
+        <p:spPr>
+          <a:xfrm>
+            <a:off x="2023872" y="4169664"/>
+            <a:ext cx="685800" cy="475488"/>
+          </a:xfrm>
+          <a:prstGeom prst="rect">
+            <a:avLst/>
+          </a:prstGeom>
+          <a:noFill/>
+          <a:ln/>
+        </p:spPr>
+        <p:txBody>
+          <a:bodyPr wrap="square" lIns="0" tIns="0" rIns="0" bIns="0" rtlCol="0" anchor="ctr"/>
+          <a:lstStyle/>
+          <a:p>
+            <a:pPr algn="ctr" indent="0" marL="0">
+              <a:buNone/>
+            </a:pPr>
+            <a:r>
+              <a:rPr lang="en-US" sz="900" b="1" dirty="0">
+                <a:solidFill>
+                  <a:srgbClr val="9D174D"/>
                 </a:solidFill>
                 <a:latin typeface="Trebuchet MS" pitchFamily="34" charset="0"/>
                 <a:ea typeface="Trebuchet MS" pitchFamily="34" charset="-122"/>
                 <a:cs typeface="Trebuchet MS" pitchFamily="34" charset="-120"/>
               </a:rPr>
-              <a:t>un</a:t>
-            </a:r>
-            <a:endParaRPr lang="en-US" sz="1400" dirty="0"/>
-          </a:p>
-        </p:txBody>
-      </p:sp>
-      <p:sp>
-        <p:nvSpPr>
-          <p:cNvPr id="31" name="Text 29"/>
-          <p:cNvSpPr/>
-          <p:nvPr/>
-        </p:nvSpPr>
-        <p:spPr>
-          <a:xfrm>
-            <a:off x="3529584" y="3364992"/>
-            <a:ext cx="73152" cy="475488"/>
-          </a:xfrm>
-          <a:prstGeom prst="rect">
-            <a:avLst/>
-          </a:prstGeom>
-          <a:noFill/>
-          <a:ln/>
-        </p:spPr>
-        <p:txBody>
-          <a:bodyPr wrap="square" lIns="0" tIns="0" rIns="0" bIns="0" rtlCol="0" anchor="ctr"/>
-          <a:lstStyle/>
-          <a:p>
-            <a:pPr algn="ctr" indent="0" marL="0">
-              <a:buNone/>
-            </a:pPr>
-            <a:r>
-              <a:rPr lang="en-US" sz="1600" b="1" dirty="0">
-                <a:solidFill>
-                  <a:srgbClr val="0D9488"/>
+              <a:t>u</a:t>
+            </a:r>
+            <a:endParaRPr lang="en-US" sz="900" dirty="0"/>
+          </a:p>
+        </p:txBody>
+      </p:sp>
+      <p:sp>
+        <p:nvSpPr>
+          <p:cNvPr id="38" name="Shape 36"/>
+          <p:cNvSpPr/>
+          <p:nvPr/>
+        </p:nvSpPr>
+        <p:spPr>
+          <a:xfrm>
+            <a:off x="2831592" y="4169664"/>
+            <a:ext cx="685800" cy="475488"/>
+          </a:xfrm>
+          <a:prstGeom prst="rect">
+            <a:avLst>
+              <a:gd name="adj" fmla="val 7692"/>
+            </a:avLst>
+          </a:prstGeom>
+          <a:solidFill>
+            <a:srgbClr val="FFFFFF"/>
+          </a:solidFill>
+          <a:ln w="12700">
+            <a:solidFill>
+              <a:srgbClr val="DB2777"/>
+            </a:solidFill>
+            <a:prstDash val="solid"/>
+          </a:ln>
+        </p:spPr>
+      </p:sp>
+      <p:sp>
+        <p:nvSpPr>
+          <p:cNvPr id="39" name="Text 37"/>
+          <p:cNvSpPr/>
+          <p:nvPr/>
+        </p:nvSpPr>
+        <p:spPr>
+          <a:xfrm>
+            <a:off x="2831592" y="4169664"/>
+            <a:ext cx="685800" cy="475488"/>
+          </a:xfrm>
+          <a:prstGeom prst="rect">
+            <a:avLst/>
+          </a:prstGeom>
+          <a:noFill/>
+          <a:ln/>
+        </p:spPr>
+        <p:txBody>
+          <a:bodyPr wrap="square" lIns="0" tIns="0" rIns="0" bIns="0" rtlCol="0" anchor="ctr"/>
+          <a:lstStyle/>
+          <a:p>
+            <a:pPr algn="ctr" indent="0" marL="0">
+              <a:buNone/>
+            </a:pPr>
+            <a:r>
+              <a:rPr lang="en-US" sz="900" b="1" dirty="0">
+                <a:solidFill>
+                  <a:srgbClr val="9D174D"/>
                 </a:solidFill>
                 <a:latin typeface="Trebuchet MS" pitchFamily="34" charset="0"/>
                 <a:ea typeface="Trebuchet MS" pitchFamily="34" charset="-122"/>
                 <a:cs typeface="Trebuchet MS" pitchFamily="34" charset="-120"/>
               </a:rPr>
-              <a:t>·</a:t>
-            </a:r>
-            <a:endParaRPr lang="en-US" sz="1600" dirty="0"/>
-          </a:p>
-        </p:txBody>
-      </p:sp>
-      <p:sp>
-        <p:nvSpPr>
-          <p:cNvPr id="32" name="Shape 30"/>
-          <p:cNvSpPr/>
-          <p:nvPr/>
-        </p:nvSpPr>
-        <p:spPr>
-          <a:xfrm>
-            <a:off x="3602736" y="3364992"/>
-            <a:ext cx="1554480" cy="475488"/>
+              <a:t>n</a:t>
+            </a:r>
+            <a:endParaRPr lang="en-US" sz="900" dirty="0"/>
+          </a:p>
+        </p:txBody>
+      </p:sp>
+      <p:sp>
+        <p:nvSpPr>
+          <p:cNvPr id="40" name="Shape 38"/>
+          <p:cNvSpPr/>
+          <p:nvPr/>
+        </p:nvSpPr>
+        <p:spPr>
+          <a:xfrm>
+            <a:off x="3639312" y="4169664"/>
+            <a:ext cx="685800" cy="475488"/>
           </a:xfrm>
           <a:prstGeom prst="rect">
             <a:avLst>
-              <a:gd name="adj" fmla="val 9615"/>
+              <a:gd name="adj" fmla="val 7692"/>
             </a:avLst>
           </a:prstGeom>
           <a:solidFill>
@@ -22973,104 +22082,131 @@
           </a:solidFill>
           <a:ln w="12700">
             <a:solidFill>
-              <a:srgbClr val="0D9488"/>
-            </a:solidFill>
-            <a:prstDash val="solid"/>
-          </a:ln>
-        </p:spPr>
-      </p:sp>
-      <p:sp>
-        <p:nvSpPr>
-          <p:cNvPr id="33" name="Text 31"/>
-          <p:cNvSpPr/>
-          <p:nvPr/>
-        </p:nvSpPr>
-        <p:spPr>
-          <a:xfrm>
-            <a:off x="3602736" y="3364992"/>
-            <a:ext cx="1554480" cy="475488"/>
-          </a:xfrm>
-          <a:prstGeom prst="rect">
-            <a:avLst/>
-          </a:prstGeom>
-          <a:noFill/>
-          <a:ln/>
-        </p:spPr>
-        <p:txBody>
-          <a:bodyPr wrap="square" lIns="0" tIns="0" rIns="0" bIns="0" rtlCol="0" anchor="ctr"/>
-          <a:lstStyle/>
-          <a:p>
-            <a:pPr algn="ctr" indent="0" marL="0">
-              <a:buNone/>
-            </a:pPr>
-            <a:r>
-              <a:rPr lang="en-US" sz="1400" b="1" dirty="0">
-                <a:solidFill>
-                  <a:srgbClr val="0D9488"/>
+              <a:srgbClr val="DB2777"/>
+            </a:solidFill>
+            <a:prstDash val="solid"/>
+          </a:ln>
+        </p:spPr>
+      </p:sp>
+      <p:sp>
+        <p:nvSpPr>
+          <p:cNvPr id="41" name="Text 39"/>
+          <p:cNvSpPr/>
+          <p:nvPr/>
+        </p:nvSpPr>
+        <p:spPr>
+          <a:xfrm>
+            <a:off x="3639312" y="4169664"/>
+            <a:ext cx="685800" cy="475488"/>
+          </a:xfrm>
+          <a:prstGeom prst="rect">
+            <a:avLst/>
+          </a:prstGeom>
+          <a:noFill/>
+          <a:ln/>
+        </p:spPr>
+        <p:txBody>
+          <a:bodyPr wrap="square" lIns="0" tIns="0" rIns="0" bIns="0" rtlCol="0" anchor="ctr"/>
+          <a:lstStyle/>
+          <a:p>
+            <a:pPr algn="ctr" indent="0" marL="0">
+              <a:buNone/>
+            </a:pPr>
+            <a:r>
+              <a:rPr lang="en-US" sz="900" b="1" dirty="0">
+                <a:solidFill>
+                  <a:srgbClr val="9D174D"/>
                 </a:solidFill>
                 <a:latin typeface="Trebuchet MS" pitchFamily="34" charset="0"/>
                 <a:ea typeface="Trebuchet MS" pitchFamily="34" charset="-122"/>
                 <a:cs typeface="Trebuchet MS" pitchFamily="34" charset="-120"/>
               </a:rPr>
-              <a:t>der</a:t>
-            </a:r>
-            <a:endParaRPr lang="en-US" sz="1400" dirty="0"/>
-          </a:p>
-        </p:txBody>
-      </p:sp>
-      <p:sp>
-        <p:nvSpPr>
-          <p:cNvPr id="34" name="Text 32"/>
-          <p:cNvSpPr/>
-          <p:nvPr/>
-        </p:nvSpPr>
-        <p:spPr>
-          <a:xfrm>
-            <a:off x="5157216" y="3364992"/>
-            <a:ext cx="73152" cy="475488"/>
-          </a:xfrm>
-          <a:prstGeom prst="rect">
-            <a:avLst/>
-          </a:prstGeom>
-          <a:noFill/>
-          <a:ln/>
-        </p:spPr>
-        <p:txBody>
-          <a:bodyPr wrap="square" lIns="0" tIns="0" rIns="0" bIns="0" rtlCol="0" anchor="ctr"/>
-          <a:lstStyle/>
-          <a:p>
-            <a:pPr algn="ctr" indent="0" marL="0">
-              <a:buNone/>
-            </a:pPr>
-            <a:r>
-              <a:rPr lang="en-US" sz="1600" b="1" dirty="0">
-                <a:solidFill>
-                  <a:srgbClr val="0D9488"/>
+              <a:t>d</a:t>
+            </a:r>
+            <a:endParaRPr lang="en-US" sz="900" dirty="0"/>
+          </a:p>
+        </p:txBody>
+      </p:sp>
+      <p:sp>
+        <p:nvSpPr>
+          <p:cNvPr id="42" name="Shape 40"/>
+          <p:cNvSpPr/>
+          <p:nvPr/>
+        </p:nvSpPr>
+        <p:spPr>
+          <a:xfrm>
+            <a:off x="4447032" y="4169664"/>
+            <a:ext cx="685800" cy="475488"/>
+          </a:xfrm>
+          <a:prstGeom prst="rect">
+            <a:avLst>
+              <a:gd name="adj" fmla="val 7692"/>
+            </a:avLst>
+          </a:prstGeom>
+          <a:solidFill>
+            <a:srgbClr val="FFFFFF"/>
+          </a:solidFill>
+          <a:ln w="12700">
+            <a:solidFill>
+              <a:srgbClr val="DB2777"/>
+            </a:solidFill>
+            <a:prstDash val="solid"/>
+          </a:ln>
+        </p:spPr>
+      </p:sp>
+      <p:sp>
+        <p:nvSpPr>
+          <p:cNvPr id="43" name="Text 41"/>
+          <p:cNvSpPr/>
+          <p:nvPr/>
+        </p:nvSpPr>
+        <p:spPr>
+          <a:xfrm>
+            <a:off x="4447032" y="4169664"/>
+            <a:ext cx="685800" cy="475488"/>
+          </a:xfrm>
+          <a:prstGeom prst="rect">
+            <a:avLst/>
+          </a:prstGeom>
+          <a:noFill/>
+          <a:ln/>
+        </p:spPr>
+        <p:txBody>
+          <a:bodyPr wrap="square" lIns="0" tIns="0" rIns="0" bIns="0" rtlCol="0" anchor="ctr"/>
+          <a:lstStyle/>
+          <a:p>
+            <a:pPr algn="ctr" indent="0" marL="0">
+              <a:buNone/>
+            </a:pPr>
+            <a:r>
+              <a:rPr lang="en-US" sz="900" b="1" dirty="0">
+                <a:solidFill>
+                  <a:srgbClr val="9D174D"/>
                 </a:solidFill>
                 <a:latin typeface="Trebuchet MS" pitchFamily="34" charset="0"/>
                 <a:ea typeface="Trebuchet MS" pitchFamily="34" charset="-122"/>
                 <a:cs typeface="Trebuchet MS" pitchFamily="34" charset="-120"/>
               </a:rPr>
-              <a:t>·</a:t>
-            </a:r>
-            <a:endParaRPr lang="en-US" sz="1600" dirty="0"/>
-          </a:p>
-        </p:txBody>
-      </p:sp>
-      <p:sp>
-        <p:nvSpPr>
-          <p:cNvPr id="35" name="Shape 33"/>
-          <p:cNvSpPr/>
-          <p:nvPr/>
-        </p:nvSpPr>
-        <p:spPr>
-          <a:xfrm>
-            <a:off x="5230368" y="3364992"/>
-            <a:ext cx="1554480" cy="475488"/>
+              <a:t>er</a:t>
+            </a:r>
+            <a:endParaRPr lang="en-US" sz="900" dirty="0"/>
+          </a:p>
+        </p:txBody>
+      </p:sp>
+      <p:sp>
+        <p:nvSpPr>
+          <p:cNvPr id="44" name="Shape 42"/>
+          <p:cNvSpPr/>
+          <p:nvPr/>
+        </p:nvSpPr>
+        <p:spPr>
+          <a:xfrm>
+            <a:off x="5254752" y="4169664"/>
+            <a:ext cx="685800" cy="475488"/>
           </a:xfrm>
           <a:prstGeom prst="rect">
             <a:avLst>
-              <a:gd name="adj" fmla="val 9615"/>
+              <a:gd name="adj" fmla="val 7692"/>
             </a:avLst>
           </a:prstGeom>
           <a:solidFill>
@@ -23078,104 +22214,131 @@
           </a:solidFill>
           <a:ln w="12700">
             <a:solidFill>
-              <a:srgbClr val="0D9488"/>
-            </a:solidFill>
-            <a:prstDash val="solid"/>
-          </a:ln>
-        </p:spPr>
-      </p:sp>
-      <p:sp>
-        <p:nvSpPr>
-          <p:cNvPr id="36" name="Text 34"/>
-          <p:cNvSpPr/>
-          <p:nvPr/>
-        </p:nvSpPr>
-        <p:spPr>
-          <a:xfrm>
-            <a:off x="5230368" y="3364992"/>
-            <a:ext cx="1554480" cy="475488"/>
-          </a:xfrm>
-          <a:prstGeom prst="rect">
-            <a:avLst/>
-          </a:prstGeom>
-          <a:noFill/>
-          <a:ln/>
-        </p:spPr>
-        <p:txBody>
-          <a:bodyPr wrap="square" lIns="0" tIns="0" rIns="0" bIns="0" rtlCol="0" anchor="ctr"/>
-          <a:lstStyle/>
-          <a:p>
-            <a:pPr algn="ctr" indent="0" marL="0">
-              <a:buNone/>
-            </a:pPr>
-            <a:r>
-              <a:rPr lang="en-US" sz="1400" b="1" dirty="0">
-                <a:solidFill>
-                  <a:srgbClr val="0D9488"/>
+              <a:srgbClr val="DB2777"/>
+            </a:solidFill>
+            <a:prstDash val="solid"/>
+          </a:ln>
+        </p:spPr>
+      </p:sp>
+      <p:sp>
+        <p:nvSpPr>
+          <p:cNvPr id="45" name="Text 43"/>
+          <p:cNvSpPr/>
+          <p:nvPr/>
+        </p:nvSpPr>
+        <p:spPr>
+          <a:xfrm>
+            <a:off x="5254752" y="4169664"/>
+            <a:ext cx="685800" cy="475488"/>
+          </a:xfrm>
+          <a:prstGeom prst="rect">
+            <a:avLst/>
+          </a:prstGeom>
+          <a:noFill/>
+          <a:ln/>
+        </p:spPr>
+        <p:txBody>
+          <a:bodyPr wrap="square" lIns="0" tIns="0" rIns="0" bIns="0" rtlCol="0" anchor="ctr"/>
+          <a:lstStyle/>
+          <a:p>
+            <a:pPr algn="ctr" indent="0" marL="0">
+              <a:buNone/>
+            </a:pPr>
+            <a:r>
+              <a:rPr lang="en-US" sz="900" b="1" dirty="0">
+                <a:solidFill>
+                  <a:srgbClr val="9D174D"/>
                 </a:solidFill>
                 <a:latin typeface="Trebuchet MS" pitchFamily="34" charset="0"/>
                 <a:ea typeface="Trebuchet MS" pitchFamily="34" charset="-122"/>
                 <a:cs typeface="Trebuchet MS" pitchFamily="34" charset="-120"/>
               </a:rPr>
-              <a:t>ta</a:t>
-            </a:r>
-            <a:endParaRPr lang="en-US" sz="1400" dirty="0"/>
-          </a:p>
-        </p:txBody>
-      </p:sp>
-      <p:sp>
-        <p:nvSpPr>
-          <p:cNvPr id="37" name="Text 35"/>
-          <p:cNvSpPr/>
-          <p:nvPr/>
-        </p:nvSpPr>
-        <p:spPr>
-          <a:xfrm>
-            <a:off x="6784848" y="3364992"/>
-            <a:ext cx="73152" cy="475488"/>
-          </a:xfrm>
-          <a:prstGeom prst="rect">
-            <a:avLst/>
-          </a:prstGeom>
-          <a:noFill/>
-          <a:ln/>
-        </p:spPr>
-        <p:txBody>
-          <a:bodyPr wrap="square" lIns="0" tIns="0" rIns="0" bIns="0" rtlCol="0" anchor="ctr"/>
-          <a:lstStyle/>
-          <a:p>
-            <a:pPr algn="ctr" indent="0" marL="0">
-              <a:buNone/>
-            </a:pPr>
-            <a:r>
-              <a:rPr lang="en-US" sz="1600" b="1" dirty="0">
-                <a:solidFill>
-                  <a:srgbClr val="0D9488"/>
+              <a:t>t</a:t>
+            </a:r>
+            <a:endParaRPr lang="en-US" sz="900" dirty="0"/>
+          </a:p>
+        </p:txBody>
+      </p:sp>
+      <p:sp>
+        <p:nvSpPr>
+          <p:cNvPr id="46" name="Shape 44"/>
+          <p:cNvSpPr/>
+          <p:nvPr/>
+        </p:nvSpPr>
+        <p:spPr>
+          <a:xfrm>
+            <a:off x="6062472" y="4169664"/>
+            <a:ext cx="685800" cy="475488"/>
+          </a:xfrm>
+          <a:prstGeom prst="rect">
+            <a:avLst>
+              <a:gd name="adj" fmla="val 7692"/>
+            </a:avLst>
+          </a:prstGeom>
+          <a:solidFill>
+            <a:srgbClr val="FFFFFF"/>
+          </a:solidFill>
+          <a:ln w="12700">
+            <a:solidFill>
+              <a:srgbClr val="DB2777"/>
+            </a:solidFill>
+            <a:prstDash val="solid"/>
+          </a:ln>
+        </p:spPr>
+      </p:sp>
+      <p:sp>
+        <p:nvSpPr>
+          <p:cNvPr id="47" name="Text 45"/>
+          <p:cNvSpPr/>
+          <p:nvPr/>
+        </p:nvSpPr>
+        <p:spPr>
+          <a:xfrm>
+            <a:off x="6062472" y="4169664"/>
+            <a:ext cx="685800" cy="475488"/>
+          </a:xfrm>
+          <a:prstGeom prst="rect">
+            <a:avLst/>
+          </a:prstGeom>
+          <a:noFill/>
+          <a:ln/>
+        </p:spPr>
+        <p:txBody>
+          <a:bodyPr wrap="square" lIns="0" tIns="0" rIns="0" bIns="0" rtlCol="0" anchor="ctr"/>
+          <a:lstStyle/>
+          <a:p>
+            <a:pPr algn="ctr" indent="0" marL="0">
+              <a:buNone/>
+            </a:pPr>
+            <a:r>
+              <a:rPr lang="en-US" sz="900" b="1" dirty="0">
+                <a:solidFill>
+                  <a:srgbClr val="9D174D"/>
                 </a:solidFill>
                 <a:latin typeface="Trebuchet MS" pitchFamily="34" charset="0"/>
                 <a:ea typeface="Trebuchet MS" pitchFamily="34" charset="-122"/>
                 <a:cs typeface="Trebuchet MS" pitchFamily="34" charset="-120"/>
               </a:rPr>
-              <a:t>·</a:t>
-            </a:r>
-            <a:endParaRPr lang="en-US" sz="1600" dirty="0"/>
-          </a:p>
-        </p:txBody>
-      </p:sp>
-      <p:sp>
-        <p:nvSpPr>
-          <p:cNvPr id="38" name="Shape 36"/>
-          <p:cNvSpPr/>
-          <p:nvPr/>
-        </p:nvSpPr>
-        <p:spPr>
-          <a:xfrm>
-            <a:off x="6858000" y="3364992"/>
-            <a:ext cx="1554480" cy="475488"/>
+              <a:t>a</a:t>
+            </a:r>
+            <a:endParaRPr lang="en-US" sz="900" dirty="0"/>
+          </a:p>
+        </p:txBody>
+      </p:sp>
+      <p:sp>
+        <p:nvSpPr>
+          <p:cNvPr id="48" name="Shape 46"/>
+          <p:cNvSpPr/>
+          <p:nvPr/>
+        </p:nvSpPr>
+        <p:spPr>
+          <a:xfrm>
+            <a:off x="6870192" y="4169664"/>
+            <a:ext cx="685800" cy="475488"/>
           </a:xfrm>
           <a:prstGeom prst="rect">
             <a:avLst>
-              <a:gd name="adj" fmla="val 9615"/>
+              <a:gd name="adj" fmla="val 7692"/>
             </a:avLst>
           </a:prstGeom>
           <a:solidFill>
@@ -23183,667 +22346,112 @@
           </a:solidFill>
           <a:ln w="12700">
             <a:solidFill>
-              <a:srgbClr val="0D9488"/>
-            </a:solidFill>
-            <a:prstDash val="solid"/>
-          </a:ln>
-        </p:spPr>
-      </p:sp>
-      <p:sp>
-        <p:nvSpPr>
-          <p:cNvPr id="39" name="Text 37"/>
-          <p:cNvSpPr/>
-          <p:nvPr/>
-        </p:nvSpPr>
-        <p:spPr>
-          <a:xfrm>
-            <a:off x="6858000" y="3364992"/>
-            <a:ext cx="1554480" cy="475488"/>
-          </a:xfrm>
-          <a:prstGeom prst="rect">
-            <a:avLst/>
-          </a:prstGeom>
-          <a:noFill/>
-          <a:ln/>
-        </p:spPr>
-        <p:txBody>
-          <a:bodyPr wrap="square" lIns="0" tIns="0" rIns="0" bIns="0" rtlCol="0" anchor="ctr"/>
-          <a:lstStyle/>
-          <a:p>
-            <a:pPr algn="ctr" indent="0" marL="0">
-              <a:buNone/>
-            </a:pPr>
-            <a:r>
-              <a:rPr lang="en-US" sz="1400" b="1" dirty="0">
-                <a:solidFill>
-                  <a:srgbClr val="0D9488"/>
+              <a:srgbClr val="DB2777"/>
+            </a:solidFill>
+            <a:prstDash val="solid"/>
+          </a:ln>
+        </p:spPr>
+      </p:sp>
+      <p:sp>
+        <p:nvSpPr>
+          <p:cNvPr id="49" name="Text 47"/>
+          <p:cNvSpPr/>
+          <p:nvPr/>
+        </p:nvSpPr>
+        <p:spPr>
+          <a:xfrm>
+            <a:off x="6870192" y="4169664"/>
+            <a:ext cx="685800" cy="475488"/>
+          </a:xfrm>
+          <a:prstGeom prst="rect">
+            <a:avLst/>
+          </a:prstGeom>
+          <a:noFill/>
+          <a:ln/>
+        </p:spPr>
+        <p:txBody>
+          <a:bodyPr wrap="square" lIns="0" tIns="0" rIns="0" bIns="0" rtlCol="0" anchor="ctr"/>
+          <a:lstStyle/>
+          <a:p>
+            <a:pPr algn="ctr" indent="0" marL="0">
+              <a:buNone/>
+            </a:pPr>
+            <a:r>
+              <a:rPr lang="en-US" sz="900" b="1" dirty="0">
+                <a:solidFill>
+                  <a:srgbClr val="9D174D"/>
                 </a:solidFill>
                 <a:latin typeface="Trebuchet MS" pitchFamily="34" charset="0"/>
                 <a:ea typeface="Trebuchet MS" pitchFamily="34" charset="-122"/>
                 <a:cs typeface="Trebuchet MS" pitchFamily="34" charset="-120"/>
               </a:rPr>
-              <a:t>ker</a:t>
-            </a:r>
-            <a:endParaRPr lang="en-US" sz="1400" dirty="0"/>
-          </a:p>
-        </p:txBody>
-      </p:sp>
-      <p:sp>
-        <p:nvSpPr>
-          <p:cNvPr id="40" name="Shape 38"/>
-          <p:cNvSpPr/>
-          <p:nvPr/>
-        </p:nvSpPr>
-        <p:spPr>
-          <a:xfrm>
-            <a:off x="365760" y="4096512"/>
-            <a:ext cx="1371600" cy="804672"/>
+              <a:t>k</a:t>
+            </a:r>
+            <a:endParaRPr lang="en-US" sz="900" dirty="0"/>
+          </a:p>
+        </p:txBody>
+      </p:sp>
+      <p:sp>
+        <p:nvSpPr>
+          <p:cNvPr id="50" name="Shape 48"/>
+          <p:cNvSpPr/>
+          <p:nvPr/>
+        </p:nvSpPr>
+        <p:spPr>
+          <a:xfrm>
+            <a:off x="7677912" y="4169664"/>
+            <a:ext cx="685800" cy="475488"/>
           </a:xfrm>
           <a:prstGeom prst="rect">
             <a:avLst>
-              <a:gd name="adj" fmla="val 6818"/>
+              <a:gd name="adj" fmla="val 7692"/>
             </a:avLst>
           </a:prstGeom>
           <a:solidFill>
-            <a:srgbClr val="E2E8F0"/>
-          </a:solidFill>
-          <a:ln w="12700">
-            <a:solidFill>
-              <a:srgbClr val="E2E8F0"/>
-            </a:solidFill>
-            <a:prstDash val="solid"/>
-          </a:ln>
-        </p:spPr>
-      </p:sp>
-      <p:sp>
-        <p:nvSpPr>
-          <p:cNvPr id="41" name="Text 39"/>
-          <p:cNvSpPr/>
-          <p:nvPr/>
-        </p:nvSpPr>
-        <p:spPr>
-          <a:xfrm>
-            <a:off x="365760" y="4096512"/>
-            <a:ext cx="1371600" cy="804672"/>
-          </a:xfrm>
-          <a:prstGeom prst="rect">
-            <a:avLst/>
-          </a:prstGeom>
-          <a:noFill/>
-          <a:ln/>
-        </p:spPr>
-        <p:txBody>
-          <a:bodyPr wrap="square" lIns="0" tIns="0" rIns="0" bIns="0" rtlCol="0" anchor="ctr"/>
-          <a:lstStyle/>
-          <a:p>
-            <a:pPr algn="ctr" indent="0" marL="0">
-              <a:buNone/>
-            </a:pPr>
-            <a:r>
-              <a:rPr lang="en-US" sz="1100" b="1" dirty="0">
-                <a:solidFill>
-                  <a:srgbClr val="475569"/>
+            <a:srgbClr val="FFFFFF"/>
+          </a:solidFill>
+          <a:ln w="12700">
+            <a:solidFill>
+              <a:srgbClr val="DB2777"/>
+            </a:solidFill>
+            <a:prstDash val="solid"/>
+          </a:ln>
+        </p:spPr>
+      </p:sp>
+      <p:sp>
+        <p:nvSpPr>
+          <p:cNvPr id="51" name="Text 49"/>
+          <p:cNvSpPr/>
+          <p:nvPr/>
+        </p:nvSpPr>
+        <p:spPr>
+          <a:xfrm>
+            <a:off x="7677912" y="4169664"/>
+            <a:ext cx="685800" cy="475488"/>
+          </a:xfrm>
+          <a:prstGeom prst="rect">
+            <a:avLst/>
+          </a:prstGeom>
+          <a:noFill/>
+          <a:ln/>
+        </p:spPr>
+        <p:txBody>
+          <a:bodyPr wrap="square" lIns="0" tIns="0" rIns="0" bIns="0" rtlCol="0" anchor="ctr"/>
+          <a:lstStyle/>
+          <a:p>
+            <a:pPr algn="ctr" indent="0" marL="0">
+              <a:buNone/>
+            </a:pPr>
+            <a:r>
+              <a:rPr lang="en-US" sz="900" b="1" dirty="0">
+                <a:solidFill>
+                  <a:srgbClr val="9D174D"/>
                 </a:solidFill>
                 <a:latin typeface="Trebuchet MS" pitchFamily="34" charset="0"/>
                 <a:ea typeface="Trebuchet MS" pitchFamily="34" charset="-122"/>
                 <a:cs typeface="Trebuchet MS" pitchFamily="34" charset="-120"/>
               </a:rPr>
-              <a:t>Phonemes</a:t>
-            </a:r>
-            <a:endParaRPr lang="en-US" sz="1100" dirty="0"/>
-          </a:p>
-        </p:txBody>
-      </p:sp>
-      <p:sp>
-        <p:nvSpPr>
-          <p:cNvPr id="42" name="Shape 40"/>
-          <p:cNvSpPr/>
-          <p:nvPr/>
-        </p:nvSpPr>
-        <p:spPr>
-          <a:xfrm>
-            <a:off x="1874520" y="4096512"/>
-            <a:ext cx="6903720" cy="658368"/>
-          </a:xfrm>
-          <a:prstGeom prst="rect">
-            <a:avLst>
-              <a:gd name="adj" fmla="val 8333"/>
-            </a:avLst>
-          </a:prstGeom>
-          <a:solidFill>
-            <a:srgbClr val="FCE7F3"/>
-          </a:solidFill>
-          <a:ln w="12700">
-            <a:solidFill>
-              <a:srgbClr val="DB2777"/>
-            </a:solidFill>
-            <a:prstDash val="solid"/>
-          </a:ln>
-        </p:spPr>
-      </p:sp>
-      <p:sp>
-        <p:nvSpPr>
-          <p:cNvPr id="43" name="Shape 41"/>
-          <p:cNvSpPr/>
-          <p:nvPr/>
-        </p:nvSpPr>
-        <p:spPr>
-          <a:xfrm>
-            <a:off x="2023872" y="4169664"/>
-            <a:ext cx="685800" cy="475488"/>
-          </a:xfrm>
-          <a:prstGeom prst="rect">
-            <a:avLst>
-              <a:gd name="adj" fmla="val 7692"/>
-            </a:avLst>
-          </a:prstGeom>
-          <a:solidFill>
-            <a:srgbClr val="FFFFFF"/>
-          </a:solidFill>
-          <a:ln w="12700">
-            <a:solidFill>
-              <a:srgbClr val="DB2777"/>
-            </a:solidFill>
-            <a:prstDash val="solid"/>
-          </a:ln>
-        </p:spPr>
-      </p:sp>
-      <p:sp>
-        <p:nvSpPr>
-          <p:cNvPr id="44" name="Text 42"/>
-          <p:cNvSpPr/>
-          <p:nvPr/>
-        </p:nvSpPr>
-        <p:spPr>
-          <a:xfrm>
-            <a:off x="2023872" y="4169664"/>
-            <a:ext cx="685800" cy="475488"/>
-          </a:xfrm>
-          <a:prstGeom prst="rect">
-            <a:avLst/>
-          </a:prstGeom>
-          <a:noFill/>
-          <a:ln/>
-        </p:spPr>
-        <p:txBody>
-          <a:bodyPr wrap="square" lIns="0" tIns="0" rIns="0" bIns="0" rtlCol="0" anchor="ctr"/>
-          <a:lstStyle/>
-          <a:p>
-            <a:pPr algn="ctr" indent="0" marL="0">
-              <a:buNone/>
-            </a:pPr>
-            <a:r>
-              <a:rPr lang="en-US" sz="900" b="1" dirty="0">
-                <a:solidFill>
-                  <a:srgbClr val="9D174D"/>
-                </a:solidFill>
-                <a:latin typeface="Trebuchet MS" pitchFamily="34" charset="0"/>
-                <a:ea typeface="Trebuchet MS" pitchFamily="34" charset="-122"/>
-                <a:cs typeface="Trebuchet MS" pitchFamily="34" charset="-120"/>
-              </a:rPr>
-              <a:t>u</a:t>
-            </a:r>
-            <a:endParaRPr lang="en-US" sz="900" dirty="0"/>
-          </a:p>
-        </p:txBody>
-      </p:sp>
-      <p:sp>
-        <p:nvSpPr>
-          <p:cNvPr id="45" name="Shape 43"/>
-          <p:cNvSpPr/>
-          <p:nvPr/>
-        </p:nvSpPr>
-        <p:spPr>
-          <a:xfrm>
-            <a:off x="2831592" y="4169664"/>
-            <a:ext cx="685800" cy="475488"/>
-          </a:xfrm>
-          <a:prstGeom prst="rect">
-            <a:avLst>
-              <a:gd name="adj" fmla="val 7692"/>
-            </a:avLst>
-          </a:prstGeom>
-          <a:solidFill>
-            <a:srgbClr val="FFFFFF"/>
-          </a:solidFill>
-          <a:ln w="12700">
-            <a:solidFill>
-              <a:srgbClr val="DB2777"/>
-            </a:solidFill>
-            <a:prstDash val="solid"/>
-          </a:ln>
-        </p:spPr>
-      </p:sp>
-      <p:sp>
-        <p:nvSpPr>
-          <p:cNvPr id="46" name="Text 44"/>
-          <p:cNvSpPr/>
-          <p:nvPr/>
-        </p:nvSpPr>
-        <p:spPr>
-          <a:xfrm>
-            <a:off x="2831592" y="4169664"/>
-            <a:ext cx="685800" cy="475488"/>
-          </a:xfrm>
-          <a:prstGeom prst="rect">
-            <a:avLst/>
-          </a:prstGeom>
-          <a:noFill/>
-          <a:ln/>
-        </p:spPr>
-        <p:txBody>
-          <a:bodyPr wrap="square" lIns="0" tIns="0" rIns="0" bIns="0" rtlCol="0" anchor="ctr"/>
-          <a:lstStyle/>
-          <a:p>
-            <a:pPr algn="ctr" indent="0" marL="0">
-              <a:buNone/>
-            </a:pPr>
-            <a:r>
-              <a:rPr lang="en-US" sz="900" b="1" dirty="0">
-                <a:solidFill>
-                  <a:srgbClr val="9D174D"/>
-                </a:solidFill>
-                <a:latin typeface="Trebuchet MS" pitchFamily="34" charset="0"/>
-                <a:ea typeface="Trebuchet MS" pitchFamily="34" charset="-122"/>
-                <a:cs typeface="Trebuchet MS" pitchFamily="34" charset="-120"/>
-              </a:rPr>
-              <a:t>n</a:t>
-            </a:r>
-            <a:endParaRPr lang="en-US" sz="900" dirty="0"/>
-          </a:p>
-        </p:txBody>
-      </p:sp>
-      <p:sp>
-        <p:nvSpPr>
-          <p:cNvPr id="47" name="Shape 45"/>
-          <p:cNvSpPr/>
-          <p:nvPr/>
-        </p:nvSpPr>
-        <p:spPr>
-          <a:xfrm>
-            <a:off x="3639312" y="4169664"/>
-            <a:ext cx="685800" cy="475488"/>
-          </a:xfrm>
-          <a:prstGeom prst="rect">
-            <a:avLst>
-              <a:gd name="adj" fmla="val 7692"/>
-            </a:avLst>
-          </a:prstGeom>
-          <a:solidFill>
-            <a:srgbClr val="FFFFFF"/>
-          </a:solidFill>
-          <a:ln w="12700">
-            <a:solidFill>
-              <a:srgbClr val="DB2777"/>
-            </a:solidFill>
-            <a:prstDash val="solid"/>
-          </a:ln>
-        </p:spPr>
-      </p:sp>
-      <p:sp>
-        <p:nvSpPr>
-          <p:cNvPr id="48" name="Text 46"/>
-          <p:cNvSpPr/>
-          <p:nvPr/>
-        </p:nvSpPr>
-        <p:spPr>
-          <a:xfrm>
-            <a:off x="3639312" y="4169664"/>
-            <a:ext cx="685800" cy="475488"/>
-          </a:xfrm>
-          <a:prstGeom prst="rect">
-            <a:avLst/>
-          </a:prstGeom>
-          <a:noFill/>
-          <a:ln/>
-        </p:spPr>
-        <p:txBody>
-          <a:bodyPr wrap="square" lIns="0" tIns="0" rIns="0" bIns="0" rtlCol="0" anchor="ctr"/>
-          <a:lstStyle/>
-          <a:p>
-            <a:pPr algn="ctr" indent="0" marL="0">
-              <a:buNone/>
-            </a:pPr>
-            <a:r>
-              <a:rPr lang="en-US" sz="900" b="1" dirty="0">
-                <a:solidFill>
-                  <a:srgbClr val="9D174D"/>
-                </a:solidFill>
-                <a:latin typeface="Trebuchet MS" pitchFamily="34" charset="0"/>
-                <a:ea typeface="Trebuchet MS" pitchFamily="34" charset="-122"/>
-                <a:cs typeface="Trebuchet MS" pitchFamily="34" charset="-120"/>
-              </a:rPr>
-              <a:t>d</a:t>
-            </a:r>
-            <a:endParaRPr lang="en-US" sz="900" dirty="0"/>
-          </a:p>
-        </p:txBody>
-      </p:sp>
-      <p:sp>
-        <p:nvSpPr>
-          <p:cNvPr id="49" name="Shape 47"/>
-          <p:cNvSpPr/>
-          <p:nvPr/>
-        </p:nvSpPr>
-        <p:spPr>
-          <a:xfrm>
-            <a:off x="4447032" y="4169664"/>
-            <a:ext cx="685800" cy="475488"/>
-          </a:xfrm>
-          <a:prstGeom prst="rect">
-            <a:avLst>
-              <a:gd name="adj" fmla="val 7692"/>
-            </a:avLst>
-          </a:prstGeom>
-          <a:solidFill>
-            <a:srgbClr val="FFFFFF"/>
-          </a:solidFill>
-          <a:ln w="12700">
-            <a:solidFill>
-              <a:srgbClr val="DB2777"/>
-            </a:solidFill>
-            <a:prstDash val="solid"/>
-          </a:ln>
-        </p:spPr>
-      </p:sp>
-      <p:sp>
-        <p:nvSpPr>
-          <p:cNvPr id="50" name="Text 48"/>
-          <p:cNvSpPr/>
-          <p:nvPr/>
-        </p:nvSpPr>
-        <p:spPr>
-          <a:xfrm>
-            <a:off x="4447032" y="4169664"/>
-            <a:ext cx="685800" cy="475488"/>
-          </a:xfrm>
-          <a:prstGeom prst="rect">
-            <a:avLst/>
-          </a:prstGeom>
-          <a:noFill/>
-          <a:ln/>
-        </p:spPr>
-        <p:txBody>
-          <a:bodyPr wrap="square" lIns="0" tIns="0" rIns="0" bIns="0" rtlCol="0" anchor="ctr"/>
-          <a:lstStyle/>
-          <a:p>
-            <a:pPr algn="ctr" indent="0" marL="0">
-              <a:buNone/>
-            </a:pPr>
-            <a:r>
-              <a:rPr lang="en-US" sz="900" b="1" dirty="0">
-                <a:solidFill>
-                  <a:srgbClr val="9D174D"/>
-                </a:solidFill>
-                <a:latin typeface="Trebuchet MS" pitchFamily="34" charset="0"/>
-                <a:ea typeface="Trebuchet MS" pitchFamily="34" charset="-122"/>
-                <a:cs typeface="Trebuchet MS" pitchFamily="34" charset="-120"/>
-              </a:rPr>
-              <a:t>er</a:t>
-            </a:r>
-            <a:endParaRPr lang="en-US" sz="900" dirty="0"/>
-          </a:p>
-        </p:txBody>
-      </p:sp>
-      <p:sp>
-        <p:nvSpPr>
-          <p:cNvPr id="51" name="Shape 49"/>
-          <p:cNvSpPr/>
-          <p:nvPr/>
-        </p:nvSpPr>
-        <p:spPr>
-          <a:xfrm>
-            <a:off x="5254752" y="4169664"/>
-            <a:ext cx="685800" cy="475488"/>
-          </a:xfrm>
-          <a:prstGeom prst="rect">
-            <a:avLst>
-              <a:gd name="adj" fmla="val 7692"/>
-            </a:avLst>
-          </a:prstGeom>
-          <a:solidFill>
-            <a:srgbClr val="FFFFFF"/>
-          </a:solidFill>
-          <a:ln w="12700">
-            <a:solidFill>
-              <a:srgbClr val="DB2777"/>
-            </a:solidFill>
-            <a:prstDash val="solid"/>
-          </a:ln>
-        </p:spPr>
-      </p:sp>
-      <p:sp>
-        <p:nvSpPr>
-          <p:cNvPr id="52" name="Text 50"/>
-          <p:cNvSpPr/>
-          <p:nvPr/>
-        </p:nvSpPr>
-        <p:spPr>
-          <a:xfrm>
-            <a:off x="5254752" y="4169664"/>
-            <a:ext cx="685800" cy="475488"/>
-          </a:xfrm>
-          <a:prstGeom prst="rect">
-            <a:avLst/>
-          </a:prstGeom>
-          <a:noFill/>
-          <a:ln/>
-        </p:spPr>
-        <p:txBody>
-          <a:bodyPr wrap="square" lIns="0" tIns="0" rIns="0" bIns="0" rtlCol="0" anchor="ctr"/>
-          <a:lstStyle/>
-          <a:p>
-            <a:pPr algn="ctr" indent="0" marL="0">
-              <a:buNone/>
-            </a:pPr>
-            <a:r>
-              <a:rPr lang="en-US" sz="900" b="1" dirty="0">
-                <a:solidFill>
-                  <a:srgbClr val="9D174D"/>
-                </a:solidFill>
-                <a:latin typeface="Trebuchet MS" pitchFamily="34" charset="0"/>
-                <a:ea typeface="Trebuchet MS" pitchFamily="34" charset="-122"/>
-                <a:cs typeface="Trebuchet MS" pitchFamily="34" charset="-120"/>
-              </a:rPr>
-              <a:t>t</a:t>
-            </a:r>
-            <a:endParaRPr lang="en-US" sz="900" dirty="0"/>
-          </a:p>
-        </p:txBody>
-      </p:sp>
-      <p:sp>
-        <p:nvSpPr>
-          <p:cNvPr id="53" name="Shape 51"/>
-          <p:cNvSpPr/>
-          <p:nvPr/>
-        </p:nvSpPr>
-        <p:spPr>
-          <a:xfrm>
-            <a:off x="6062472" y="4169664"/>
-            <a:ext cx="685800" cy="475488"/>
-          </a:xfrm>
-          <a:prstGeom prst="rect">
-            <a:avLst>
-              <a:gd name="adj" fmla="val 7692"/>
-            </a:avLst>
-          </a:prstGeom>
-          <a:solidFill>
-            <a:srgbClr val="FFFFFF"/>
-          </a:solidFill>
-          <a:ln w="12700">
-            <a:solidFill>
-              <a:srgbClr val="DB2777"/>
-            </a:solidFill>
-            <a:prstDash val="solid"/>
-          </a:ln>
-        </p:spPr>
-      </p:sp>
-      <p:sp>
-        <p:nvSpPr>
-          <p:cNvPr id="54" name="Text 52"/>
-          <p:cNvSpPr/>
-          <p:nvPr/>
-        </p:nvSpPr>
-        <p:spPr>
-          <a:xfrm>
-            <a:off x="6062472" y="4169664"/>
-            <a:ext cx="685800" cy="475488"/>
-          </a:xfrm>
-          <a:prstGeom prst="rect">
-            <a:avLst/>
-          </a:prstGeom>
-          <a:noFill/>
-          <a:ln/>
-        </p:spPr>
-        <p:txBody>
-          <a:bodyPr wrap="square" lIns="0" tIns="0" rIns="0" bIns="0" rtlCol="0" anchor="ctr"/>
-          <a:lstStyle/>
-          <a:p>
-            <a:pPr algn="ctr" indent="0" marL="0">
-              <a:buNone/>
-            </a:pPr>
-            <a:r>
-              <a:rPr lang="en-US" sz="900" b="1" dirty="0">
-                <a:solidFill>
-                  <a:srgbClr val="9D174D"/>
-                </a:solidFill>
-                <a:latin typeface="Trebuchet MS" pitchFamily="34" charset="0"/>
-                <a:ea typeface="Trebuchet MS" pitchFamily="34" charset="-122"/>
-                <a:cs typeface="Trebuchet MS" pitchFamily="34" charset="-120"/>
-              </a:rPr>
-              <a:t>a</a:t>
-            </a:r>
-            <a:endParaRPr lang="en-US" sz="900" dirty="0"/>
-          </a:p>
-        </p:txBody>
-      </p:sp>
-      <p:sp>
-        <p:nvSpPr>
-          <p:cNvPr id="55" name="Shape 53"/>
-          <p:cNvSpPr/>
-          <p:nvPr/>
-        </p:nvSpPr>
-        <p:spPr>
-          <a:xfrm>
-            <a:off x="6870192" y="4169664"/>
-            <a:ext cx="685800" cy="475488"/>
-          </a:xfrm>
-          <a:prstGeom prst="rect">
-            <a:avLst>
-              <a:gd name="adj" fmla="val 7692"/>
-            </a:avLst>
-          </a:prstGeom>
-          <a:solidFill>
-            <a:srgbClr val="FFFFFF"/>
-          </a:solidFill>
-          <a:ln w="12700">
-            <a:solidFill>
-              <a:srgbClr val="DB2777"/>
-            </a:solidFill>
-            <a:prstDash val="solid"/>
-          </a:ln>
-        </p:spPr>
-      </p:sp>
-      <p:sp>
-        <p:nvSpPr>
-          <p:cNvPr id="56" name="Text 54"/>
-          <p:cNvSpPr/>
-          <p:nvPr/>
-        </p:nvSpPr>
-        <p:spPr>
-          <a:xfrm>
-            <a:off x="6870192" y="4169664"/>
-            <a:ext cx="685800" cy="475488"/>
-          </a:xfrm>
-          <a:prstGeom prst="rect">
-            <a:avLst/>
-          </a:prstGeom>
-          <a:noFill/>
-          <a:ln/>
-        </p:spPr>
-        <p:txBody>
-          <a:bodyPr wrap="square" lIns="0" tIns="0" rIns="0" bIns="0" rtlCol="0" anchor="ctr"/>
-          <a:lstStyle/>
-          <a:p>
-            <a:pPr algn="ctr" indent="0" marL="0">
-              <a:buNone/>
-            </a:pPr>
-            <a:r>
-              <a:rPr lang="en-US" sz="900" b="1" dirty="0">
-                <a:solidFill>
-                  <a:srgbClr val="9D174D"/>
-                </a:solidFill>
-                <a:latin typeface="Trebuchet MS" pitchFamily="34" charset="0"/>
-                <a:ea typeface="Trebuchet MS" pitchFamily="34" charset="-122"/>
-                <a:cs typeface="Trebuchet MS" pitchFamily="34" charset="-120"/>
-              </a:rPr>
-              <a:t>k</a:t>
-            </a:r>
-            <a:endParaRPr lang="en-US" sz="900" dirty="0"/>
-          </a:p>
-        </p:txBody>
-      </p:sp>
-      <p:sp>
-        <p:nvSpPr>
-          <p:cNvPr id="57" name="Shape 55"/>
-          <p:cNvSpPr/>
-          <p:nvPr/>
-        </p:nvSpPr>
-        <p:spPr>
-          <a:xfrm>
-            <a:off x="7677912" y="4169664"/>
-            <a:ext cx="685800" cy="475488"/>
-          </a:xfrm>
-          <a:prstGeom prst="rect">
-            <a:avLst>
-              <a:gd name="adj" fmla="val 7692"/>
-            </a:avLst>
-          </a:prstGeom>
-          <a:solidFill>
-            <a:srgbClr val="FFFFFF"/>
-          </a:solidFill>
-          <a:ln w="12700">
-            <a:solidFill>
-              <a:srgbClr val="DB2777"/>
-            </a:solidFill>
-            <a:prstDash val="solid"/>
-          </a:ln>
-        </p:spPr>
-      </p:sp>
-      <p:sp>
-        <p:nvSpPr>
-          <p:cNvPr id="58" name="Text 56"/>
-          <p:cNvSpPr/>
-          <p:nvPr/>
-        </p:nvSpPr>
-        <p:spPr>
-          <a:xfrm>
-            <a:off x="7677912" y="4169664"/>
-            <a:ext cx="685800" cy="475488"/>
-          </a:xfrm>
-          <a:prstGeom prst="rect">
-            <a:avLst/>
-          </a:prstGeom>
-          <a:noFill/>
-          <a:ln/>
-        </p:spPr>
-        <p:txBody>
-          <a:bodyPr wrap="square" lIns="0" tIns="0" rIns="0" bIns="0" rtlCol="0" anchor="ctr"/>
-          <a:lstStyle/>
-          <a:p>
-            <a:pPr algn="ctr" indent="0" marL="0">
-              <a:buNone/>
-            </a:pPr>
-            <a:r>
-              <a:rPr lang="en-US" sz="900" b="1" dirty="0">
-                <a:solidFill>
-                  <a:srgbClr val="9D174D"/>
-                </a:solidFill>
-                <a:latin typeface="Trebuchet MS" pitchFamily="34" charset="0"/>
-                <a:ea typeface="Trebuchet MS" pitchFamily="34" charset="-122"/>
-                <a:cs typeface="Trebuchet MS" pitchFamily="34" charset="-120"/>
-              </a:rPr>
-              <a:t>er</a:t>
+              <a:t>e</a:t>
             </a:r>
             <a:endParaRPr lang="en-US" sz="900" dirty="0"/>
           </a:p>
@@ -25391,7 +23999,7 @@
                 <a:ea typeface="Calibri" pitchFamily="34" charset="-122"/>
                 <a:cs typeface="Calibri" pitchFamily="34" charset="-120"/>
               </a:rPr>
-              <a:t>to seize or grasp</a:t>
+              <a:t>to seize or receive</a:t>
             </a:r>
             <a:endParaRPr lang="en-US" sz="850" dirty="0"/>
           </a:p>
@@ -27095,7 +25703,7 @@
                 <a:ea typeface="Calibri" pitchFamily="34" charset="-122"/>
                 <a:cs typeface="Calibri" pitchFamily="34" charset="-120"/>
               </a:rPr>
-              <a:t>to seize or grasp</a:t>
+              <a:t>to seize or receive</a:t>
             </a:r>
             <a:endParaRPr lang="en-US" sz="850" dirty="0"/>
           </a:p>
@@ -28212,7 +26820,7 @@
                 <a:ea typeface="Calibri" pitchFamily="34" charset="-122"/>
                 <a:cs typeface="Calibri" pitchFamily="34" charset="-120"/>
               </a:rPr>
-              <a:t>to seize or grasp</a:t>
+              <a:t>to seize or receive</a:t>
             </a:r>
             <a:endParaRPr lang="en-US" sz="850" dirty="0"/>
           </a:p>
@@ -29396,7 +28004,7 @@
                 <a:ea typeface="Trebuchet MS" pitchFamily="34" charset="-122"/>
                 <a:cs typeface="Trebuchet MS" pitchFamily="34" charset="-120"/>
               </a:rPr>
-              <a:t>mistaken</a:t>
+              <a:t>overtaking</a:t>
             </a:r>
             <a:endParaRPr lang="en-US" sz="2800" dirty="0"/>
           </a:p>
@@ -30223,7 +28831,7 @@
                 <a:ea typeface="Trebuchet MS" pitchFamily="34" charset="-122"/>
                 <a:cs typeface="Trebuchet MS" pitchFamily="34" charset="-120"/>
               </a:rPr>
-              <a:t>mistaken</a:t>
+              <a:t>overtaking</a:t>
             </a:r>
             <a:endParaRPr lang="en-US" sz="2800" dirty="0"/>
           </a:p>
@@ -30362,7 +28970,7 @@
                 <a:ea typeface="Trebuchet MS" pitchFamily="34" charset="-122"/>
                 <a:cs typeface="Trebuchet MS" pitchFamily="34" charset="-120"/>
               </a:rPr>
-              <a:t>mis</a:t>
+              <a:t>over</a:t>
             </a:r>
             <a:endParaRPr lang="en-US" sz="1300" dirty="0"/>
           </a:p>
@@ -30401,7 +29009,7 @@
                 <a:ea typeface="Calibri" pitchFamily="34" charset="-122"/>
                 <a:cs typeface="Calibri" pitchFamily="34" charset="-120"/>
               </a:rPr>
-              <a:t>wrongly</a:t>
+              <a:t>above or beyond</a:t>
             </a:r>
             <a:endParaRPr lang="en-US" sz="850" dirty="0"/>
           </a:p>
@@ -30513,7 +29121,7 @@
                 <a:ea typeface="Calibri" pitchFamily="34" charset="-122"/>
                 <a:cs typeface="Calibri" pitchFamily="34" charset="-120"/>
               </a:rPr>
-              <a:t>to seize or grasp</a:t>
+              <a:t>to seize or receive</a:t>
             </a:r>
             <a:endParaRPr lang="en-US" sz="850" dirty="0"/>
           </a:p>
@@ -30586,7 +29194,7 @@
                 <a:ea typeface="Trebuchet MS" pitchFamily="34" charset="-122"/>
                 <a:cs typeface="Trebuchet MS" pitchFamily="34" charset="-120"/>
               </a:rPr>
-              <a:t>n</a:t>
+              <a:t>ing</a:t>
             </a:r>
             <a:endParaRPr lang="en-US" sz="1300" dirty="0"/>
           </a:p>
@@ -30625,7 +29233,7 @@
                 <a:ea typeface="Calibri" pitchFamily="34" charset="-122"/>
                 <a:cs typeface="Calibri" pitchFamily="34" charset="-120"/>
               </a:rPr>
-              <a:t>past participle ending</a:t>
+              <a:t>ongoing action</a:t>
             </a:r>
             <a:endParaRPr lang="en-US" sz="850" dirty="0"/>
           </a:p>
@@ -30664,7 +29272,7 @@
                 <a:ea typeface="Calibri" pitchFamily="34" charset="-122"/>
                 <a:cs typeface="Calibri" pitchFamily="34" charset="-120"/>
               </a:rPr>
-              <a:t>'e' dropped before 'n' suffix</a:t>
+              <a:t>'e' dropped before vowel suffix</a:t>
             </a:r>
             <a:endParaRPr lang="en-US" sz="700" dirty="0"/>
           </a:p>
@@ -31359,7 +29967,7 @@
                 <a:ea typeface="Trebuchet MS" pitchFamily="34" charset="-122"/>
                 <a:cs typeface="Trebuchet MS" pitchFamily="34" charset="-120"/>
               </a:rPr>
-              <a:t>mistaken</a:t>
+              <a:t>overtaking</a:t>
             </a:r>
             <a:endParaRPr lang="en-US" sz="2800" dirty="0"/>
           </a:p>
@@ -31498,7 +30106,7 @@
                 <a:ea typeface="Trebuchet MS" pitchFamily="34" charset="-122"/>
                 <a:cs typeface="Trebuchet MS" pitchFamily="34" charset="-120"/>
               </a:rPr>
-              <a:t>mis</a:t>
+              <a:t>over</a:t>
             </a:r>
             <a:endParaRPr lang="en-US" sz="1300" dirty="0"/>
           </a:p>
@@ -31537,7 +30145,7 @@
                 <a:ea typeface="Calibri" pitchFamily="34" charset="-122"/>
                 <a:cs typeface="Calibri" pitchFamily="34" charset="-120"/>
               </a:rPr>
-              <a:t>wrongly</a:t>
+              <a:t>above or beyond</a:t>
             </a:r>
             <a:endParaRPr lang="en-US" sz="850" dirty="0"/>
           </a:p>
@@ -31649,7 +30257,7 @@
                 <a:ea typeface="Calibri" pitchFamily="34" charset="-122"/>
                 <a:cs typeface="Calibri" pitchFamily="34" charset="-120"/>
               </a:rPr>
-              <a:t>to seize or grasp</a:t>
+              <a:t>to seize or receive</a:t>
             </a:r>
             <a:endParaRPr lang="en-US" sz="850" dirty="0"/>
           </a:p>
@@ -31722,7 +30330,7 @@
                 <a:ea typeface="Trebuchet MS" pitchFamily="34" charset="-122"/>
                 <a:cs typeface="Trebuchet MS" pitchFamily="34" charset="-120"/>
               </a:rPr>
-              <a:t>n</a:t>
+              <a:t>ing</a:t>
             </a:r>
             <a:endParaRPr lang="en-US" sz="1300" dirty="0"/>
           </a:p>
@@ -31761,7 +30369,7 @@
                 <a:ea typeface="Calibri" pitchFamily="34" charset="-122"/>
                 <a:cs typeface="Calibri" pitchFamily="34" charset="-120"/>
               </a:rPr>
-              <a:t>past participle ending</a:t>
+              <a:t>ongoing action</a:t>
             </a:r>
             <a:endParaRPr lang="en-US" sz="850" dirty="0"/>
           </a:p>
@@ -31800,7 +30408,7 @@
                 <a:ea typeface="Calibri" pitchFamily="34" charset="-122"/>
                 <a:cs typeface="Calibri" pitchFamily="34" charset="-120"/>
               </a:rPr>
-              <a:t>'e' dropped before 'n' suffix</a:t>
+              <a:t>'e' dropped before vowel suffix</a:t>
             </a:r>
             <a:endParaRPr lang="en-US" sz="700" dirty="0"/>
           </a:p>
@@ -31907,8 +30515,8 @@
         </p:nvSpPr>
         <p:spPr>
           <a:xfrm>
-            <a:off x="2313432" y="3364992"/>
-            <a:ext cx="1645920" cy="475488"/>
+            <a:off x="1975104" y="3364992"/>
+            <a:ext cx="1554480" cy="475488"/>
           </a:xfrm>
           <a:prstGeom prst="rect">
             <a:avLst>
@@ -31934,8 +30542,8 @@
         </p:nvSpPr>
         <p:spPr>
           <a:xfrm>
-            <a:off x="2313432" y="3364992"/>
-            <a:ext cx="1645920" cy="475488"/>
+            <a:off x="1975104" y="3364992"/>
+            <a:ext cx="1554480" cy="475488"/>
           </a:xfrm>
           <a:prstGeom prst="rect">
             <a:avLst/>
@@ -31959,7 +30567,7 @@
                 <a:ea typeface="Trebuchet MS" pitchFamily="34" charset="-122"/>
                 <a:cs typeface="Trebuchet MS" pitchFamily="34" charset="-120"/>
               </a:rPr>
-              <a:t>mis</a:t>
+              <a:t>o</a:t>
             </a:r>
             <a:endParaRPr lang="en-US" sz="1400" dirty="0"/>
           </a:p>
@@ -31973,8 +30581,8 @@
         </p:nvSpPr>
         <p:spPr>
           <a:xfrm>
-            <a:off x="3959352" y="3364992"/>
-            <a:ext cx="411480" cy="475488"/>
+            <a:off x="3529584" y="3364992"/>
+            <a:ext cx="73152" cy="475488"/>
           </a:xfrm>
           <a:prstGeom prst="rect">
             <a:avLst/>
@@ -32012,8 +30620,8 @@
         </p:nvSpPr>
         <p:spPr>
           <a:xfrm>
-            <a:off x="4370832" y="3364992"/>
-            <a:ext cx="1645920" cy="475488"/>
+            <a:off x="3602736" y="3364992"/>
+            <a:ext cx="1554480" cy="475488"/>
           </a:xfrm>
           <a:prstGeom prst="rect">
             <a:avLst>
@@ -32039,8 +30647,8 @@
         </p:nvSpPr>
         <p:spPr>
           <a:xfrm>
-            <a:off x="4370832" y="3364992"/>
-            <a:ext cx="1645920" cy="475488"/>
+            <a:off x="3602736" y="3364992"/>
+            <a:ext cx="1554480" cy="475488"/>
           </a:xfrm>
           <a:prstGeom prst="rect">
             <a:avLst/>
@@ -32064,7 +30672,7 @@
                 <a:ea typeface="Trebuchet MS" pitchFamily="34" charset="-122"/>
                 <a:cs typeface="Trebuchet MS" pitchFamily="34" charset="-120"/>
               </a:rPr>
-              <a:t>ta</a:t>
+              <a:t>ver</a:t>
             </a:r>
             <a:endParaRPr lang="en-US" sz="1400" dirty="0"/>
           </a:p>
@@ -32078,8 +30686,8 @@
         </p:nvSpPr>
         <p:spPr>
           <a:xfrm>
-            <a:off x="6016752" y="3364992"/>
-            <a:ext cx="411480" cy="475488"/>
+            <a:off x="5157216" y="3364992"/>
+            <a:ext cx="73152" cy="475488"/>
           </a:xfrm>
           <a:prstGeom prst="rect">
             <a:avLst/>
@@ -32117,8 +30725,8 @@
         </p:nvSpPr>
         <p:spPr>
           <a:xfrm>
-            <a:off x="6428232" y="3364992"/>
-            <a:ext cx="1645920" cy="475488"/>
+            <a:off x="5230368" y="3364992"/>
+            <a:ext cx="1554480" cy="475488"/>
           </a:xfrm>
           <a:prstGeom prst="rect">
             <a:avLst>
@@ -32144,8 +30752,8 @@
         </p:nvSpPr>
         <p:spPr>
           <a:xfrm>
-            <a:off x="6428232" y="3364992"/>
-            <a:ext cx="1645920" cy="475488"/>
+            <a:off x="5230368" y="3364992"/>
+            <a:ext cx="1554480" cy="475488"/>
           </a:xfrm>
           <a:prstGeom prst="rect">
             <a:avLst/>
@@ -32169,7 +30777,7 @@
                 <a:ea typeface="Trebuchet MS" pitchFamily="34" charset="-122"/>
                 <a:cs typeface="Trebuchet MS" pitchFamily="34" charset="-120"/>
               </a:rPr>
-              <a:t>ken</a:t>
+              <a:t>ta</a:t>
             </a:r>
             <a:endParaRPr lang="en-US" sz="1400" dirty="0"/>
           </a:p>
@@ -32177,7 +30785,112 @@
       </p:sp>
       <p:sp>
         <p:nvSpPr>
-          <p:cNvPr id="37" name="Shape 35"/>
+          <p:cNvPr id="37" name="Text 35"/>
+          <p:cNvSpPr/>
+          <p:nvPr/>
+        </p:nvSpPr>
+        <p:spPr>
+          <a:xfrm>
+            <a:off x="6784848" y="3364992"/>
+            <a:ext cx="73152" cy="475488"/>
+          </a:xfrm>
+          <a:prstGeom prst="rect">
+            <a:avLst/>
+          </a:prstGeom>
+          <a:noFill/>
+          <a:ln/>
+        </p:spPr>
+        <p:txBody>
+          <a:bodyPr wrap="square" lIns="0" tIns="0" rIns="0" bIns="0" rtlCol="0" anchor="ctr"/>
+          <a:lstStyle/>
+          <a:p>
+            <a:pPr algn="ctr" indent="0" marL="0">
+              <a:buNone/>
+            </a:pPr>
+            <a:r>
+              <a:rPr lang="en-US" sz="1600" b="1" dirty="0">
+                <a:solidFill>
+                  <a:srgbClr val="0D9488"/>
+                </a:solidFill>
+                <a:latin typeface="Trebuchet MS" pitchFamily="34" charset="0"/>
+                <a:ea typeface="Trebuchet MS" pitchFamily="34" charset="-122"/>
+                <a:cs typeface="Trebuchet MS" pitchFamily="34" charset="-120"/>
+              </a:rPr>
+              <a:t>·</a:t>
+            </a:r>
+            <a:endParaRPr lang="en-US" sz="1600" dirty="0"/>
+          </a:p>
+        </p:txBody>
+      </p:sp>
+      <p:sp>
+        <p:nvSpPr>
+          <p:cNvPr id="38" name="Shape 36"/>
+          <p:cNvSpPr/>
+          <p:nvPr/>
+        </p:nvSpPr>
+        <p:spPr>
+          <a:xfrm>
+            <a:off x="6858000" y="3364992"/>
+            <a:ext cx="1554480" cy="475488"/>
+          </a:xfrm>
+          <a:prstGeom prst="rect">
+            <a:avLst>
+              <a:gd name="adj" fmla="val 9615"/>
+            </a:avLst>
+          </a:prstGeom>
+          <a:solidFill>
+            <a:srgbClr val="FFFFFF"/>
+          </a:solidFill>
+          <a:ln w="12700">
+            <a:solidFill>
+              <a:srgbClr val="0D9488"/>
+            </a:solidFill>
+            <a:prstDash val="solid"/>
+          </a:ln>
+        </p:spPr>
+      </p:sp>
+      <p:sp>
+        <p:nvSpPr>
+          <p:cNvPr id="39" name="Text 37"/>
+          <p:cNvSpPr/>
+          <p:nvPr/>
+        </p:nvSpPr>
+        <p:spPr>
+          <a:xfrm>
+            <a:off x="6858000" y="3364992"/>
+            <a:ext cx="1554480" cy="475488"/>
+          </a:xfrm>
+          <a:prstGeom prst="rect">
+            <a:avLst/>
+          </a:prstGeom>
+          <a:noFill/>
+          <a:ln/>
+        </p:spPr>
+        <p:txBody>
+          <a:bodyPr wrap="square" lIns="0" tIns="0" rIns="0" bIns="0" rtlCol="0" anchor="ctr"/>
+          <a:lstStyle/>
+          <a:p>
+            <a:pPr algn="ctr" indent="0" marL="0">
+              <a:buNone/>
+            </a:pPr>
+            <a:r>
+              <a:rPr lang="en-US" sz="1400" b="1" dirty="0">
+                <a:solidFill>
+                  <a:srgbClr val="0D9488"/>
+                </a:solidFill>
+                <a:latin typeface="Trebuchet MS" pitchFamily="34" charset="0"/>
+                <a:ea typeface="Trebuchet MS" pitchFamily="34" charset="-122"/>
+                <a:cs typeface="Trebuchet MS" pitchFamily="34" charset="-120"/>
+              </a:rPr>
+              <a:t>king</a:t>
+            </a:r>
+            <a:endParaRPr lang="en-US" sz="1400" dirty="0"/>
+          </a:p>
+        </p:txBody>
+      </p:sp>
+      <p:sp>
+        <p:nvSpPr>
+          <p:cNvPr id="40" name="Shape 38"/>
           <p:cNvSpPr/>
           <p:nvPr/>
         </p:nvSpPr>
@@ -32204,7 +30917,7 @@
       </p:sp>
       <p:sp>
         <p:nvSpPr>
-          <p:cNvPr id="38" name="Text 36"/>
+          <p:cNvPr id="41" name="Text 39"/>
           <p:cNvSpPr/>
           <p:nvPr/>
         </p:nvSpPr>
@@ -32243,7 +30956,7 @@
       </p:sp>
       <p:sp>
         <p:nvSpPr>
-          <p:cNvPr id="39" name="Shape 37"/>
+          <p:cNvPr id="42" name="Shape 40"/>
           <p:cNvSpPr/>
           <p:nvPr/>
         </p:nvSpPr>
@@ -32270,7 +30983,7 @@
       </p:sp>
       <p:sp>
         <p:nvSpPr>
-          <p:cNvPr id="40" name="Text 38"/>
+          <p:cNvPr id="43" name="Text 41"/>
           <p:cNvSpPr/>
           <p:nvPr/>
         </p:nvSpPr>
@@ -32732,7 +31445,7 @@
                 <a:ea typeface="Trebuchet MS" pitchFamily="34" charset="-122"/>
                 <a:cs typeface="Trebuchet MS" pitchFamily="34" charset="-120"/>
               </a:rPr>
-              <a:t>mistaken</a:t>
+              <a:t>overtaking</a:t>
             </a:r>
             <a:endParaRPr lang="en-US" sz="2800" dirty="0"/>
           </a:p>
@@ -32871,7 +31584,7 @@
                 <a:ea typeface="Trebuchet MS" pitchFamily="34" charset="-122"/>
                 <a:cs typeface="Trebuchet MS" pitchFamily="34" charset="-120"/>
               </a:rPr>
-              <a:t>mis</a:t>
+              <a:t>over</a:t>
             </a:r>
             <a:endParaRPr lang="en-US" sz="1300" dirty="0"/>
           </a:p>
@@ -32910,7 +31623,7 @@
                 <a:ea typeface="Calibri" pitchFamily="34" charset="-122"/>
                 <a:cs typeface="Calibri" pitchFamily="34" charset="-120"/>
               </a:rPr>
-              <a:t>wrongly</a:t>
+              <a:t>above or beyond</a:t>
             </a:r>
             <a:endParaRPr lang="en-US" sz="850" dirty="0"/>
           </a:p>
@@ -33022,7 +31735,7 @@
                 <a:ea typeface="Calibri" pitchFamily="34" charset="-122"/>
                 <a:cs typeface="Calibri" pitchFamily="34" charset="-120"/>
               </a:rPr>
-              <a:t>to seize or grasp</a:t>
+              <a:t>to seize or receive</a:t>
             </a:r>
             <a:endParaRPr lang="en-US" sz="850" dirty="0"/>
           </a:p>
@@ -33095,7 +31808,7 @@
                 <a:ea typeface="Trebuchet MS" pitchFamily="34" charset="-122"/>
                 <a:cs typeface="Trebuchet MS" pitchFamily="34" charset="-120"/>
               </a:rPr>
-              <a:t>n</a:t>
+              <a:t>ing</a:t>
             </a:r>
             <a:endParaRPr lang="en-US" sz="1300" dirty="0"/>
           </a:p>
@@ -33134,7 +31847,7 @@
                 <a:ea typeface="Calibri" pitchFamily="34" charset="-122"/>
                 <a:cs typeface="Calibri" pitchFamily="34" charset="-120"/>
               </a:rPr>
-              <a:t>past participle ending</a:t>
+              <a:t>ongoing action</a:t>
             </a:r>
             <a:endParaRPr lang="en-US" sz="850" dirty="0"/>
           </a:p>
@@ -33173,7 +31886,7 @@
                 <a:ea typeface="Calibri" pitchFamily="34" charset="-122"/>
                 <a:cs typeface="Calibri" pitchFamily="34" charset="-120"/>
               </a:rPr>
-              <a:t>'e' dropped before 'n' suffix</a:t>
+              <a:t>'e' dropped before vowel suffix</a:t>
             </a:r>
             <a:endParaRPr lang="en-US" sz="700" dirty="0"/>
           </a:p>
@@ -33280,8 +31993,8 @@
         </p:nvSpPr>
         <p:spPr>
           <a:xfrm>
-            <a:off x="2313432" y="3364992"/>
-            <a:ext cx="1645920" cy="475488"/>
+            <a:off x="1975104" y="3364992"/>
+            <a:ext cx="1554480" cy="475488"/>
           </a:xfrm>
           <a:prstGeom prst="rect">
             <a:avLst>
@@ -33307,8 +32020,8 @@
         </p:nvSpPr>
         <p:spPr>
           <a:xfrm>
-            <a:off x="2313432" y="3364992"/>
-            <a:ext cx="1645920" cy="475488"/>
+            <a:off x="1975104" y="3364992"/>
+            <a:ext cx="1554480" cy="475488"/>
           </a:xfrm>
           <a:prstGeom prst="rect">
             <a:avLst/>
@@ -33332,7 +32045,7 @@
                 <a:ea typeface="Trebuchet MS" pitchFamily="34" charset="-122"/>
                 <a:cs typeface="Trebuchet MS" pitchFamily="34" charset="-120"/>
               </a:rPr>
-              <a:t>mis</a:t>
+              <a:t>o</a:t>
             </a:r>
             <a:endParaRPr lang="en-US" sz="1400" dirty="0"/>
           </a:p>
@@ -33346,8 +32059,8 @@
         </p:nvSpPr>
         <p:spPr>
           <a:xfrm>
-            <a:off x="3959352" y="3364992"/>
-            <a:ext cx="411480" cy="475488"/>
+            <a:off x="3529584" y="3364992"/>
+            <a:ext cx="73152" cy="475488"/>
           </a:xfrm>
           <a:prstGeom prst="rect">
             <a:avLst/>
@@ -33385,8 +32098,8 @@
         </p:nvSpPr>
         <p:spPr>
           <a:xfrm>
-            <a:off x="4370832" y="3364992"/>
-            <a:ext cx="1645920" cy="475488"/>
+            <a:off x="3602736" y="3364992"/>
+            <a:ext cx="1554480" cy="475488"/>
           </a:xfrm>
           <a:prstGeom prst="rect">
             <a:avLst>
@@ -33412,8 +32125,8 @@
         </p:nvSpPr>
         <p:spPr>
           <a:xfrm>
-            <a:off x="4370832" y="3364992"/>
-            <a:ext cx="1645920" cy="475488"/>
+            <a:off x="3602736" y="3364992"/>
+            <a:ext cx="1554480" cy="475488"/>
           </a:xfrm>
           <a:prstGeom prst="rect">
             <a:avLst/>
@@ -33437,7 +32150,7 @@
                 <a:ea typeface="Trebuchet MS" pitchFamily="34" charset="-122"/>
                 <a:cs typeface="Trebuchet MS" pitchFamily="34" charset="-120"/>
               </a:rPr>
-              <a:t>ta</a:t>
+              <a:t>ver</a:t>
             </a:r>
             <a:endParaRPr lang="en-US" sz="1400" dirty="0"/>
           </a:p>
@@ -33451,8 +32164,8 @@
         </p:nvSpPr>
         <p:spPr>
           <a:xfrm>
-            <a:off x="6016752" y="3364992"/>
-            <a:ext cx="411480" cy="475488"/>
+            <a:off x="5157216" y="3364992"/>
+            <a:ext cx="73152" cy="475488"/>
           </a:xfrm>
           <a:prstGeom prst="rect">
             <a:avLst/>
@@ -33490,8 +32203,8 @@
         </p:nvSpPr>
         <p:spPr>
           <a:xfrm>
-            <a:off x="6428232" y="3364992"/>
-            <a:ext cx="1645920" cy="475488"/>
+            <a:off x="5230368" y="3364992"/>
+            <a:ext cx="1554480" cy="475488"/>
           </a:xfrm>
           <a:prstGeom prst="rect">
             <a:avLst>
@@ -33517,8 +32230,8 @@
         </p:nvSpPr>
         <p:spPr>
           <a:xfrm>
-            <a:off x="6428232" y="3364992"/>
-            <a:ext cx="1645920" cy="475488"/>
+            <a:off x="5230368" y="3364992"/>
+            <a:ext cx="1554480" cy="475488"/>
           </a:xfrm>
           <a:prstGeom prst="rect">
             <a:avLst/>
@@ -33542,7 +32255,7 @@
                 <a:ea typeface="Trebuchet MS" pitchFamily="34" charset="-122"/>
                 <a:cs typeface="Trebuchet MS" pitchFamily="34" charset="-120"/>
               </a:rPr>
-              <a:t>ken</a:t>
+              <a:t>ta</a:t>
             </a:r>
             <a:endParaRPr lang="en-US" sz="1400" dirty="0"/>
           </a:p>
@@ -33550,7 +32263,112 @@
       </p:sp>
       <p:sp>
         <p:nvSpPr>
-          <p:cNvPr id="37" name="Shape 35"/>
+          <p:cNvPr id="37" name="Text 35"/>
+          <p:cNvSpPr/>
+          <p:nvPr/>
+        </p:nvSpPr>
+        <p:spPr>
+          <a:xfrm>
+            <a:off x="6784848" y="3364992"/>
+            <a:ext cx="73152" cy="475488"/>
+          </a:xfrm>
+          <a:prstGeom prst="rect">
+            <a:avLst/>
+          </a:prstGeom>
+          <a:noFill/>
+          <a:ln/>
+        </p:spPr>
+        <p:txBody>
+          <a:bodyPr wrap="square" lIns="0" tIns="0" rIns="0" bIns="0" rtlCol="0" anchor="ctr"/>
+          <a:lstStyle/>
+          <a:p>
+            <a:pPr algn="ctr" indent="0" marL="0">
+              <a:buNone/>
+            </a:pPr>
+            <a:r>
+              <a:rPr lang="en-US" sz="1600" b="1" dirty="0">
+                <a:solidFill>
+                  <a:srgbClr val="0D9488"/>
+                </a:solidFill>
+                <a:latin typeface="Trebuchet MS" pitchFamily="34" charset="0"/>
+                <a:ea typeface="Trebuchet MS" pitchFamily="34" charset="-122"/>
+                <a:cs typeface="Trebuchet MS" pitchFamily="34" charset="-120"/>
+              </a:rPr>
+              <a:t>·</a:t>
+            </a:r>
+            <a:endParaRPr lang="en-US" sz="1600" dirty="0"/>
+          </a:p>
+        </p:txBody>
+      </p:sp>
+      <p:sp>
+        <p:nvSpPr>
+          <p:cNvPr id="38" name="Shape 36"/>
+          <p:cNvSpPr/>
+          <p:nvPr/>
+        </p:nvSpPr>
+        <p:spPr>
+          <a:xfrm>
+            <a:off x="6858000" y="3364992"/>
+            <a:ext cx="1554480" cy="475488"/>
+          </a:xfrm>
+          <a:prstGeom prst="rect">
+            <a:avLst>
+              <a:gd name="adj" fmla="val 9615"/>
+            </a:avLst>
+          </a:prstGeom>
+          <a:solidFill>
+            <a:srgbClr val="FFFFFF"/>
+          </a:solidFill>
+          <a:ln w="12700">
+            <a:solidFill>
+              <a:srgbClr val="0D9488"/>
+            </a:solidFill>
+            <a:prstDash val="solid"/>
+          </a:ln>
+        </p:spPr>
+      </p:sp>
+      <p:sp>
+        <p:nvSpPr>
+          <p:cNvPr id="39" name="Text 37"/>
+          <p:cNvSpPr/>
+          <p:nvPr/>
+        </p:nvSpPr>
+        <p:spPr>
+          <a:xfrm>
+            <a:off x="6858000" y="3364992"/>
+            <a:ext cx="1554480" cy="475488"/>
+          </a:xfrm>
+          <a:prstGeom prst="rect">
+            <a:avLst/>
+          </a:prstGeom>
+          <a:noFill/>
+          <a:ln/>
+        </p:spPr>
+        <p:txBody>
+          <a:bodyPr wrap="square" lIns="0" tIns="0" rIns="0" bIns="0" rtlCol="0" anchor="ctr"/>
+          <a:lstStyle/>
+          <a:p>
+            <a:pPr algn="ctr" indent="0" marL="0">
+              <a:buNone/>
+            </a:pPr>
+            <a:r>
+              <a:rPr lang="en-US" sz="1400" b="1" dirty="0">
+                <a:solidFill>
+                  <a:srgbClr val="0D9488"/>
+                </a:solidFill>
+                <a:latin typeface="Trebuchet MS" pitchFamily="34" charset="0"/>
+                <a:ea typeface="Trebuchet MS" pitchFamily="34" charset="-122"/>
+                <a:cs typeface="Trebuchet MS" pitchFamily="34" charset="-120"/>
+              </a:rPr>
+              <a:t>king</a:t>
+            </a:r>
+            <a:endParaRPr lang="en-US" sz="1400" dirty="0"/>
+          </a:p>
+        </p:txBody>
+      </p:sp>
+      <p:sp>
+        <p:nvSpPr>
+          <p:cNvPr id="40" name="Shape 38"/>
           <p:cNvSpPr/>
           <p:nvPr/>
         </p:nvSpPr>
@@ -33577,7 +32395,7 @@
       </p:sp>
       <p:sp>
         <p:nvSpPr>
-          <p:cNvPr id="38" name="Text 36"/>
+          <p:cNvPr id="41" name="Text 39"/>
           <p:cNvSpPr/>
           <p:nvPr/>
         </p:nvSpPr>
@@ -33616,7 +32434,7 @@
       </p:sp>
       <p:sp>
         <p:nvSpPr>
-          <p:cNvPr id="39" name="Shape 37"/>
+          <p:cNvPr id="42" name="Shape 40"/>
           <p:cNvSpPr/>
           <p:nvPr/>
         </p:nvSpPr>
@@ -33643,7 +32461,7 @@
       </p:sp>
       <p:sp>
         <p:nvSpPr>
-          <p:cNvPr id="40" name="Shape 38"/>
+          <p:cNvPr id="43" name="Shape 41"/>
           <p:cNvSpPr/>
           <p:nvPr/>
         </p:nvSpPr>
@@ -33670,7 +32488,7 @@
       </p:sp>
       <p:sp>
         <p:nvSpPr>
-          <p:cNvPr id="41" name="Text 39"/>
+          <p:cNvPr id="44" name="Text 42"/>
           <p:cNvSpPr/>
           <p:nvPr/>
         </p:nvSpPr>
@@ -33701,7 +32519,7 @@
                 <a:ea typeface="Trebuchet MS" pitchFamily="34" charset="-122"/>
                 <a:cs typeface="Trebuchet MS" pitchFamily="34" charset="-120"/>
               </a:rPr>
-              <a:t>m</a:t>
+              <a:t>o</a:t>
             </a:r>
             <a:endParaRPr lang="en-US" sz="900" dirty="0"/>
           </a:p>
@@ -33709,7 +32527,7 @@
       </p:sp>
       <p:sp>
         <p:nvSpPr>
-          <p:cNvPr id="42" name="Shape 40"/>
+          <p:cNvPr id="45" name="Shape 43"/>
           <p:cNvSpPr/>
           <p:nvPr/>
         </p:nvSpPr>
@@ -33736,7 +32554,7 @@
       </p:sp>
       <p:sp>
         <p:nvSpPr>
-          <p:cNvPr id="43" name="Text 41"/>
+          <p:cNvPr id="46" name="Text 44"/>
           <p:cNvSpPr/>
           <p:nvPr/>
         </p:nvSpPr>
@@ -33767,7 +32585,7 @@
                 <a:ea typeface="Trebuchet MS" pitchFamily="34" charset="-122"/>
                 <a:cs typeface="Trebuchet MS" pitchFamily="34" charset="-120"/>
               </a:rPr>
-              <a:t>i</a:t>
+              <a:t>v</a:t>
             </a:r>
             <a:endParaRPr lang="en-US" sz="900" dirty="0"/>
           </a:p>
@@ -33775,7 +32593,7 @@
       </p:sp>
       <p:sp>
         <p:nvSpPr>
-          <p:cNvPr id="44" name="Shape 42"/>
+          <p:cNvPr id="47" name="Shape 45"/>
           <p:cNvSpPr/>
           <p:nvPr/>
         </p:nvSpPr>
@@ -33802,7 +32620,7 @@
       </p:sp>
       <p:sp>
         <p:nvSpPr>
-          <p:cNvPr id="45" name="Text 43"/>
+          <p:cNvPr id="48" name="Text 46"/>
           <p:cNvSpPr/>
           <p:nvPr/>
         </p:nvSpPr>
@@ -33833,7 +32651,7 @@
                 <a:ea typeface="Trebuchet MS" pitchFamily="34" charset="-122"/>
                 <a:cs typeface="Trebuchet MS" pitchFamily="34" charset="-120"/>
               </a:rPr>
-              <a:t>s</a:t>
+              <a:t>er</a:t>
             </a:r>
             <a:endParaRPr lang="en-US" sz="900" dirty="0"/>
           </a:p>
@@ -33841,7 +32659,7 @@
       </p:sp>
       <p:sp>
         <p:nvSpPr>
-          <p:cNvPr id="46" name="Shape 44"/>
+          <p:cNvPr id="49" name="Shape 47"/>
           <p:cNvSpPr/>
           <p:nvPr/>
         </p:nvSpPr>
@@ -33868,7 +32686,7 @@
       </p:sp>
       <p:sp>
         <p:nvSpPr>
-          <p:cNvPr id="47" name="Text 45"/>
+          <p:cNvPr id="50" name="Text 48"/>
           <p:cNvSpPr/>
           <p:nvPr/>
         </p:nvSpPr>
@@ -33907,7 +32725,7 @@
       </p:sp>
       <p:sp>
         <p:nvSpPr>
-          <p:cNvPr id="48" name="Shape 46"/>
+          <p:cNvPr id="51" name="Shape 49"/>
           <p:cNvSpPr/>
           <p:nvPr/>
         </p:nvSpPr>
@@ -33934,7 +32752,7 @@
       </p:sp>
       <p:sp>
         <p:nvSpPr>
-          <p:cNvPr id="49" name="Text 47"/>
+          <p:cNvPr id="52" name="Text 50"/>
           <p:cNvSpPr/>
           <p:nvPr/>
         </p:nvSpPr>
@@ -33973,7 +32791,7 @@
       </p:sp>
       <p:sp>
         <p:nvSpPr>
-          <p:cNvPr id="50" name="Shape 48"/>
+          <p:cNvPr id="53" name="Shape 51"/>
           <p:cNvSpPr/>
           <p:nvPr/>
         </p:nvSpPr>
@@ -34000,7 +32818,7 @@
       </p:sp>
       <p:sp>
         <p:nvSpPr>
-          <p:cNvPr id="51" name="Text 49"/>
+          <p:cNvPr id="54" name="Text 52"/>
           <p:cNvSpPr/>
           <p:nvPr/>
         </p:nvSpPr>
@@ -34039,7 +32857,7 @@
       </p:sp>
       <p:sp>
         <p:nvSpPr>
-          <p:cNvPr id="52" name="Shape 50"/>
+          <p:cNvPr id="55" name="Shape 53"/>
           <p:cNvSpPr/>
           <p:nvPr/>
         </p:nvSpPr>
@@ -34066,7 +32884,7 @@
       </p:sp>
       <p:sp>
         <p:nvSpPr>
-          <p:cNvPr id="53" name="Text 51"/>
+          <p:cNvPr id="56" name="Text 54"/>
           <p:cNvSpPr/>
           <p:nvPr/>
         </p:nvSpPr>
@@ -34097,7 +32915,7 @@
                 <a:ea typeface="Trebuchet MS" pitchFamily="34" charset="-122"/>
                 <a:cs typeface="Trebuchet MS" pitchFamily="34" charset="-120"/>
               </a:rPr>
-              <a:t>e</a:t>
+              <a:t>i</a:t>
             </a:r>
             <a:endParaRPr lang="en-US" sz="900" dirty="0"/>
           </a:p>
@@ -34105,7 +32923,7 @@
       </p:sp>
       <p:sp>
         <p:nvSpPr>
-          <p:cNvPr id="54" name="Shape 52"/>
+          <p:cNvPr id="57" name="Shape 55"/>
           <p:cNvSpPr/>
           <p:nvPr/>
         </p:nvSpPr>
@@ -34132,7 +32950,7 @@
       </p:sp>
       <p:sp>
         <p:nvSpPr>
-          <p:cNvPr id="55" name="Text 53"/>
+          <p:cNvPr id="58" name="Text 56"/>
           <p:cNvSpPr/>
           <p:nvPr/>
         </p:nvSpPr>
@@ -34163,7 +32981,7 @@
                 <a:ea typeface="Trebuchet MS" pitchFamily="34" charset="-122"/>
                 <a:cs typeface="Trebuchet MS" pitchFamily="34" charset="-120"/>
               </a:rPr>
-              <a:t>n</a:t>
+              <a:t>ng</a:t>
             </a:r>
             <a:endParaRPr lang="en-US" sz="900" dirty="0"/>
           </a:p>
@@ -36053,7 +34871,7 @@
                 <a:ea typeface="Trebuchet MS" pitchFamily="34" charset="-122"/>
                 <a:cs typeface="Trebuchet MS" pitchFamily="34" charset="-120"/>
               </a:rPr>
-              <a:t>-en</a:t>
+              <a:t>-away</a:t>
             </a:r>
             <a:endParaRPr lang="en-US" sz="1300" dirty="0"/>
           </a:p>
@@ -36206,7 +35024,7 @@
                 <a:ea typeface="Trebuchet MS" pitchFamily="34" charset="-122"/>
                 <a:cs typeface="Trebuchet MS" pitchFamily="34" charset="-120"/>
               </a:rPr>
-              <a:t>-er</a:t>
+              <a:t>-en</a:t>
             </a:r>
             <a:endParaRPr lang="en-US" sz="1300" dirty="0"/>
           </a:p>
@@ -36359,7 +35177,7 @@
                 <a:ea typeface="Trebuchet MS" pitchFamily="34" charset="-122"/>
                 <a:cs typeface="Trebuchet MS" pitchFamily="34" charset="-120"/>
               </a:rPr>
-              <a:t>-ing</a:t>
+              <a:t>-er</a:t>
             </a:r>
             <a:endParaRPr lang="en-US" sz="1300" dirty="0"/>
           </a:p>
@@ -36512,7 +35330,7 @@
                 <a:ea typeface="Trebuchet MS" pitchFamily="34" charset="-122"/>
                 <a:cs typeface="Trebuchet MS" pitchFamily="34" charset="-120"/>
               </a:rPr>
-              <a:t>-n</a:t>
+              <a:t>-ing</a:t>
             </a:r>
             <a:endParaRPr lang="en-US" sz="1300" dirty="0"/>
           </a:p>
@@ -36665,7 +35483,7 @@
                 <a:ea typeface="Trebuchet MS" pitchFamily="34" charset="-122"/>
                 <a:cs typeface="Trebuchet MS" pitchFamily="34" charset="-120"/>
               </a:rPr>
-              <a:t>-off</a:t>
+              <a:t>-over</a:t>
             </a:r>
             <a:endParaRPr lang="en-US" sz="1300" dirty="0"/>
           </a:p>
@@ -36770,7 +35588,7 @@
                 <a:ea typeface="Trebuchet MS" pitchFamily="34" charset="-122"/>
                 <a:cs typeface="Trebuchet MS" pitchFamily="34" charset="-120"/>
               </a:rPr>
-              <a:t>mistake</a:t>
+              <a:t>retake</a:t>
             </a:r>
             <a:endParaRPr lang="en-US" sz="1200" dirty="0"/>
           </a:p>
@@ -36836,7 +35654,7 @@
                 <a:ea typeface="Trebuchet MS" pitchFamily="34" charset="-122"/>
                 <a:cs typeface="Trebuchet MS" pitchFamily="34" charset="-120"/>
               </a:rPr>
-              <a:t>retake</a:t>
+              <a:t>undertake</a:t>
             </a:r>
             <a:endParaRPr lang="en-US" sz="1200" dirty="0"/>
           </a:p>
@@ -36968,7 +35786,7 @@
                 <a:ea typeface="Trebuchet MS" pitchFamily="34" charset="-122"/>
                 <a:cs typeface="Trebuchet MS" pitchFamily="34" charset="-120"/>
               </a:rPr>
-              <a:t>undertake</a:t>
+              <a:t>mistaken</a:t>
             </a:r>
             <a:endParaRPr lang="en-US" sz="1200" dirty="0"/>
           </a:p>
@@ -37034,7 +35852,7 @@
                 <a:ea typeface="Trebuchet MS" pitchFamily="34" charset="-122"/>
                 <a:cs typeface="Trebuchet MS" pitchFamily="34" charset="-120"/>
               </a:rPr>
-              <a:t>outtake</a:t>
+              <a:t>takeover</a:t>
             </a:r>
             <a:endParaRPr lang="en-US" sz="1200" dirty="0"/>
           </a:p>
@@ -37100,7 +35918,7 @@
                 <a:ea typeface="Trebuchet MS" pitchFamily="34" charset="-122"/>
                 <a:cs typeface="Trebuchet MS" pitchFamily="34" charset="-120"/>
               </a:rPr>
-              <a:t>taken</a:t>
+              <a:t>outtake</a:t>
             </a:r>
             <a:endParaRPr lang="en-US" sz="1200" dirty="0"/>
           </a:p>
@@ -37166,7 +35984,7 @@
                 <a:ea typeface="Trebuchet MS" pitchFamily="34" charset="-122"/>
                 <a:cs typeface="Trebuchet MS" pitchFamily="34" charset="-120"/>
               </a:rPr>
-              <a:t>taker</a:t>
+              <a:t>intake</a:t>
             </a:r>
             <a:endParaRPr lang="en-US" sz="1200" dirty="0"/>
           </a:p>
@@ -37232,7 +36050,7 @@
                 <a:ea typeface="Trebuchet MS" pitchFamily="34" charset="-122"/>
                 <a:cs typeface="Trebuchet MS" pitchFamily="34" charset="-120"/>
               </a:rPr>
-              <a:t>taking</a:t>
+              <a:t>undertaken</a:t>
             </a:r>
             <a:endParaRPr lang="en-US" sz="1200" dirty="0"/>
           </a:p>
@@ -38420,7 +37238,7 @@
                 <a:ea typeface="Calibri" pitchFamily="34" charset="-122"/>
                 <a:cs typeface="Calibri" pitchFamily="34" charset="-120"/>
               </a:rPr>
-              <a:t>1.  The word 'overtake' contains the root 'take' meaning to seize or grasp.</a:t>
+              <a:t>1.  The word 'undertake' means to start or carry out a task.</a:t>
             </a:r>
             <a:endParaRPr lang="en-US" sz="1300" dirty="0"/>
           </a:p>
@@ -38559,7 +37377,7 @@
                 <a:ea typeface="Calibri" pitchFamily="34" charset="-122"/>
                 <a:cs typeface="Calibri" pitchFamily="34" charset="-120"/>
               </a:rPr>
-              <a:t>2.  The root 'take' comes from the Latin language.</a:t>
+              <a:t>2.  The prefix 'mis' can combine with 'take' to form the word 'mistake'.</a:t>
             </a:r>
             <a:endParaRPr lang="en-US" sz="1300" dirty="0"/>
           </a:p>
@@ -38582,11 +37400,11 @@
             </a:avLst>
           </a:prstGeom>
           <a:solidFill>
-            <a:srgbClr val="FEE2E2"/>
-          </a:solidFill>
-          <a:ln w="12700">
-            <a:solidFill>
-              <a:srgbClr val="DC2626"/>
+            <a:srgbClr val="DCFCE7"/>
+          </a:solidFill>
+          <a:ln w="12700">
+            <a:solidFill>
+              <a:srgbClr val="16A34A"/>
             </a:solidFill>
             <a:prstDash val="solid"/>
           </a:ln>
@@ -38619,13 +37437,13 @@
             <a:r>
               <a:rPr lang="en-US" sz="1100" b="1" dirty="0">
                 <a:solidFill>
-                  <a:srgbClr val="DC2626"/>
+                  <a:srgbClr val="16A34A"/>
                 </a:solidFill>
                 <a:latin typeface="Trebuchet MS" pitchFamily="34" charset="0"/>
                 <a:ea typeface="Trebuchet MS" pitchFamily="34" charset="-122"/>
                 <a:cs typeface="Trebuchet MS" pitchFamily="34" charset="-120"/>
               </a:rPr>
-              <a:t>FALSE</a:t>
+              <a:t>TRUE</a:t>
             </a:r>
             <a:endParaRPr lang="en-US" sz="1100" dirty="0"/>
           </a:p>
@@ -38698,7 +37516,7 @@
                 <a:ea typeface="Calibri" pitchFamily="34" charset="-122"/>
                 <a:cs typeface="Calibri" pitchFamily="34" charset="-120"/>
               </a:rPr>
-              <a:t>3.  A 'mistake' is a word formed by adding the prefix 'mis-' to the root 'take'.</a:t>
+              <a:t>3.  The word 'intake' means to push something away.</a:t>
             </a:r>
             <a:endParaRPr lang="en-US" sz="1300" dirty="0"/>
           </a:p>
@@ -38721,11 +37539,11 @@
             </a:avLst>
           </a:prstGeom>
           <a:solidFill>
-            <a:srgbClr val="DCFCE7"/>
-          </a:solidFill>
-          <a:ln w="12700">
-            <a:solidFill>
-              <a:srgbClr val="16A34A"/>
+            <a:srgbClr val="FEE2E2"/>
+          </a:solidFill>
+          <a:ln w="12700">
+            <a:solidFill>
+              <a:srgbClr val="DC2626"/>
             </a:solidFill>
             <a:prstDash val="solid"/>
           </a:ln>
@@ -38758,13 +37576,13 @@
             <a:r>
               <a:rPr lang="en-US" sz="1100" b="1" dirty="0">
                 <a:solidFill>
-                  <a:srgbClr val="16A34A"/>
+                  <a:srgbClr val="DC2626"/>
                 </a:solidFill>
                 <a:latin typeface="Trebuchet MS" pitchFamily="34" charset="0"/>
                 <a:ea typeface="Trebuchet MS" pitchFamily="34" charset="-122"/>
                 <a:cs typeface="Trebuchet MS" pitchFamily="34" charset="-120"/>
               </a:rPr>
-              <a:t>TRUE</a:t>
+              <a:t>FALSE</a:t>
             </a:r>
             <a:endParaRPr lang="en-US" sz="1100" dirty="0"/>
           </a:p>
@@ -38837,7 +37655,7 @@
                 <a:ea typeface="Calibri" pitchFamily="34" charset="-122"/>
                 <a:cs typeface="Calibri" pitchFamily="34" charset="-120"/>
               </a:rPr>
-              <a:t>4.  The word 'undertake' means to start and carry out a task.</a:t>
+              <a:t>4.  The word 'retake' contains the root 'take' meaning to seize or receive.</a:t>
             </a:r>
             <a:endParaRPr lang="en-US" sz="1300" dirty="0"/>
           </a:p>
@@ -38976,7 +37794,7 @@
                 <a:ea typeface="Calibri" pitchFamily="34" charset="-122"/>
                 <a:cs typeface="Calibri" pitchFamily="34" charset="-120"/>
               </a:rPr>
-              <a:t>5.  The suffix '-er' in 'taker' means to do something again.</a:t>
+              <a:t>5.  The root 'take' comes from Latin.</a:t>
             </a:r>
             <a:endParaRPr lang="en-US" sz="1300" dirty="0"/>
           </a:p>
@@ -39615,7 +38433,7 @@
                 <a:ea typeface="Trebuchet MS" pitchFamily="34" charset="-122"/>
                 <a:cs typeface="Trebuchet MS" pitchFamily="34" charset="-120"/>
               </a:rPr>
-              <a:t>mistake</a:t>
+              <a:t>retake</a:t>
             </a:r>
             <a:endParaRPr lang="en-US" sz="1300" dirty="0"/>
           </a:p>
@@ -39681,7 +38499,7 @@
                 <a:ea typeface="Trebuchet MS" pitchFamily="34" charset="-122"/>
                 <a:cs typeface="Trebuchet MS" pitchFamily="34" charset="-120"/>
               </a:rPr>
-              <a:t>retake</a:t>
+              <a:t>undertake</a:t>
             </a:r>
             <a:endParaRPr lang="en-US" sz="1300" dirty="0"/>
           </a:p>
@@ -39813,7 +38631,7 @@
                 <a:ea typeface="Trebuchet MS" pitchFamily="34" charset="-122"/>
                 <a:cs typeface="Trebuchet MS" pitchFamily="34" charset="-120"/>
               </a:rPr>
-              <a:t>undertake</a:t>
+              <a:t>mistaken</a:t>
             </a:r>
             <a:endParaRPr lang="en-US" sz="1300" dirty="0"/>
           </a:p>
@@ -39879,7 +38697,7 @@
                 <a:ea typeface="Trebuchet MS" pitchFamily="34" charset="-122"/>
                 <a:cs typeface="Trebuchet MS" pitchFamily="34" charset="-120"/>
               </a:rPr>
-              <a:t>outtake</a:t>
+              <a:t>takeover</a:t>
             </a:r>
             <a:endParaRPr lang="en-US" sz="1300" dirty="0"/>
           </a:p>
@@ -39945,7 +38763,7 @@
                 <a:ea typeface="Trebuchet MS" pitchFamily="34" charset="-122"/>
                 <a:cs typeface="Trebuchet MS" pitchFamily="34" charset="-120"/>
               </a:rPr>
-              <a:t>taken</a:t>
+              <a:t>outtake</a:t>
             </a:r>
             <a:endParaRPr lang="en-US" sz="1300" dirty="0"/>
           </a:p>
@@ -40011,7 +38829,7 @@
                 <a:ea typeface="Trebuchet MS" pitchFamily="34" charset="-122"/>
                 <a:cs typeface="Trebuchet MS" pitchFamily="34" charset="-120"/>
               </a:rPr>
-              <a:t>taker</a:t>
+              <a:t>intake</a:t>
             </a:r>
             <a:endParaRPr lang="en-US" sz="1300" dirty="0"/>
           </a:p>
@@ -40732,7 +39550,7 @@
                 <a:ea typeface="Trebuchet MS" pitchFamily="34" charset="-122"/>
                 <a:cs typeface="Trebuchet MS" pitchFamily="34" charset="-120"/>
               </a:rPr>
-              <a:t>-en</a:t>
+              <a:t>-away</a:t>
             </a:r>
             <a:endParaRPr lang="en-US" sz="1300" dirty="0"/>
           </a:p>
@@ -40885,7 +39703,7 @@
                 <a:ea typeface="Trebuchet MS" pitchFamily="34" charset="-122"/>
                 <a:cs typeface="Trebuchet MS" pitchFamily="34" charset="-120"/>
               </a:rPr>
-              <a:t>-er</a:t>
+              <a:t>-en</a:t>
             </a:r>
             <a:endParaRPr lang="en-US" sz="1300" dirty="0"/>
           </a:p>
@@ -41038,7 +39856,7 @@
                 <a:ea typeface="Trebuchet MS" pitchFamily="34" charset="-122"/>
                 <a:cs typeface="Trebuchet MS" pitchFamily="34" charset="-120"/>
               </a:rPr>
-              <a:t>-ing</a:t>
+              <a:t>-er</a:t>
             </a:r>
             <a:endParaRPr lang="en-US" sz="1300" dirty="0"/>
           </a:p>
@@ -41191,7 +40009,7 @@
                 <a:ea typeface="Trebuchet MS" pitchFamily="34" charset="-122"/>
                 <a:cs typeface="Trebuchet MS" pitchFamily="34" charset="-120"/>
               </a:rPr>
-              <a:t>-n</a:t>
+              <a:t>-ing</a:t>
             </a:r>
             <a:endParaRPr lang="en-US" sz="1300" dirty="0"/>
           </a:p>
@@ -41344,7 +40162,7 @@
                 <a:ea typeface="Trebuchet MS" pitchFamily="34" charset="-122"/>
                 <a:cs typeface="Trebuchet MS" pitchFamily="34" charset="-120"/>
               </a:rPr>
-              <a:t>-off</a:t>
+              <a:t>-over</a:t>
             </a:r>
             <a:endParaRPr lang="en-US" sz="1300" dirty="0"/>
           </a:p>
@@ -41622,7 +40440,7 @@
         <p:spPr>
           <a:xfrm>
             <a:off x="4453128" y="4178808"/>
-            <a:ext cx="822960" cy="420624"/>
+            <a:ext cx="1097280" cy="420624"/>
           </a:xfrm>
           <a:prstGeom prst="rect">
             <a:avLst>
@@ -41656,7 +40474,7 @@
         <p:spPr>
           <a:xfrm>
             <a:off x="4453128" y="4178808"/>
-            <a:ext cx="822960" cy="420624"/>
+            <a:ext cx="1097280" cy="420624"/>
           </a:xfrm>
           <a:prstGeom prst="rect">
             <a:avLst/>
@@ -41680,7 +40498,7 @@
                 <a:ea typeface="Trebuchet MS" pitchFamily="34" charset="-122"/>
                 <a:cs typeface="Trebuchet MS" pitchFamily="34" charset="-120"/>
               </a:rPr>
-              <a:t>-en</a:t>
+              <a:t>-away</a:t>
             </a:r>
             <a:endParaRPr lang="en-US" sz="1300" dirty="0"/>
           </a:p>
@@ -41694,7 +40512,7 @@
         </p:nvSpPr>
         <p:spPr>
           <a:xfrm>
-            <a:off x="5349240" y="4178808"/>
+            <a:off x="5623560" y="4178808"/>
             <a:ext cx="365760" cy="420624"/>
           </a:xfrm>
           <a:prstGeom prst="rect">
@@ -41733,7 +40551,7 @@
         </p:nvSpPr>
         <p:spPr>
           <a:xfrm>
-            <a:off x="5760720" y="4178808"/>
+            <a:off x="6035040" y="4178808"/>
             <a:ext cx="2194560" cy="420624"/>
           </a:xfrm>
           <a:prstGeom prst="rect">
@@ -41760,7 +40578,7 @@
         </p:nvSpPr>
         <p:spPr>
           <a:xfrm>
-            <a:off x="5760720" y="4178808"/>
+            <a:off x="6035040" y="4178808"/>
             <a:ext cx="2194560" cy="420624"/>
           </a:xfrm>
           <a:prstGeom prst="rect">
@@ -41785,7 +40603,7 @@
                 <a:ea typeface="Trebuchet MS" pitchFamily="34" charset="-122"/>
                 <a:cs typeface="Trebuchet MS" pitchFamily="34" charset="-120"/>
               </a:rPr>
-              <a:t>mistake</a:t>
+              <a:t>retake</a:t>
             </a:r>
             <a:endParaRPr lang="en-US" sz="1400" dirty="0"/>
           </a:p>
@@ -42189,7 +41007,7 @@
                 <a:ea typeface="Trebuchet MS" pitchFamily="34" charset="-122"/>
                 <a:cs typeface="Trebuchet MS" pitchFamily="34" charset="-120"/>
               </a:rPr>
-              <a:t>mistake</a:t>
+              <a:t>retake</a:t>
             </a:r>
             <a:endParaRPr lang="en-US" sz="1200" dirty="0"/>
           </a:p>
@@ -42255,7 +41073,7 @@
                 <a:ea typeface="Calibri" pitchFamily="34" charset="-122"/>
                 <a:cs typeface="Calibri" pitchFamily="34" charset="-120"/>
               </a:rPr>
-              <a:t>Something you do wrong by accident, like getting an answer incorrect.</a:t>
+              <a:t>To take something again, like sitting a test a second time.</a:t>
             </a:r>
             <a:endParaRPr lang="en-US" sz="1200" dirty="0"/>
           </a:p>
@@ -42328,7 +41146,7 @@
                 <a:ea typeface="Trebuchet MS" pitchFamily="34" charset="-122"/>
                 <a:cs typeface="Trebuchet MS" pitchFamily="34" charset="-120"/>
               </a:rPr>
-              <a:t>retake</a:t>
+              <a:t>undertake</a:t>
             </a:r>
             <a:endParaRPr lang="en-US" sz="1200" dirty="0"/>
           </a:p>
@@ -42394,7 +41212,7 @@
                 <a:ea typeface="Calibri" pitchFamily="34" charset="-122"/>
                 <a:cs typeface="Calibri" pitchFamily="34" charset="-120"/>
               </a:rPr>
-              <a:t>To move past someone or something that was ahead of you.</a:t>
+              <a:t>To catch up with and move past someone or something.</a:t>
             </a:r>
             <a:endParaRPr lang="en-US" sz="1200" dirty="0"/>
           </a:p>
@@ -42533,7 +41351,7 @@
                 <a:ea typeface="Calibri" pitchFamily="34" charset="-122"/>
                 <a:cs typeface="Calibri" pitchFamily="34" charset="-120"/>
               </a:rPr>
-              <a:t>When something has already been grabbed or is no longer available.</a:t>
+              <a:t>A part of a film or recording that is removed and not used in the final version.</a:t>
             </a:r>
             <a:endParaRPr lang="en-US" sz="1200" dirty="0"/>
           </a:p>
@@ -42606,7 +41424,7 @@
                 <a:ea typeface="Trebuchet MS" pitchFamily="34" charset="-122"/>
                 <a:cs typeface="Trebuchet MS" pitchFamily="34" charset="-120"/>
               </a:rPr>
-              <a:t>undertake</a:t>
+              <a:t>mistaken</a:t>
             </a:r>
             <a:endParaRPr lang="en-US" sz="1200" dirty="0"/>
           </a:p>
@@ -42672,7 +41490,7 @@
                 <a:ea typeface="Calibri" pitchFamily="34" charset="-122"/>
                 <a:cs typeface="Calibri" pitchFamily="34" charset="-120"/>
               </a:rPr>
-              <a:t>To start and agree to do a task or job.</a:t>
+              <a:t>When you have the wrong idea or have made an error.</a:t>
             </a:r>
             <a:endParaRPr lang="en-US" sz="1200" dirty="0"/>
           </a:p>
@@ -42745,7 +41563,7 @@
                 <a:ea typeface="Trebuchet MS" pitchFamily="34" charset="-122"/>
                 <a:cs typeface="Trebuchet MS" pitchFamily="34" charset="-120"/>
               </a:rPr>
-              <a:t>outtake</a:t>
+              <a:t>takeover</a:t>
             </a:r>
             <a:endParaRPr lang="en-US" sz="1200" dirty="0"/>
           </a:p>
@@ -42811,7 +41629,7 @@
                 <a:ea typeface="Calibri" pitchFamily="34" charset="-122"/>
                 <a:cs typeface="Calibri" pitchFamily="34" charset="-120"/>
               </a:rPr>
-              <a:t>A part of a film or recording that was not used in the final version.</a:t>
+              <a:t>When one person or group takes control of something from another.</a:t>
             </a:r>
             <a:endParaRPr lang="en-US" sz="1200" dirty="0"/>
           </a:p>
@@ -42884,7 +41702,7 @@
                 <a:ea typeface="Trebuchet MS" pitchFamily="34" charset="-122"/>
                 <a:cs typeface="Trebuchet MS" pitchFamily="34" charset="-120"/>
               </a:rPr>
-              <a:t>taken</a:t>
+              <a:t>outtake</a:t>
             </a:r>
             <a:endParaRPr lang="en-US" sz="1200" dirty="0"/>
           </a:p>
@@ -42950,7 +41768,7 @@
                 <a:ea typeface="Calibri" pitchFamily="34" charset="-122"/>
                 <a:cs typeface="Calibri" pitchFamily="34" charset="-120"/>
               </a:rPr>
-              <a:t>A person who accepts or takes something that is offered.</a:t>
+              <a:t>The amount of something you take in, like food or air.</a:t>
             </a:r>
             <a:endParaRPr lang="en-US" sz="1200" dirty="0"/>
           </a:p>
@@ -43023,7 +41841,7 @@
                 <a:ea typeface="Trebuchet MS" pitchFamily="34" charset="-122"/>
                 <a:cs typeface="Trebuchet MS" pitchFamily="34" charset="-120"/>
               </a:rPr>
-              <a:t>taker</a:t>
+              <a:t>intake</a:t>
             </a:r>
             <a:endParaRPr lang="en-US" sz="1200" dirty="0"/>
           </a:p>
@@ -43089,7 +41907,7 @@
                 <a:ea typeface="Calibri" pitchFamily="34" charset="-122"/>
                 <a:cs typeface="Calibri" pitchFamily="34" charset="-120"/>
               </a:rPr>
-              <a:t>To take something again, like doing a test a second time.</a:t>
+              <a:t>To start doing something that takes effort or responsibility.</a:t>
             </a:r>
             <a:endParaRPr lang="en-US" sz="1200" dirty="0"/>
           </a:p>
@@ -43584,7 +42402,7 @@
                 <a:ea typeface="Calibri" pitchFamily="34" charset="-122"/>
                 <a:cs typeface="Calibri" pitchFamily="34" charset="-120"/>
               </a:rPr>
-              <a:t>The faster runner managed to overtake her competitor just before the finish line.</a:t>
+              <a:t>The team decided to undertake the difficult challenge of cleaning up the local park.</a:t>
             </a:r>
             <a:endParaRPr lang="en-US" sz="1500" dirty="0"/>
           </a:p>
@@ -43748,7 +42566,7 @@
                 <a:ea typeface="Calibri" pitchFamily="34" charset="-122"/>
                 <a:cs typeface="Calibri" pitchFamily="34" charset="-120"/>
               </a:rPr>
-              <a:t>Our class will undertake a science project about the solar system this term.</a:t>
+              <a:t>She had to retake the maths test because she had been sick on the day of the first one.</a:t>
             </a:r>
             <a:endParaRPr lang="en-US" sz="1500" dirty="0"/>
           </a:p>
@@ -43912,7 +42730,7 @@
                 <a:ea typeface="Calibri" pitchFamily="34" charset="-122"/>
                 <a:cs typeface="Calibri" pitchFamily="34" charset="-120"/>
               </a:rPr>
-              <a:t>He realised his mistake as soon as the teacher handed back the marked test.</a:t>
+              <a:t>The faster runner began to overtake his competitors in the final lap of the race.</a:t>
             </a:r>
             <a:endParaRPr lang="en-US" sz="1500" dirty="0"/>
           </a:p>
